--- a/Fase 1/Evidencias Grupales/PerfilMedico_ExposicionFase1.pptx
+++ b/Fase 1/Evidencias Grupales/PerfilMedico_ExposicionFase1.pptx
@@ -4858,7 +4858,7 @@
                 <a:ea typeface="Calibri" pitchFamily="34" charset="-122"/>
                 <a:cs typeface="Calibri" pitchFamily="34" charset="-120"/>
               </a:rPr>
-              <a:t>API REST, autenticación JWT, lógica de negocio, integración de notificaciones e IA</a:t>
+              <a:t>API REST, autenticación JWT, lógica de negocio, orquestación de la API de IA (consultas y manejo de errores) e integración de notificaciones</a:t>
             </a:r>
             <a:endParaRPr lang="en-US" sz="1150" dirty="0"/>
           </a:p>
@@ -5093,7 +5093,7 @@
                 <a:ea typeface="Calibri" pitchFamily="34" charset="-122"/>
                 <a:cs typeface="Calibri" pitchFamily="34" charset="-120"/>
               </a:rPr>
-              <a:t>Modelado de BD, indicadores y reportes de cumplimiento, integración del módulo de IA</a:t>
+              <a:t>Modelado de BD, indicadores y reportes de cumplimiento, define el contexto enviado a la IA y almacena sus resultados</a:t>
             </a:r>
             <a:endParaRPr lang="en-US" sz="1150" dirty="0"/>
           </a:p>
@@ -14226,7 +14226,7 @@
                 <a:ea typeface="Calibri" pitchFamily="34" charset="-122"/>
                 <a:cs typeface="Calibri" pitchFamily="34" charset="-120"/>
               </a:rPr>
-              <a:t>Diseñar y estructurar la base de datos en PostgreSQL, junto con integrar el módulo de IA, refleja directamente mi interés en el modelado de datos y en la resolución práctica de problemas con inteligencia artificial. Me proyecto en ingeniería y gestión de datos.</a:t>
+              <a:t>Diseñar y estructurar la base de datos en PostgreSQL, definiendo qué datos sirven de contexto para el módulo de IA y cómo se almacenan sus resultados, refleja directamente mi interés en el modelado de datos y en la resolución práctica de problemas con inteligencia artificial. Me proyecto en ingeniería y gestión de datos.</a:t>
             </a:r>
             <a:endParaRPr lang="en-US" sz="1150" dirty="0"/>
           </a:p>

--- a/Fase 1/Evidencias Grupales/PerfilMedico_ExposicionFase1.pptx
+++ b/Fase 1/Evidencias Grupales/PerfilMedico_ExposicionFase1.pptx
@@ -10730,7 +10730,7 @@
                 <a:ea typeface="Calibri" pitchFamily="34" charset="-122"/>
                 <a:cs typeface="Calibri" pitchFamily="34" charset="-120"/>
               </a:rPr>
-              <a:t>Plataforma móvil y web que centraliza la salud personal y familiar bajo un modelo de cuenta titular con perfiles dependientes, con seguimiento continuo de actividades de cuidado.</a:t>
+              <a:t>Aplicación móvil que centraliza la salud personal y familiar bajo un modelo de cuenta titular con perfiles dependientes, con seguimiento continuo de actividades de cuidado.</a:t>
             </a:r>
             <a:endParaRPr lang="en-US" sz="1400" dirty="0"/>
           </a:p>
@@ -14184,7 +14184,7 @@
                 <a:ea typeface="Calibri" pitchFamily="34" charset="-122"/>
                 <a:cs typeface="Calibri" pitchFamily="34" charset="-120"/>
               </a:rPr>
-              <a:t>Bases de datos + IA aplicada</a:t>
+              <a:t>Calidad de Software (fortaleciendo BD)</a:t>
             </a:r>
             <a:endParaRPr lang="en-US" sz="1050" dirty="0"/>
           </a:p>
@@ -14226,7 +14226,7 @@
                 <a:ea typeface="Calibri" pitchFamily="34" charset="-122"/>
                 <a:cs typeface="Calibri" pitchFamily="34" charset="-120"/>
               </a:rPr>
-              <a:t>Diseñar y estructurar la base de datos en PostgreSQL, definiendo qué datos sirven de contexto para el módulo de IA y cómo se almacenan sus resultados, refleja directamente mi interés en el modelado de datos y en la resolución práctica de problemas con inteligencia artificial. Me proyecto en ingeniería y gestión de datos.</a:t>
+              <a:t>Mi interés real es Calidad de Software: testear código y asegurar estándares. Bases de datos es un área que necesito reforzar según mi autoevaluación, y liderar el diseño de la BD en este proyecto es la oportunidad para hacerlo — validar la integridad de los datos es clave para asegurar la calidad de cualquier sistema.</a:t>
             </a:r>
             <a:endParaRPr lang="en-US" sz="1150" dirty="0"/>
           </a:p>
@@ -14635,7 +14635,7 @@
                 <a:ea typeface="Cambria" pitchFamily="34" charset="-122"/>
                 <a:cs typeface="Cambria" pitchFamily="34" charset="-120"/>
               </a:rPr>
-              <a:t>Desarrollar Perfil Médico+, una aplicación móvil con backend web que centralice la salud personal y familiar mediante un modelo de cuenta titular con perfiles dependientes, gestionando rutinas de cuidado y generando alertas configurables hacia los cuidadores autorizados.</a:t>
+              <a:t>Desarrollar Perfil Médico+, una aplicación móvil con backend que centralice la salud personal y familiar mediante un modelo de cuenta titular con perfiles dependientes, gestionando rutinas de cuidado y generando alertas configurables hacia los cuidadores autorizados.</a:t>
             </a:r>
             <a:endParaRPr lang="en-US" sz="2700" dirty="0"/>
           </a:p>

--- a/Fase 1/Evidencias Grupales/PerfilMedico_ExposicionFase1.pptx
+++ b/Fase 1/Evidencias Grupales/PerfilMedico_ExposicionFase1.pptx
@@ -20,9 +20,10 @@
     <p:sldId id="268" r:id="rId14"/>
     <p:sldId id="269" r:id="rId15"/>
     <p:sldId id="270" r:id="rId16"/>
+    <p:sldId id="271" r:id="rId17"/>
   </p:sldIdLst>
   <p:notesMasterIdLst>
-    <p:notesMasterId r:id="rId17"/>
+    <p:notesMasterId r:id="rId18"/>
   </p:notesMasterIdLst>
   <p:sldSz cx="12192000" cy="6858000"/>
   <p:notesSz cx="6858000" cy="12192000"/>
@@ -1068,6 +1069,94 @@
             <a:fld id="{F7021451-1387-4CA6-816F-3879F97B5CBC}" type="slidenum">
               <a:rPr lang="en-US"/>
               <a:t>15</a:t>
+            </a:fld>
+            <a:endParaRPr lang="en-US"/>
+          </a:p>
+        </p:txBody>
+      </p:sp>
+    </p:spTree>
+    <p:extLst>
+      <p:ext uri="{BB962C8B-B14F-4D97-AF65-F5344CB8AC3E}">
+        <p14:creationId xmlns:p14="http://schemas.microsoft.com/office/powerpoint/2010/main" val="1024086991"/>
+      </p:ext>
+    </p:extLst>
+  </p:cSld>
+  <p:clrMapOvr>
+    <a:masterClrMapping/>
+  </p:clrMapOvr>
+</p:notes>
+</file>
+
+<file path=ppt/notesSlides/notesSlide16.xml><?xml version="1.0" encoding="utf-8"?>
+<p:notes xmlns:a="http://schemas.openxmlformats.org/drawingml/2006/main" xmlns:r="http://schemas.openxmlformats.org/officeDocument/2006/relationships" xmlns:p="http://schemas.openxmlformats.org/presentationml/2006/main">
+  <p:cSld>
+    <p:spTree>
+      <p:nvGrpSpPr>
+        <p:cNvPr id="1" name=""/>
+        <p:cNvGrpSpPr/>
+        <p:nvPr/>
+      </p:nvGrpSpPr>
+      <p:grpSpPr>
+        <a:xfrm>
+          <a:off x="0" y="0"/>
+          <a:ext cx="0" cy="0"/>
+          <a:chOff x="0" y="0"/>
+          <a:chExt cx="0" cy="0"/>
+        </a:xfrm>
+      </p:grpSpPr>
+      <p:sp>
+        <p:nvSpPr>
+          <p:cNvPr id="2" name="Slide Image Placeholder 1"/>
+          <p:cNvSpPr>
+            <a:spLocks noGrp="1" noRot="1" noChangeAspect="1"/>
+          </p:cNvSpPr>
+          <p:nvPr>
+            <p:ph type="sldImg"/>
+          </p:nvPr>
+        </p:nvSpPr>
+        <p:spPr/>
+      </p:sp>
+      <p:sp>
+        <p:nvSpPr>
+          <p:cNvPr id="3" name="Notes Placeholder 2"/>
+          <p:cNvSpPr>
+            <a:spLocks noGrp="1"/>
+          </p:cNvSpPr>
+          <p:nvPr>
+            <p:ph type="body" idx="1"/>
+          </p:nvPr>
+        </p:nvSpPr>
+        <p:spPr/>
+        <p:txBody>
+          <a:bodyPr/>
+          <a:lstStyle/>
+          <a:p>
+            <a:r>
+              <a:rPr lang="en-US" dirty="0"/>
+              <a:t/>
+            </a:r>
+            <a:endParaRPr lang="en-US" dirty="0"/>
+          </a:p>
+        </p:txBody>
+      </p:sp>
+      <p:sp>
+        <p:nvSpPr>
+          <p:cNvPr id="4" name="Slide Number Placeholder 3"/>
+          <p:cNvSpPr>
+            <a:spLocks noGrp="1"/>
+          </p:cNvSpPr>
+          <p:nvPr>
+            <p:ph type="sldNum" sz="quarter" idx="10"/>
+          </p:nvPr>
+        </p:nvSpPr>
+        <p:spPr/>
+        <p:txBody>
+          <a:bodyPr/>
+          <a:lstStyle/>
+          <a:p>
+            <a:fld id="{F7021451-1387-4CA6-816F-3879F97B5CBC}" type="slidenum">
+              <a:rPr lang="en-US"/>
+              <a:t>16</a:t>
             </a:fld>
             <a:endParaRPr lang="en-US"/>
           </a:p>
@@ -2394,6 +2483,807 @@
     <p:bg>
       <p:bgPr>
         <a:solidFill>
+          <a:srgbClr val="0B3D42"/>
+        </a:solidFill>
+      </p:bgPr>
+    </p:bg>
+    <p:spTree>
+      <p:nvGrpSpPr>
+        <p:cNvPr id="1" name=""/>
+        <p:cNvGrpSpPr/>
+        <p:nvPr/>
+      </p:nvGrpSpPr>
+      <p:grpSpPr>
+        <a:xfrm>
+          <a:off x="0" y="0"/>
+          <a:ext cx="0" cy="0"/>
+          <a:chOff x="0" y="0"/>
+          <a:chExt cx="0" cy="0"/>
+        </a:xfrm>
+      </p:grpSpPr>
+      <p:sp>
+        <p:nvSpPr>
+          <p:cNvPr id="2" name="Shape 0"/>
+          <p:cNvSpPr/>
+          <p:nvPr/>
+        </p:nvSpPr>
+        <p:spPr>
+          <a:xfrm>
+            <a:off x="9692640" y="-1280160"/>
+            <a:ext cx="5029200" cy="5029200"/>
+          </a:xfrm>
+          <a:prstGeom prst="ellipse">
+            <a:avLst/>
+          </a:prstGeom>
+          <a:solidFill>
+            <a:srgbClr val="028090">
+              <a:alpha val="22000"/>
+            </a:srgbClr>
+          </a:solidFill>
+          <a:ln/>
+        </p:spPr>
+      </p:sp>
+      <p:sp>
+        <p:nvSpPr>
+          <p:cNvPr id="3" name="Text 1"/>
+          <p:cNvSpPr txBox="1"/>
+          <p:nvPr/>
+        </p:nvSpPr>
+        <p:spPr>
+          <a:xfrm>
+            <a:off x="548640" y="457200"/>
+            <a:ext cx="10515600" cy="640080"/>
+          </a:xfrm>
+          <a:prstGeom prst="rect">
+            <a:avLst/>
+          </a:prstGeom>
+          <a:noFill/>
+          <a:ln/>
+        </p:spPr>
+        <p:txBody>
+          <a:bodyPr wrap="square" lIns="0" tIns="0" rIns="0" bIns="0" rtlCol="0" anchor="ctr"/>
+          <a:lstStyle/>
+          <a:p>
+            <a:pPr indent="0" marL="0">
+              <a:buNone/>
+            </a:pPr>
+            <a:r>
+              <a:rPr lang="en-US" sz="3000" b="1" dirty="0">
+                <a:solidFill>
+                  <a:srgbClr val="FFFFFF"/>
+                </a:solidFill>
+                <a:latin typeface="Cambria" pitchFamily="34" charset="0"/>
+                <a:ea typeface="Cambria" pitchFamily="34" charset="-122"/>
+                <a:cs typeface="Cambria" pitchFamily="34" charset="-120"/>
+              </a:rPr>
+              <a:t>Diferenciadores: qué nos distingue</a:t>
+            </a:r>
+            <a:endParaRPr lang="en-US" sz="3000" dirty="0"/>
+          </a:p>
+        </p:txBody>
+      </p:sp>
+      <p:sp>
+        <p:nvSpPr>
+          <p:cNvPr id="4" name="Text 2"/>
+          <p:cNvSpPr txBox="1"/>
+          <p:nvPr/>
+        </p:nvSpPr>
+        <p:spPr>
+          <a:xfrm>
+            <a:off x="548640" y="1170432"/>
+            <a:ext cx="10881360" cy="548640"/>
+          </a:xfrm>
+          <a:prstGeom prst="rect">
+            <a:avLst/>
+          </a:prstGeom>
+          <a:noFill/>
+          <a:ln/>
+        </p:spPr>
+        <p:txBody>
+          <a:bodyPr wrap="square" lIns="0" tIns="0" rIns="0" bIns="0" rtlCol="0" anchor="ctr"/>
+          <a:lstStyle/>
+          <a:p>
+            <a:pPr indent="0" marL="0">
+              <a:buNone/>
+            </a:pPr>
+            <a:r>
+              <a:rPr lang="en-US" sz="1300" dirty="0">
+                <a:solidFill>
+                  <a:srgbClr val="C7DEDD"/>
+                </a:solidFill>
+                <a:latin typeface="Calibri" pitchFamily="34" charset="0"/>
+                <a:ea typeface="Calibri" pitchFamily="34" charset="-122"/>
+                <a:cs typeface="Calibri" pitchFamily="34" charset="-120"/>
+              </a:rPr>
+              <a:t>Hay varios proyectos de recordatorio de medicamentos. Perfil Médico+ agrega tres funcionalidades que atacan directamente el caso del adulto mayor que vive solo o no maneja un smartphone — usando siempre tecnología de bajo costo ya existente, sin fabricar hardware propio.</a:t>
+            </a:r>
+            <a:endParaRPr lang="en-US" sz="1300" dirty="0"/>
+          </a:p>
+        </p:txBody>
+      </p:sp>
+      <p:sp>
+        <p:nvSpPr>
+          <p:cNvPr id="5" name="Shape 3"/>
+          <p:cNvSpPr/>
+          <p:nvPr/>
+        </p:nvSpPr>
+        <p:spPr>
+          <a:xfrm>
+            <a:off x="548640" y="2057400"/>
+            <a:ext cx="3520440" cy="4023360"/>
+          </a:xfrm>
+          <a:prstGeom prst="roundRect">
+            <a:avLst>
+              <a:gd name="adj" fmla="val 2597"/>
+            </a:avLst>
+          </a:prstGeom>
+          <a:solidFill>
+            <a:srgbClr val="0E4A50"/>
+          </a:solidFill>
+          <a:ln/>
+        </p:spPr>
+      </p:sp>
+      <p:sp>
+        <p:nvSpPr>
+          <p:cNvPr id="6" name="Shape 4"/>
+          <p:cNvSpPr/>
+          <p:nvPr/>
+        </p:nvSpPr>
+        <p:spPr>
+          <a:xfrm>
+            <a:off x="548640" y="2057400"/>
+            <a:ext cx="3520440" cy="868680"/>
+          </a:xfrm>
+          <a:prstGeom prst="roundRect">
+            <a:avLst>
+              <a:gd name="adj" fmla="val 10526"/>
+            </a:avLst>
+          </a:prstGeom>
+          <a:solidFill>
+            <a:srgbClr val="028090"/>
+          </a:solidFill>
+          <a:ln/>
+        </p:spPr>
+      </p:sp>
+      <p:sp>
+        <p:nvSpPr>
+          <p:cNvPr id="7" name="Shape 5"/>
+          <p:cNvSpPr/>
+          <p:nvPr/>
+        </p:nvSpPr>
+        <p:spPr>
+          <a:xfrm>
+            <a:off x="548640" y="2496312"/>
+            <a:ext cx="3520440" cy="429768"/>
+          </a:xfrm>
+          <a:prstGeom prst="rect">
+            <a:avLst/>
+          </a:prstGeom>
+          <a:solidFill>
+            <a:srgbClr val="028090"/>
+          </a:solidFill>
+          <a:ln/>
+        </p:spPr>
+      </p:sp>
+      <p:sp>
+        <p:nvSpPr>
+          <p:cNvPr id="8" name="Text 6"/>
+          <p:cNvSpPr txBox="1"/>
+          <p:nvPr/>
+        </p:nvSpPr>
+        <p:spPr>
+          <a:xfrm>
+            <a:off x="749808" y="2176272"/>
+            <a:ext cx="3118104" cy="365760"/>
+          </a:xfrm>
+          <a:prstGeom prst="rect">
+            <a:avLst/>
+          </a:prstGeom>
+          <a:noFill/>
+          <a:ln/>
+        </p:spPr>
+        <p:txBody>
+          <a:bodyPr wrap="square" lIns="0" tIns="0" rIns="0" bIns="0" rtlCol="0" anchor="ctr"/>
+          <a:lstStyle/>
+          <a:p>
+            <a:pPr indent="0" marL="0">
+              <a:buNone/>
+            </a:pPr>
+            <a:r>
+              <a:rPr lang="en-US" sz="1450" b="1" dirty="0">
+                <a:solidFill>
+                  <a:srgbClr val="FFFFFF"/>
+                </a:solidFill>
+                <a:latin typeface="Calibri" pitchFamily="34" charset="0"/>
+                <a:ea typeface="Calibri" pitchFamily="34" charset="-122"/>
+                <a:cs typeface="Calibri" pitchFamily="34" charset="-120"/>
+              </a:rPr>
+              <a:t>Pantalla en casa</a:t>
+            </a:r>
+            <a:endParaRPr lang="en-US" sz="1450" dirty="0"/>
+          </a:p>
+        </p:txBody>
+      </p:sp>
+      <p:sp>
+        <p:nvSpPr>
+          <p:cNvPr id="9" name="Text 7"/>
+          <p:cNvSpPr txBox="1"/>
+          <p:nvPr/>
+        </p:nvSpPr>
+        <p:spPr>
+          <a:xfrm>
+            <a:off x="749808" y="2542032"/>
+            <a:ext cx="3118104" cy="365760"/>
+          </a:xfrm>
+          <a:prstGeom prst="rect">
+            <a:avLst/>
+          </a:prstGeom>
+          <a:noFill/>
+          <a:ln/>
+        </p:spPr>
+        <p:txBody>
+          <a:bodyPr wrap="square" lIns="0" tIns="0" rIns="0" bIns="0" rtlCol="0" anchor="ctr"/>
+          <a:lstStyle/>
+          <a:p>
+            <a:pPr indent="0" marL="0">
+              <a:buNone/>
+            </a:pPr>
+            <a:r>
+              <a:rPr lang="en-US" sz="1000" i="1" dirty="0">
+                <a:solidFill>
+                  <a:srgbClr val="FFFFFF"/>
+                </a:solidFill>
+                <a:latin typeface="Calibri" pitchFamily="34" charset="0"/>
+                <a:ea typeface="Calibri" pitchFamily="34" charset="-122"/>
+                <a:cs typeface="Calibri" pitchFamily="34" charset="-120"/>
+              </a:rPr>
+              <a:t>Tablet fija + Fully Kiosk Browser</a:t>
+            </a:r>
+            <a:endParaRPr lang="en-US" sz="1000" dirty="0"/>
+          </a:p>
+        </p:txBody>
+      </p:sp>
+      <p:sp>
+        <p:nvSpPr>
+          <p:cNvPr id="10" name="Text 8"/>
+          <p:cNvSpPr txBox="1"/>
+          <p:nvPr/>
+        </p:nvSpPr>
+        <p:spPr>
+          <a:xfrm>
+            <a:off x="749808" y="3154680"/>
+            <a:ext cx="3118104" cy="2743200"/>
+          </a:xfrm>
+          <a:prstGeom prst="rect">
+            <a:avLst/>
+          </a:prstGeom>
+          <a:noFill/>
+          <a:ln/>
+        </p:spPr>
+        <p:txBody>
+          <a:bodyPr wrap="square" lIns="0" tIns="0" rIns="0" bIns="0" rtlCol="0" anchor="t"/>
+          <a:lstStyle/>
+          <a:p>
+            <a:pPr indent="0" marL="0">
+              <a:lnSpc>
+                <a:spcPct val="120000"/>
+              </a:lnSpc>
+              <a:buNone/>
+            </a:pPr>
+            <a:r>
+              <a:rPr lang="en-US" sz="1100" dirty="0">
+                <a:solidFill>
+                  <a:srgbClr val="E8F4F3"/>
+                </a:solidFill>
+                <a:latin typeface="Calibri" pitchFamily="34" charset="0"/>
+                <a:ea typeface="Calibri" pitchFamily="34" charset="-122"/>
+                <a:cs typeface="Calibri" pitchFamily="34" charset="-120"/>
+              </a:rPr>
+              <a:t>Nuestra misma app, en modo simplificado sobre una tablet montada en la casa del adulto mayor: botones grandes, confirmación de un toque y botón de emergencia — sin necesitar un smartphone propio.</a:t>
+            </a:r>
+            <a:endParaRPr lang="en-US" sz="1100" dirty="0"/>
+          </a:p>
+        </p:txBody>
+      </p:sp>
+      <p:sp>
+        <p:nvSpPr>
+          <p:cNvPr id="11" name="Shape 9"/>
+          <p:cNvSpPr/>
+          <p:nvPr/>
+        </p:nvSpPr>
+        <p:spPr>
+          <a:xfrm>
+            <a:off x="4343400" y="2057400"/>
+            <a:ext cx="3520440" cy="4023360"/>
+          </a:xfrm>
+          <a:prstGeom prst="roundRect">
+            <a:avLst>
+              <a:gd name="adj" fmla="val 2597"/>
+            </a:avLst>
+          </a:prstGeom>
+          <a:solidFill>
+            <a:srgbClr val="0E4A50"/>
+          </a:solidFill>
+          <a:ln/>
+        </p:spPr>
+      </p:sp>
+      <p:sp>
+        <p:nvSpPr>
+          <p:cNvPr id="12" name="Shape 10"/>
+          <p:cNvSpPr/>
+          <p:nvPr/>
+        </p:nvSpPr>
+        <p:spPr>
+          <a:xfrm>
+            <a:off x="4343400" y="2057400"/>
+            <a:ext cx="3520440" cy="868680"/>
+          </a:xfrm>
+          <a:prstGeom prst="roundRect">
+            <a:avLst>
+              <a:gd name="adj" fmla="val 10526"/>
+            </a:avLst>
+          </a:prstGeom>
+          <a:solidFill>
+            <a:srgbClr val="00A896"/>
+          </a:solidFill>
+          <a:ln/>
+        </p:spPr>
+      </p:sp>
+      <p:sp>
+        <p:nvSpPr>
+          <p:cNvPr id="13" name="Shape 11"/>
+          <p:cNvSpPr/>
+          <p:nvPr/>
+        </p:nvSpPr>
+        <p:spPr>
+          <a:xfrm>
+            <a:off x="4343400" y="2496312"/>
+            <a:ext cx="3520440" cy="429768"/>
+          </a:xfrm>
+          <a:prstGeom prst="rect">
+            <a:avLst/>
+          </a:prstGeom>
+          <a:solidFill>
+            <a:srgbClr val="00A896"/>
+          </a:solidFill>
+          <a:ln/>
+        </p:spPr>
+      </p:sp>
+      <p:sp>
+        <p:nvSpPr>
+          <p:cNvPr id="14" name="Text 12"/>
+          <p:cNvSpPr txBox="1"/>
+          <p:nvPr/>
+        </p:nvSpPr>
+        <p:spPr>
+          <a:xfrm>
+            <a:off x="4544568" y="2176272"/>
+            <a:ext cx="3118104" cy="365760"/>
+          </a:xfrm>
+          <a:prstGeom prst="rect">
+            <a:avLst/>
+          </a:prstGeom>
+          <a:noFill/>
+          <a:ln/>
+        </p:spPr>
+        <p:txBody>
+          <a:bodyPr wrap="square" lIns="0" tIns="0" rIns="0" bIns="0" rtlCol="0" anchor="ctr"/>
+          <a:lstStyle/>
+          <a:p>
+            <a:pPr indent="0" marL="0">
+              <a:buNone/>
+            </a:pPr>
+            <a:r>
+              <a:rPr lang="en-US" sz="1450" b="1" dirty="0">
+                <a:solidFill>
+                  <a:srgbClr val="FFFFFF"/>
+                </a:solidFill>
+                <a:latin typeface="Calibri" pitchFamily="34" charset="0"/>
+                <a:ea typeface="Calibri" pitchFamily="34" charset="-122"/>
+                <a:cs typeface="Calibri" pitchFamily="34" charset="-120"/>
+              </a:rPr>
+              <a:t>Pulsera inteligente</a:t>
+            </a:r>
+            <a:endParaRPr lang="en-US" sz="1450" dirty="0"/>
+          </a:p>
+        </p:txBody>
+      </p:sp>
+      <p:sp>
+        <p:nvSpPr>
+          <p:cNvPr id="15" name="Text 13"/>
+          <p:cNvSpPr txBox="1"/>
+          <p:nvPr/>
+        </p:nvSpPr>
+        <p:spPr>
+          <a:xfrm>
+            <a:off x="4544568" y="2542032"/>
+            <a:ext cx="3118104" cy="365760"/>
+          </a:xfrm>
+          <a:prstGeom prst="rect">
+            <a:avLst/>
+          </a:prstGeom>
+          <a:noFill/>
+          <a:ln/>
+        </p:spPr>
+        <p:txBody>
+          <a:bodyPr wrap="square" lIns="0" tIns="0" rIns="0" bIns="0" rtlCol="0" anchor="ctr"/>
+          <a:lstStyle/>
+          <a:p>
+            <a:pPr indent="0" marL="0">
+              <a:buNone/>
+            </a:pPr>
+            <a:r>
+              <a:rPr lang="en-US" sz="1000" i="1" dirty="0">
+                <a:solidFill>
+                  <a:srgbClr val="FFFFFF"/>
+                </a:solidFill>
+                <a:latin typeface="Calibri" pitchFamily="34" charset="0"/>
+                <a:ea typeface="Calibri" pitchFamily="34" charset="-122"/>
+                <a:cs typeface="Calibri" pitchFamily="34" charset="-120"/>
+              </a:rPr>
+              <a:t>Health Connect (API gratuita)</a:t>
+            </a:r>
+            <a:endParaRPr lang="en-US" sz="1000" dirty="0"/>
+          </a:p>
+        </p:txBody>
+      </p:sp>
+      <p:sp>
+        <p:nvSpPr>
+          <p:cNvPr id="16" name="Text 14"/>
+          <p:cNvSpPr txBox="1"/>
+          <p:nvPr/>
+        </p:nvSpPr>
+        <p:spPr>
+          <a:xfrm>
+            <a:off x="4544568" y="3154680"/>
+            <a:ext cx="3118104" cy="2743200"/>
+          </a:xfrm>
+          <a:prstGeom prst="rect">
+            <a:avLst/>
+          </a:prstGeom>
+          <a:noFill/>
+          <a:ln/>
+        </p:spPr>
+        <p:txBody>
+          <a:bodyPr wrap="square" lIns="0" tIns="0" rIns="0" bIns="0" rtlCol="0" anchor="t"/>
+          <a:lstStyle/>
+          <a:p>
+            <a:pPr indent="0" marL="0">
+              <a:lnSpc>
+                <a:spcPct val="120000"/>
+              </a:lnSpc>
+              <a:buNone/>
+            </a:pPr>
+            <a:r>
+              <a:rPr lang="en-US" sz="1100" dirty="0">
+                <a:solidFill>
+                  <a:srgbClr val="E8F4F3"/>
+                </a:solidFill>
+                <a:latin typeface="Calibri" pitchFamily="34" charset="0"/>
+                <a:ea typeface="Calibri" pitchFamily="34" charset="-122"/>
+                <a:cs typeface="Calibri" pitchFamily="34" charset="-120"/>
+              </a:rPr>
+              <a:t>Lee frecuencia cardíaca y otros signos vitales desde una pulsera Xiaomi ya existente en el mercado, vía la API oficial y gratuita de Android — sin desarrollar hardware propio.</a:t>
+            </a:r>
+            <a:endParaRPr lang="en-US" sz="1100" dirty="0"/>
+          </a:p>
+        </p:txBody>
+      </p:sp>
+      <p:sp>
+        <p:nvSpPr>
+          <p:cNvPr id="17" name="Shape 15"/>
+          <p:cNvSpPr/>
+          <p:nvPr/>
+        </p:nvSpPr>
+        <p:spPr>
+          <a:xfrm>
+            <a:off x="8138160" y="2057400"/>
+            <a:ext cx="3520440" cy="4023360"/>
+          </a:xfrm>
+          <a:prstGeom prst="roundRect">
+            <a:avLst>
+              <a:gd name="adj" fmla="val 2597"/>
+            </a:avLst>
+          </a:prstGeom>
+          <a:solidFill>
+            <a:srgbClr val="0E4A50"/>
+          </a:solidFill>
+          <a:ln/>
+        </p:spPr>
+      </p:sp>
+      <p:sp>
+        <p:nvSpPr>
+          <p:cNvPr id="18" name="Shape 16"/>
+          <p:cNvSpPr/>
+          <p:nvPr/>
+        </p:nvSpPr>
+        <p:spPr>
+          <a:xfrm>
+            <a:off x="8138160" y="2057400"/>
+            <a:ext cx="3520440" cy="868680"/>
+          </a:xfrm>
+          <a:prstGeom prst="roundRect">
+            <a:avLst>
+              <a:gd name="adj" fmla="val 10526"/>
+            </a:avLst>
+          </a:prstGeom>
+          <a:solidFill>
+            <a:srgbClr val="02C39A"/>
+          </a:solidFill>
+          <a:ln/>
+        </p:spPr>
+      </p:sp>
+      <p:sp>
+        <p:nvSpPr>
+          <p:cNvPr id="19" name="Shape 17"/>
+          <p:cNvSpPr/>
+          <p:nvPr/>
+        </p:nvSpPr>
+        <p:spPr>
+          <a:xfrm>
+            <a:off x="8138160" y="2496312"/>
+            <a:ext cx="3520440" cy="429768"/>
+          </a:xfrm>
+          <a:prstGeom prst="rect">
+            <a:avLst/>
+          </a:prstGeom>
+          <a:solidFill>
+            <a:srgbClr val="02C39A"/>
+          </a:solidFill>
+          <a:ln/>
+        </p:spPr>
+      </p:sp>
+      <p:sp>
+        <p:nvSpPr>
+          <p:cNvPr id="20" name="Text 18"/>
+          <p:cNvSpPr txBox="1"/>
+          <p:nvPr/>
+        </p:nvSpPr>
+        <p:spPr>
+          <a:xfrm>
+            <a:off x="8339328" y="2176272"/>
+            <a:ext cx="3118104" cy="365760"/>
+          </a:xfrm>
+          <a:prstGeom prst="rect">
+            <a:avLst/>
+          </a:prstGeom>
+          <a:noFill/>
+          <a:ln/>
+        </p:spPr>
+        <p:txBody>
+          <a:bodyPr wrap="square" lIns="0" tIns="0" rIns="0" bIns="0" rtlCol="0" anchor="ctr"/>
+          <a:lstStyle/>
+          <a:p>
+            <a:pPr indent="0" marL="0">
+              <a:buNone/>
+            </a:pPr>
+            <a:r>
+              <a:rPr lang="en-US" sz="1450" b="1" dirty="0">
+                <a:solidFill>
+                  <a:srgbClr val="FFFFFF"/>
+                </a:solidFill>
+                <a:latin typeface="Calibri" pitchFamily="34" charset="0"/>
+                <a:ea typeface="Calibri" pitchFamily="34" charset="-122"/>
+                <a:cs typeface="Calibri" pitchFamily="34" charset="-120"/>
+              </a:rPr>
+              <a:t>Detección de ruido fuerte</a:t>
+            </a:r>
+            <a:endParaRPr lang="en-US" sz="1450" dirty="0"/>
+          </a:p>
+        </p:txBody>
+      </p:sp>
+      <p:sp>
+        <p:nvSpPr>
+          <p:cNvPr id="21" name="Text 19"/>
+          <p:cNvSpPr txBox="1"/>
+          <p:nvPr/>
+        </p:nvSpPr>
+        <p:spPr>
+          <a:xfrm>
+            <a:off x="8339328" y="2542032"/>
+            <a:ext cx="3118104" cy="365760"/>
+          </a:xfrm>
+          <a:prstGeom prst="rect">
+            <a:avLst/>
+          </a:prstGeom>
+          <a:noFill/>
+          <a:ln/>
+        </p:spPr>
+        <p:txBody>
+          <a:bodyPr wrap="square" lIns="0" tIns="0" rIns="0" bIns="0" rtlCol="0" anchor="ctr"/>
+          <a:lstStyle/>
+          <a:p>
+            <a:pPr indent="0" marL="0">
+              <a:buNone/>
+            </a:pPr>
+            <a:r>
+              <a:rPr lang="en-US" sz="1000" i="1" dirty="0">
+                <a:solidFill>
+                  <a:srgbClr val="FFFFFF"/>
+                </a:solidFill>
+                <a:latin typeface="Calibri" pitchFamily="34" charset="0"/>
+                <a:ea typeface="Calibri" pitchFamily="34" charset="-122"/>
+                <a:cs typeface="Calibri" pitchFamily="34" charset="-120"/>
+              </a:rPr>
+              <a:t>Micrófono del dispositivo</a:t>
+            </a:r>
+            <a:endParaRPr lang="en-US" sz="1000" dirty="0"/>
+          </a:p>
+        </p:txBody>
+      </p:sp>
+      <p:sp>
+        <p:nvSpPr>
+          <p:cNvPr id="22" name="Text 20"/>
+          <p:cNvSpPr txBox="1"/>
+          <p:nvPr/>
+        </p:nvSpPr>
+        <p:spPr>
+          <a:xfrm>
+            <a:off x="8339328" y="3154680"/>
+            <a:ext cx="3118104" cy="2743200"/>
+          </a:xfrm>
+          <a:prstGeom prst="rect">
+            <a:avLst/>
+          </a:prstGeom>
+          <a:noFill/>
+          <a:ln/>
+        </p:spPr>
+        <p:txBody>
+          <a:bodyPr wrap="square" lIns="0" tIns="0" rIns="0" bIns="0" rtlCol="0" anchor="t"/>
+          <a:lstStyle/>
+          <a:p>
+            <a:pPr indent="0" marL="0">
+              <a:lnSpc>
+                <a:spcPct val="120000"/>
+              </a:lnSpc>
+              <a:buNone/>
+            </a:pPr>
+            <a:r>
+              <a:rPr lang="en-US" sz="1100" dirty="0">
+                <a:solidFill>
+                  <a:srgbClr val="E8F4F3"/>
+                </a:solidFill>
+                <a:latin typeface="Calibri" pitchFamily="34" charset="0"/>
+                <a:ea typeface="Calibri" pitchFamily="34" charset="-122"/>
+                <a:cs typeface="Calibri" pitchFamily="34" charset="-120"/>
+              </a:rPr>
+              <a:t>Detecta sonidos fuertes en el hogar (posible caída) usando el micrófono que ya trae el celular o tablet, sin sensores adicionales que fabricar o calibrar desde cero.</a:t>
+            </a:r>
+            <a:endParaRPr lang="en-US" sz="1100" dirty="0"/>
+          </a:p>
+        </p:txBody>
+      </p:sp>
+      <p:sp>
+        <p:nvSpPr>
+          <p:cNvPr id="23" name="Text 21"/>
+          <p:cNvSpPr txBox="1"/>
+          <p:nvPr/>
+        </p:nvSpPr>
+        <p:spPr>
+          <a:xfrm>
+            <a:off x="548640" y="6263640"/>
+            <a:ext cx="11064240" cy="320040"/>
+          </a:xfrm>
+          <a:prstGeom prst="rect">
+            <a:avLst/>
+          </a:prstGeom>
+          <a:noFill/>
+          <a:ln/>
+        </p:spPr>
+        <p:txBody>
+          <a:bodyPr wrap="square" lIns="0" tIns="0" rIns="0" bIns="0" rtlCol="0" anchor="ctr"/>
+          <a:lstStyle/>
+          <a:p>
+            <a:pPr indent="0" marL="0">
+              <a:buNone/>
+            </a:pPr>
+            <a:r>
+              <a:rPr lang="en-US" sz="1050" i="1" dirty="0">
+                <a:solidFill>
+                  <a:srgbClr val="9FC6C6"/>
+                </a:solidFill>
+                <a:latin typeface="Calibri" pitchFamily="34" charset="0"/>
+                <a:ea typeface="Calibri" pitchFamily="34" charset="-122"/>
+                <a:cs typeface="Calibri" pitchFamily="34" charset="-120"/>
+              </a:rPr>
+              <a:t>Planteadas como incrementos sobre el MVP base, a priorizar en Fase 2 según avance del equipo.</a:t>
+            </a:r>
+            <a:endParaRPr lang="en-US" sz="1050" dirty="0"/>
+          </a:p>
+        </p:txBody>
+      </p:sp>
+      <p:sp>
+        <p:nvSpPr>
+          <p:cNvPr id="24" name="Text 22"/>
+          <p:cNvSpPr txBox="1"/>
+          <p:nvPr/>
+        </p:nvSpPr>
+        <p:spPr>
+          <a:xfrm>
+            <a:off x="457200" y="6510528"/>
+            <a:ext cx="7315200" cy="274320"/>
+          </a:xfrm>
+          <a:prstGeom prst="rect">
+            <a:avLst/>
+          </a:prstGeom>
+          <a:noFill/>
+          <a:ln/>
+        </p:spPr>
+        <p:txBody>
+          <a:bodyPr wrap="square" lIns="0" tIns="0" rIns="0" bIns="0" rtlCol="0" anchor="ctr"/>
+          <a:lstStyle/>
+          <a:p>
+            <a:pPr algn="l" indent="0" marL="0">
+              <a:buNone/>
+            </a:pPr>
+            <a:r>
+              <a:rPr lang="en-US" sz="900" dirty="0">
+                <a:solidFill>
+                  <a:srgbClr val="5C7A7C"/>
+                </a:solidFill>
+                <a:latin typeface="Calibri" pitchFamily="34" charset="0"/>
+                <a:ea typeface="Calibri" pitchFamily="34" charset="-122"/>
+                <a:cs typeface="Calibri" pitchFamily="34" charset="-120"/>
+              </a:rPr>
+              <a:t>Perfil Médico+  ·  Capstone_005D · Grupo 7  ·  PTY4614</a:t>
+            </a:r>
+            <a:endParaRPr lang="en-US" sz="900" dirty="0"/>
+          </a:p>
+        </p:txBody>
+      </p:sp>
+      <p:sp>
+        <p:nvSpPr>
+          <p:cNvPr id="25" name="Text 23"/>
+          <p:cNvSpPr txBox="1"/>
+          <p:nvPr/>
+        </p:nvSpPr>
+        <p:spPr>
+          <a:xfrm>
+            <a:off x="11521440" y="6510528"/>
+            <a:ext cx="457200" cy="274320"/>
+          </a:xfrm>
+          <a:prstGeom prst="rect">
+            <a:avLst/>
+          </a:prstGeom>
+          <a:noFill/>
+          <a:ln/>
+        </p:spPr>
+        <p:txBody>
+          <a:bodyPr wrap="square" lIns="0" tIns="0" rIns="0" bIns="0" rtlCol="0" anchor="ctr"/>
+          <a:lstStyle/>
+          <a:p>
+            <a:pPr algn="r" indent="0" marL="0">
+              <a:buNone/>
+            </a:pPr>
+            <a:r>
+              <a:rPr lang="en-US" sz="900" dirty="0">
+                <a:solidFill>
+                  <a:srgbClr val="5C7A7C"/>
+                </a:solidFill>
+                <a:latin typeface="Calibri" pitchFamily="34" charset="0"/>
+                <a:ea typeface="Calibri" pitchFamily="34" charset="-122"/>
+                <a:cs typeface="Calibri" pitchFamily="34" charset="-120"/>
+              </a:rPr>
+              <a:t>10</a:t>
+            </a:r>
+            <a:endParaRPr lang="en-US" sz="900" dirty="0"/>
+          </a:p>
+        </p:txBody>
+      </p:sp>
+    </p:spTree>
+  </p:cSld>
+  <p:clrMapOvr>
+    <a:masterClrMapping/>
+  </p:clrMapOvr>
+</p:sld>
+</file>
+
+<file path=ppt/slides/slide11.xml><?xml version="1.0" encoding="utf-8"?>
+<p:sld xmlns:a="http://schemas.openxmlformats.org/drawingml/2006/main" xmlns:r="http://schemas.openxmlformats.org/officeDocument/2006/relationships" xmlns:p="http://schemas.openxmlformats.org/presentationml/2006/main">
+  <p:cSld name="Slide 11">
+    <p:bg>
+      <p:bgPr>
+        <a:solidFill>
           <a:srgbClr val="F4FAF9"/>
         </a:solidFill>
       </p:bgPr>
@@ -2970,7 +3860,7 @@
       </p:sp>
       <p:graphicFrame>
         <p:nvGraphicFramePr>
-          <p:cNvPr id="11" name="Table 0"/>
+          <p:cNvPr id="12" name="Table 0"/>
           <p:cNvGraphicFramePr>
             <a:graphicFrameLocks noGrp="1"/>
           </p:cNvGraphicFramePr>
@@ -4513,899 +5403,6 @@
                 <a:ea typeface="Calibri" pitchFamily="34" charset="-122"/>
                 <a:cs typeface="Calibri" pitchFamily="34" charset="-120"/>
               </a:rPr>
-              <a:t>10</a:t>
-            </a:r>
-            <a:endParaRPr lang="en-US" sz="900" dirty="0"/>
-          </a:p>
-        </p:txBody>
-      </p:sp>
-    </p:spTree>
-  </p:cSld>
-  <p:clrMapOvr>
-    <a:masterClrMapping/>
-  </p:clrMapOvr>
-</p:sld>
-</file>
-
-<file path=ppt/slides/slide11.xml><?xml version="1.0" encoding="utf-8"?>
-<p:sld xmlns:a="http://schemas.openxmlformats.org/drawingml/2006/main" xmlns:r="http://schemas.openxmlformats.org/officeDocument/2006/relationships" xmlns:p="http://schemas.openxmlformats.org/presentationml/2006/main">
-  <p:cSld name="Slide 11">
-    <p:bg>
-      <p:bgPr>
-        <a:solidFill>
-          <a:srgbClr val="F4FAF9"/>
-        </a:solidFill>
-      </p:bgPr>
-    </p:bg>
-    <p:spTree>
-      <p:nvGrpSpPr>
-        <p:cNvPr id="1" name=""/>
-        <p:cNvGrpSpPr/>
-        <p:nvPr/>
-      </p:nvGrpSpPr>
-      <p:grpSpPr>
-        <a:xfrm>
-          <a:off x="0" y="0"/>
-          <a:ext cx="0" cy="0"/>
-          <a:chOff x="0" y="0"/>
-          <a:chExt cx="0" cy="0"/>
-        </a:xfrm>
-      </p:grpSpPr>
-      <p:sp>
-        <p:nvSpPr>
-          <p:cNvPr id="2" name="Text 0"/>
-          <p:cNvSpPr txBox="1"/>
-          <p:nvPr/>
-        </p:nvSpPr>
-        <p:spPr>
-          <a:xfrm>
-            <a:off x="548640" y="457200"/>
-            <a:ext cx="10058400" cy="640080"/>
-          </a:xfrm>
-          <a:prstGeom prst="rect">
-            <a:avLst/>
-          </a:prstGeom>
-          <a:noFill/>
-          <a:ln/>
-        </p:spPr>
-        <p:txBody>
-          <a:bodyPr wrap="square" lIns="0" tIns="0" rIns="0" bIns="0" rtlCol="0" anchor="ctr"/>
-          <a:lstStyle/>
-          <a:p>
-            <a:pPr indent="0" marL="0">
-              <a:buNone/>
-            </a:pPr>
-            <a:r>
-              <a:rPr lang="en-US" sz="3000" b="1" dirty="0">
-                <a:solidFill>
-                  <a:srgbClr val="0B3D42"/>
-                </a:solidFill>
-                <a:latin typeface="Cambria" pitchFamily="34" charset="0"/>
-                <a:ea typeface="Cambria" pitchFamily="34" charset="-122"/>
-                <a:cs typeface="Cambria" pitchFamily="34" charset="-120"/>
-              </a:rPr>
-              <a:t>Metodología de trabajo y roles</a:t>
-            </a:r>
-            <a:endParaRPr lang="en-US" sz="3000" dirty="0"/>
-          </a:p>
-        </p:txBody>
-      </p:sp>
-      <p:sp>
-        <p:nvSpPr>
-          <p:cNvPr id="3" name="Text 1"/>
-          <p:cNvSpPr txBox="1"/>
-          <p:nvPr/>
-        </p:nvSpPr>
-        <p:spPr>
-          <a:xfrm>
-            <a:off x="548640" y="1170432"/>
-            <a:ext cx="10881360" cy="594360"/>
-          </a:xfrm>
-          <a:prstGeom prst="rect">
-            <a:avLst/>
-          </a:prstGeom>
-          <a:noFill/>
-          <a:ln/>
-        </p:spPr>
-        <p:txBody>
-          <a:bodyPr wrap="square" lIns="0" tIns="0" rIns="0" bIns="0" rtlCol="0" anchor="ctr"/>
-          <a:lstStyle/>
-          <a:p>
-            <a:pPr indent="0" marL="0">
-              <a:buNone/>
-            </a:pPr>
-            <a:r>
-              <a:rPr lang="en-US" sz="1300" dirty="0">
-                <a:solidFill>
-                  <a:srgbClr val="5C7A7C"/>
-                </a:solidFill>
-                <a:latin typeface="Calibri" pitchFamily="34" charset="0"/>
-                <a:ea typeface="Calibri" pitchFamily="34" charset="-122"/>
-                <a:cs typeface="Calibri" pitchFamily="34" charset="-120"/>
-              </a:rPr>
-              <a:t>Trabajo ágil (Scrum), con sprints quincenales durante la Fase 2: Sprint Planning, seguimiento breve, demo de cierre y retrospectiva. Una historia se considera terminada (Definition of Done) cuando está integrada, probada y documentada en GitHub.</a:t>
-            </a:r>
-            <a:endParaRPr lang="en-US" sz="1300" dirty="0"/>
-          </a:p>
-        </p:txBody>
-      </p:sp>
-      <p:sp>
-        <p:nvSpPr>
-          <p:cNvPr id="4" name="Shape 2"/>
-          <p:cNvSpPr/>
-          <p:nvPr/>
-        </p:nvSpPr>
-        <p:spPr>
-          <a:xfrm>
-            <a:off x="548640" y="2011680"/>
-            <a:ext cx="3520440" cy="4114800"/>
-          </a:xfrm>
-          <a:prstGeom prst="roundRect">
-            <a:avLst>
-              <a:gd name="adj" fmla="val 2597"/>
-            </a:avLst>
-          </a:prstGeom>
-          <a:solidFill>
-            <a:srgbClr val="FFFFFF"/>
-          </a:solidFill>
-          <a:ln w="12700">
-            <a:solidFill>
-              <a:srgbClr val="DCEDEC"/>
-            </a:solidFill>
-            <a:prstDash val="solid"/>
-          </a:ln>
-          <a:effectLst>
-            <a:outerShdw sx="100000" sy="100000" kx="0" ky="0" algn="bl" rotWithShape="0" blurRad="76200" dist="25400" dir="5400000">
-              <a:srgbClr val="1F3A3C">
-                <a:alpha val="13000"/>
-              </a:srgbClr>
-            </a:outerShdw>
-          </a:effectLst>
-        </p:spPr>
-      </p:sp>
-      <p:sp>
-        <p:nvSpPr>
-          <p:cNvPr id="5" name="Shape 3"/>
-          <p:cNvSpPr/>
-          <p:nvPr/>
-        </p:nvSpPr>
-        <p:spPr>
-          <a:xfrm>
-            <a:off x="548640" y="2011680"/>
-            <a:ext cx="3520440" cy="822960"/>
-          </a:xfrm>
-          <a:prstGeom prst="roundRect">
-            <a:avLst>
-              <a:gd name="adj" fmla="val 11111"/>
-            </a:avLst>
-          </a:prstGeom>
-          <a:solidFill>
-            <a:srgbClr val="028090"/>
-          </a:solidFill>
-          <a:ln/>
-        </p:spPr>
-      </p:sp>
-      <p:sp>
-        <p:nvSpPr>
-          <p:cNvPr id="6" name="Shape 4"/>
-          <p:cNvSpPr/>
-          <p:nvPr/>
-        </p:nvSpPr>
-        <p:spPr>
-          <a:xfrm>
-            <a:off x="548640" y="2423160"/>
-            <a:ext cx="3520440" cy="411480"/>
-          </a:xfrm>
-          <a:prstGeom prst="rect">
-            <a:avLst/>
-          </a:prstGeom>
-          <a:solidFill>
-            <a:srgbClr val="028090"/>
-          </a:solidFill>
-          <a:ln/>
-        </p:spPr>
-      </p:sp>
-      <p:sp>
-        <p:nvSpPr>
-          <p:cNvPr id="7" name="Text 5"/>
-          <p:cNvSpPr txBox="1"/>
-          <p:nvPr/>
-        </p:nvSpPr>
-        <p:spPr>
-          <a:xfrm>
-            <a:off x="777240" y="2121408"/>
-            <a:ext cx="3063240" cy="365760"/>
-          </a:xfrm>
-          <a:prstGeom prst="rect">
-            <a:avLst/>
-          </a:prstGeom>
-          <a:noFill/>
-          <a:ln/>
-        </p:spPr>
-        <p:txBody>
-          <a:bodyPr wrap="square" lIns="0" tIns="0" rIns="0" bIns="0" rtlCol="0" anchor="ctr"/>
-          <a:lstStyle/>
-          <a:p>
-            <a:pPr indent="0" marL="0">
-              <a:buNone/>
-            </a:pPr>
-            <a:r>
-              <a:rPr lang="en-US" sz="1500" b="1" dirty="0">
-                <a:solidFill>
-                  <a:srgbClr val="FFFFFF"/>
-                </a:solidFill>
-                <a:latin typeface="Calibri" pitchFamily="34" charset="0"/>
-                <a:ea typeface="Calibri" pitchFamily="34" charset="-122"/>
-                <a:cs typeface="Calibri" pitchFamily="34" charset="-120"/>
-              </a:rPr>
-              <a:t>Benjamín Leiva</a:t>
-            </a:r>
-            <a:endParaRPr lang="en-US" sz="1500" dirty="0"/>
-          </a:p>
-        </p:txBody>
-      </p:sp>
-      <p:sp>
-        <p:nvSpPr>
-          <p:cNvPr id="8" name="Text 6"/>
-          <p:cNvSpPr txBox="1"/>
-          <p:nvPr/>
-        </p:nvSpPr>
-        <p:spPr>
-          <a:xfrm>
-            <a:off x="777240" y="2450592"/>
-            <a:ext cx="3063240" cy="320040"/>
-          </a:xfrm>
-          <a:prstGeom prst="rect">
-            <a:avLst/>
-          </a:prstGeom>
-          <a:noFill/>
-          <a:ln/>
-        </p:spPr>
-        <p:txBody>
-          <a:bodyPr wrap="square" lIns="0" tIns="0" rIns="0" bIns="0" rtlCol="0" anchor="ctr"/>
-          <a:lstStyle/>
-          <a:p>
-            <a:pPr indent="0" marL="0">
-              <a:buNone/>
-            </a:pPr>
-            <a:r>
-              <a:rPr lang="en-US" sz="1150" dirty="0">
-                <a:solidFill>
-                  <a:srgbClr val="FFFFFF"/>
-                </a:solidFill>
-                <a:latin typeface="Calibri" pitchFamily="34" charset="0"/>
-                <a:ea typeface="Calibri" pitchFamily="34" charset="-122"/>
-                <a:cs typeface="Calibri" pitchFamily="34" charset="-120"/>
-              </a:rPr>
-              <a:t>Backend</a:t>
-            </a:r>
-            <a:endParaRPr lang="en-US" sz="1150" dirty="0"/>
-          </a:p>
-        </p:txBody>
-      </p:sp>
-      <p:sp>
-        <p:nvSpPr>
-          <p:cNvPr id="9" name="Text 7"/>
-          <p:cNvSpPr txBox="1"/>
-          <p:nvPr/>
-        </p:nvSpPr>
-        <p:spPr>
-          <a:xfrm>
-            <a:off x="777240" y="3017520"/>
-            <a:ext cx="3063240" cy="320040"/>
-          </a:xfrm>
-          <a:prstGeom prst="rect">
-            <a:avLst/>
-          </a:prstGeom>
-          <a:noFill/>
-          <a:ln/>
-        </p:spPr>
-        <p:txBody>
-          <a:bodyPr wrap="square" lIns="0" tIns="0" rIns="0" bIns="0" rtlCol="0" anchor="ctr"/>
-          <a:lstStyle/>
-          <a:p>
-            <a:pPr indent="0" marL="0">
-              <a:buNone/>
-            </a:pPr>
-            <a:r>
-              <a:rPr lang="en-US" sz="1100" b="1" i="1" dirty="0">
-                <a:solidFill>
-                  <a:srgbClr val="028090"/>
-                </a:solidFill>
-                <a:latin typeface="Calibri" pitchFamily="34" charset="0"/>
-                <a:ea typeface="Calibri" pitchFamily="34" charset="-122"/>
-                <a:cs typeface="Calibri" pitchFamily="34" charset="-120"/>
-              </a:rPr>
-              <a:t>Python + FastAPI</a:t>
-            </a:r>
-            <a:endParaRPr lang="en-US" sz="1100" dirty="0"/>
-          </a:p>
-        </p:txBody>
-      </p:sp>
-      <p:sp>
-        <p:nvSpPr>
-          <p:cNvPr id="10" name="Text 8"/>
-          <p:cNvSpPr txBox="1"/>
-          <p:nvPr/>
-        </p:nvSpPr>
-        <p:spPr>
-          <a:xfrm>
-            <a:off x="777240" y="3429000"/>
-            <a:ext cx="3063240" cy="2468880"/>
-          </a:xfrm>
-          <a:prstGeom prst="rect">
-            <a:avLst/>
-          </a:prstGeom>
-          <a:noFill/>
-          <a:ln/>
-        </p:spPr>
-        <p:txBody>
-          <a:bodyPr wrap="square" lIns="0" tIns="0" rIns="0" bIns="0" rtlCol="0" anchor="t"/>
-          <a:lstStyle/>
-          <a:p>
-            <a:pPr indent="0" marL="0">
-              <a:lnSpc>
-                <a:spcPct val="120000"/>
-              </a:lnSpc>
-              <a:buNone/>
-            </a:pPr>
-            <a:r>
-              <a:rPr lang="en-US" sz="1150" dirty="0">
-                <a:solidFill>
-                  <a:srgbClr val="0B2B2E"/>
-                </a:solidFill>
-                <a:latin typeface="Calibri" pitchFamily="34" charset="0"/>
-                <a:ea typeface="Calibri" pitchFamily="34" charset="-122"/>
-                <a:cs typeface="Calibri" pitchFamily="34" charset="-120"/>
-              </a:rPr>
-              <a:t>API REST, autenticación JWT, lógica de negocio, orquestación de la API de IA (consultas y manejo de errores) e integración de notificaciones</a:t>
-            </a:r>
-            <a:endParaRPr lang="en-US" sz="1150" dirty="0"/>
-          </a:p>
-        </p:txBody>
-      </p:sp>
-      <p:sp>
-        <p:nvSpPr>
-          <p:cNvPr id="11" name="Shape 9"/>
-          <p:cNvSpPr/>
-          <p:nvPr/>
-        </p:nvSpPr>
-        <p:spPr>
-          <a:xfrm>
-            <a:off x="4343400" y="2011680"/>
-            <a:ext cx="3520440" cy="4114800"/>
-          </a:xfrm>
-          <a:prstGeom prst="roundRect">
-            <a:avLst>
-              <a:gd name="adj" fmla="val 2597"/>
-            </a:avLst>
-          </a:prstGeom>
-          <a:solidFill>
-            <a:srgbClr val="FFFFFF"/>
-          </a:solidFill>
-          <a:ln w="12700">
-            <a:solidFill>
-              <a:srgbClr val="DCEDEC"/>
-            </a:solidFill>
-            <a:prstDash val="solid"/>
-          </a:ln>
-          <a:effectLst>
-            <a:outerShdw sx="100000" sy="100000" kx="0" ky="0" algn="bl" rotWithShape="0" blurRad="76200" dist="25400" dir="5400000">
-              <a:srgbClr val="1F3A3C">
-                <a:alpha val="13000"/>
-              </a:srgbClr>
-            </a:outerShdw>
-          </a:effectLst>
-        </p:spPr>
-      </p:sp>
-      <p:sp>
-        <p:nvSpPr>
-          <p:cNvPr id="12" name="Shape 10"/>
-          <p:cNvSpPr/>
-          <p:nvPr/>
-        </p:nvSpPr>
-        <p:spPr>
-          <a:xfrm>
-            <a:off x="4343400" y="2011680"/>
-            <a:ext cx="3520440" cy="822960"/>
-          </a:xfrm>
-          <a:prstGeom prst="roundRect">
-            <a:avLst>
-              <a:gd name="adj" fmla="val 11111"/>
-            </a:avLst>
-          </a:prstGeom>
-          <a:solidFill>
-            <a:srgbClr val="00A896"/>
-          </a:solidFill>
-          <a:ln/>
-        </p:spPr>
-      </p:sp>
-      <p:sp>
-        <p:nvSpPr>
-          <p:cNvPr id="13" name="Shape 11"/>
-          <p:cNvSpPr/>
-          <p:nvPr/>
-        </p:nvSpPr>
-        <p:spPr>
-          <a:xfrm>
-            <a:off x="4343400" y="2423160"/>
-            <a:ext cx="3520440" cy="411480"/>
-          </a:xfrm>
-          <a:prstGeom prst="rect">
-            <a:avLst/>
-          </a:prstGeom>
-          <a:solidFill>
-            <a:srgbClr val="00A896"/>
-          </a:solidFill>
-          <a:ln/>
-        </p:spPr>
-      </p:sp>
-      <p:sp>
-        <p:nvSpPr>
-          <p:cNvPr id="14" name="Text 12"/>
-          <p:cNvSpPr txBox="1"/>
-          <p:nvPr/>
-        </p:nvSpPr>
-        <p:spPr>
-          <a:xfrm>
-            <a:off x="4572000" y="2121408"/>
-            <a:ext cx="3063240" cy="365760"/>
-          </a:xfrm>
-          <a:prstGeom prst="rect">
-            <a:avLst/>
-          </a:prstGeom>
-          <a:noFill/>
-          <a:ln/>
-        </p:spPr>
-        <p:txBody>
-          <a:bodyPr wrap="square" lIns="0" tIns="0" rIns="0" bIns="0" rtlCol="0" anchor="ctr"/>
-          <a:lstStyle/>
-          <a:p>
-            <a:pPr indent="0" marL="0">
-              <a:buNone/>
-            </a:pPr>
-            <a:r>
-              <a:rPr lang="en-US" sz="1500" b="1" dirty="0">
-                <a:solidFill>
-                  <a:srgbClr val="FFFFFF"/>
-                </a:solidFill>
-                <a:latin typeface="Calibri" pitchFamily="34" charset="0"/>
-                <a:ea typeface="Calibri" pitchFamily="34" charset="-122"/>
-                <a:cs typeface="Calibri" pitchFamily="34" charset="-120"/>
-              </a:rPr>
-              <a:t>Sergio Ocares</a:t>
-            </a:r>
-            <a:endParaRPr lang="en-US" sz="1500" dirty="0"/>
-          </a:p>
-        </p:txBody>
-      </p:sp>
-      <p:sp>
-        <p:nvSpPr>
-          <p:cNvPr id="15" name="Text 13"/>
-          <p:cNvSpPr txBox="1"/>
-          <p:nvPr/>
-        </p:nvSpPr>
-        <p:spPr>
-          <a:xfrm>
-            <a:off x="4572000" y="2450592"/>
-            <a:ext cx="3063240" cy="320040"/>
-          </a:xfrm>
-          <a:prstGeom prst="rect">
-            <a:avLst/>
-          </a:prstGeom>
-          <a:noFill/>
-          <a:ln/>
-        </p:spPr>
-        <p:txBody>
-          <a:bodyPr wrap="square" lIns="0" tIns="0" rIns="0" bIns="0" rtlCol="0" anchor="ctr"/>
-          <a:lstStyle/>
-          <a:p>
-            <a:pPr indent="0" marL="0">
-              <a:buNone/>
-            </a:pPr>
-            <a:r>
-              <a:rPr lang="en-US" sz="1150" dirty="0">
-                <a:solidFill>
-                  <a:srgbClr val="FFFFFF"/>
-                </a:solidFill>
-                <a:latin typeface="Calibri" pitchFamily="34" charset="0"/>
-                <a:ea typeface="Calibri" pitchFamily="34" charset="-122"/>
-                <a:cs typeface="Calibri" pitchFamily="34" charset="-120"/>
-              </a:rPr>
-              <a:t>Base de datos + IA</a:t>
-            </a:r>
-            <a:endParaRPr lang="en-US" sz="1150" dirty="0"/>
-          </a:p>
-        </p:txBody>
-      </p:sp>
-      <p:sp>
-        <p:nvSpPr>
-          <p:cNvPr id="16" name="Text 14"/>
-          <p:cNvSpPr txBox="1"/>
-          <p:nvPr/>
-        </p:nvSpPr>
-        <p:spPr>
-          <a:xfrm>
-            <a:off x="4572000" y="3017520"/>
-            <a:ext cx="3063240" cy="320040"/>
-          </a:xfrm>
-          <a:prstGeom prst="rect">
-            <a:avLst/>
-          </a:prstGeom>
-          <a:noFill/>
-          <a:ln/>
-        </p:spPr>
-        <p:txBody>
-          <a:bodyPr wrap="square" lIns="0" tIns="0" rIns="0" bIns="0" rtlCol="0" anchor="ctr"/>
-          <a:lstStyle/>
-          <a:p>
-            <a:pPr indent="0" marL="0">
-              <a:buNone/>
-            </a:pPr>
-            <a:r>
-              <a:rPr lang="en-US" sz="1100" b="1" i="1" dirty="0">
-                <a:solidFill>
-                  <a:srgbClr val="00A896"/>
-                </a:solidFill>
-                <a:latin typeface="Calibri" pitchFamily="34" charset="0"/>
-                <a:ea typeface="Calibri" pitchFamily="34" charset="-122"/>
-                <a:cs typeface="Calibri" pitchFamily="34" charset="-120"/>
-              </a:rPr>
-              <a:t>PostgreSQL / API LLM</a:t>
-            </a:r>
-            <a:endParaRPr lang="en-US" sz="1100" dirty="0"/>
-          </a:p>
-        </p:txBody>
-      </p:sp>
-      <p:sp>
-        <p:nvSpPr>
-          <p:cNvPr id="17" name="Text 15"/>
-          <p:cNvSpPr txBox="1"/>
-          <p:nvPr/>
-        </p:nvSpPr>
-        <p:spPr>
-          <a:xfrm>
-            <a:off x="4572000" y="3429000"/>
-            <a:ext cx="3063240" cy="2468880"/>
-          </a:xfrm>
-          <a:prstGeom prst="rect">
-            <a:avLst/>
-          </a:prstGeom>
-          <a:noFill/>
-          <a:ln/>
-        </p:spPr>
-        <p:txBody>
-          <a:bodyPr wrap="square" lIns="0" tIns="0" rIns="0" bIns="0" rtlCol="0" anchor="t"/>
-          <a:lstStyle/>
-          <a:p>
-            <a:pPr indent="0" marL="0">
-              <a:lnSpc>
-                <a:spcPct val="120000"/>
-              </a:lnSpc>
-              <a:buNone/>
-            </a:pPr>
-            <a:r>
-              <a:rPr lang="en-US" sz="1150" dirty="0">
-                <a:solidFill>
-                  <a:srgbClr val="0B2B2E"/>
-                </a:solidFill>
-                <a:latin typeface="Calibri" pitchFamily="34" charset="0"/>
-                <a:ea typeface="Calibri" pitchFamily="34" charset="-122"/>
-                <a:cs typeface="Calibri" pitchFamily="34" charset="-120"/>
-              </a:rPr>
-              <a:t>Modelado de BD, indicadores y reportes de cumplimiento, define el contexto enviado a la IA y almacena sus resultados</a:t>
-            </a:r>
-            <a:endParaRPr lang="en-US" sz="1150" dirty="0"/>
-          </a:p>
-        </p:txBody>
-      </p:sp>
-      <p:sp>
-        <p:nvSpPr>
-          <p:cNvPr id="18" name="Shape 16"/>
-          <p:cNvSpPr/>
-          <p:nvPr/>
-        </p:nvSpPr>
-        <p:spPr>
-          <a:xfrm>
-            <a:off x="8138160" y="2011680"/>
-            <a:ext cx="3520440" cy="4114800"/>
-          </a:xfrm>
-          <a:prstGeom prst="roundRect">
-            <a:avLst>
-              <a:gd name="adj" fmla="val 2597"/>
-            </a:avLst>
-          </a:prstGeom>
-          <a:solidFill>
-            <a:srgbClr val="FFFFFF"/>
-          </a:solidFill>
-          <a:ln w="12700">
-            <a:solidFill>
-              <a:srgbClr val="DCEDEC"/>
-            </a:solidFill>
-            <a:prstDash val="solid"/>
-          </a:ln>
-          <a:effectLst>
-            <a:outerShdw sx="100000" sy="100000" kx="0" ky="0" algn="bl" rotWithShape="0" blurRad="76200" dist="25400" dir="5400000">
-              <a:srgbClr val="1F3A3C">
-                <a:alpha val="13000"/>
-              </a:srgbClr>
-            </a:outerShdw>
-          </a:effectLst>
-        </p:spPr>
-      </p:sp>
-      <p:sp>
-        <p:nvSpPr>
-          <p:cNvPr id="19" name="Shape 17"/>
-          <p:cNvSpPr/>
-          <p:nvPr/>
-        </p:nvSpPr>
-        <p:spPr>
-          <a:xfrm>
-            <a:off x="8138160" y="2011680"/>
-            <a:ext cx="3520440" cy="822960"/>
-          </a:xfrm>
-          <a:prstGeom prst="roundRect">
-            <a:avLst>
-              <a:gd name="adj" fmla="val 11111"/>
-            </a:avLst>
-          </a:prstGeom>
-          <a:solidFill>
-            <a:srgbClr val="02C39A"/>
-          </a:solidFill>
-          <a:ln/>
-        </p:spPr>
-      </p:sp>
-      <p:sp>
-        <p:nvSpPr>
-          <p:cNvPr id="20" name="Shape 18"/>
-          <p:cNvSpPr/>
-          <p:nvPr/>
-        </p:nvSpPr>
-        <p:spPr>
-          <a:xfrm>
-            <a:off x="8138160" y="2423160"/>
-            <a:ext cx="3520440" cy="411480"/>
-          </a:xfrm>
-          <a:prstGeom prst="rect">
-            <a:avLst/>
-          </a:prstGeom>
-          <a:solidFill>
-            <a:srgbClr val="02C39A"/>
-          </a:solidFill>
-          <a:ln/>
-        </p:spPr>
-      </p:sp>
-      <p:sp>
-        <p:nvSpPr>
-          <p:cNvPr id="21" name="Text 19"/>
-          <p:cNvSpPr txBox="1"/>
-          <p:nvPr/>
-        </p:nvSpPr>
-        <p:spPr>
-          <a:xfrm>
-            <a:off x="8366760" y="2121408"/>
-            <a:ext cx="3063240" cy="365760"/>
-          </a:xfrm>
-          <a:prstGeom prst="rect">
-            <a:avLst/>
-          </a:prstGeom>
-          <a:noFill/>
-          <a:ln/>
-        </p:spPr>
-        <p:txBody>
-          <a:bodyPr wrap="square" lIns="0" tIns="0" rIns="0" bIns="0" rtlCol="0" anchor="ctr"/>
-          <a:lstStyle/>
-          <a:p>
-            <a:pPr indent="0" marL="0">
-              <a:buNone/>
-            </a:pPr>
-            <a:r>
-              <a:rPr lang="en-US" sz="1500" b="1" dirty="0">
-                <a:solidFill>
-                  <a:srgbClr val="FFFFFF"/>
-                </a:solidFill>
-                <a:latin typeface="Calibri" pitchFamily="34" charset="0"/>
-                <a:ea typeface="Calibri" pitchFamily="34" charset="-122"/>
-                <a:cs typeface="Calibri" pitchFamily="34" charset="-120"/>
-              </a:rPr>
-              <a:t>Matías Pizarro</a:t>
-            </a:r>
-            <a:endParaRPr lang="en-US" sz="1500" dirty="0"/>
-          </a:p>
-        </p:txBody>
-      </p:sp>
-      <p:sp>
-        <p:nvSpPr>
-          <p:cNvPr id="22" name="Text 20"/>
-          <p:cNvSpPr txBox="1"/>
-          <p:nvPr/>
-        </p:nvSpPr>
-        <p:spPr>
-          <a:xfrm>
-            <a:off x="8366760" y="2450592"/>
-            <a:ext cx="3063240" cy="320040"/>
-          </a:xfrm>
-          <a:prstGeom prst="rect">
-            <a:avLst/>
-          </a:prstGeom>
-          <a:noFill/>
-          <a:ln/>
-        </p:spPr>
-        <p:txBody>
-          <a:bodyPr wrap="square" lIns="0" tIns="0" rIns="0" bIns="0" rtlCol="0" anchor="ctr"/>
-          <a:lstStyle/>
-          <a:p>
-            <a:pPr indent="0" marL="0">
-              <a:buNone/>
-            </a:pPr>
-            <a:r>
-              <a:rPr lang="en-US" sz="1150" dirty="0">
-                <a:solidFill>
-                  <a:srgbClr val="FFFFFF"/>
-                </a:solidFill>
-                <a:latin typeface="Calibri" pitchFamily="34" charset="0"/>
-                <a:ea typeface="Calibri" pitchFamily="34" charset="-122"/>
-                <a:cs typeface="Calibri" pitchFamily="34" charset="-120"/>
-              </a:rPr>
-              <a:t>App móvil</a:t>
-            </a:r>
-            <a:endParaRPr lang="en-US" sz="1150" dirty="0"/>
-          </a:p>
-        </p:txBody>
-      </p:sp>
-      <p:sp>
-        <p:nvSpPr>
-          <p:cNvPr id="23" name="Text 21"/>
-          <p:cNvSpPr txBox="1"/>
-          <p:nvPr/>
-        </p:nvSpPr>
-        <p:spPr>
-          <a:xfrm>
-            <a:off x="8366760" y="3017520"/>
-            <a:ext cx="3063240" cy="320040"/>
-          </a:xfrm>
-          <a:prstGeom prst="rect">
-            <a:avLst/>
-          </a:prstGeom>
-          <a:noFill/>
-          <a:ln/>
-        </p:spPr>
-        <p:txBody>
-          <a:bodyPr wrap="square" lIns="0" tIns="0" rIns="0" bIns="0" rtlCol="0" anchor="ctr"/>
-          <a:lstStyle/>
-          <a:p>
-            <a:pPr indent="0" marL="0">
-              <a:buNone/>
-            </a:pPr>
-            <a:r>
-              <a:rPr lang="en-US" sz="1100" b="1" i="1" dirty="0">
-                <a:solidFill>
-                  <a:srgbClr val="02C39A"/>
-                </a:solidFill>
-                <a:latin typeface="Calibri" pitchFamily="34" charset="0"/>
-                <a:ea typeface="Calibri" pitchFamily="34" charset="-122"/>
-                <a:cs typeface="Calibri" pitchFamily="34" charset="-120"/>
-              </a:rPr>
-              <a:t>Flutter / Dart</a:t>
-            </a:r>
-            <a:endParaRPr lang="en-US" sz="1100" dirty="0"/>
-          </a:p>
-        </p:txBody>
-      </p:sp>
-      <p:sp>
-        <p:nvSpPr>
-          <p:cNvPr id="24" name="Text 22"/>
-          <p:cNvSpPr txBox="1"/>
-          <p:nvPr/>
-        </p:nvSpPr>
-        <p:spPr>
-          <a:xfrm>
-            <a:off x="8366760" y="3429000"/>
-            <a:ext cx="3063240" cy="2468880"/>
-          </a:xfrm>
-          <a:prstGeom prst="rect">
-            <a:avLst/>
-          </a:prstGeom>
-          <a:noFill/>
-          <a:ln/>
-        </p:spPr>
-        <p:txBody>
-          <a:bodyPr wrap="square" lIns="0" tIns="0" rIns="0" bIns="0" rtlCol="0" anchor="t"/>
-          <a:lstStyle/>
-          <a:p>
-            <a:pPr indent="0" marL="0">
-              <a:lnSpc>
-                <a:spcPct val="120000"/>
-              </a:lnSpc>
-              <a:buNone/>
-            </a:pPr>
-            <a:r>
-              <a:rPr lang="en-US" sz="1150" dirty="0">
-                <a:solidFill>
-                  <a:srgbClr val="0B2B2E"/>
-                </a:solidFill>
-                <a:latin typeface="Calibri" pitchFamily="34" charset="0"/>
-                <a:ea typeface="Calibri" pitchFamily="34" charset="-122"/>
-                <a:cs typeface="Calibri" pitchFamily="34" charset="-120"/>
-              </a:rPr>
-              <a:t>Interfaz para titular y perfiles dependientes, experiencia de usuario accesible</a:t>
-            </a:r>
-            <a:endParaRPr lang="en-US" sz="1150" dirty="0"/>
-          </a:p>
-        </p:txBody>
-      </p:sp>
-      <p:sp>
-        <p:nvSpPr>
-          <p:cNvPr id="25" name="Text 23"/>
-          <p:cNvSpPr txBox="1"/>
-          <p:nvPr/>
-        </p:nvSpPr>
-        <p:spPr>
-          <a:xfrm>
-            <a:off x="457200" y="6510528"/>
-            <a:ext cx="7315200" cy="274320"/>
-          </a:xfrm>
-          <a:prstGeom prst="rect">
-            <a:avLst/>
-          </a:prstGeom>
-          <a:noFill/>
-          <a:ln/>
-        </p:spPr>
-        <p:txBody>
-          <a:bodyPr wrap="square" lIns="0" tIns="0" rIns="0" bIns="0" rtlCol="0" anchor="ctr"/>
-          <a:lstStyle/>
-          <a:p>
-            <a:pPr algn="l" indent="0" marL="0">
-              <a:buNone/>
-            </a:pPr>
-            <a:r>
-              <a:rPr lang="en-US" sz="900" dirty="0">
-                <a:solidFill>
-                  <a:srgbClr val="5C7A7C"/>
-                </a:solidFill>
-                <a:latin typeface="Calibri" pitchFamily="34" charset="0"/>
-                <a:ea typeface="Calibri" pitchFamily="34" charset="-122"/>
-                <a:cs typeface="Calibri" pitchFamily="34" charset="-120"/>
-              </a:rPr>
-              <a:t>Perfil Médico+  ·  Capstone_005D · Grupo 7  ·  PTY4614</a:t>
-            </a:r>
-            <a:endParaRPr lang="en-US" sz="900" dirty="0"/>
-          </a:p>
-        </p:txBody>
-      </p:sp>
-      <p:sp>
-        <p:nvSpPr>
-          <p:cNvPr id="26" name="Text 24"/>
-          <p:cNvSpPr txBox="1"/>
-          <p:nvPr/>
-        </p:nvSpPr>
-        <p:spPr>
-          <a:xfrm>
-            <a:off x="11521440" y="6510528"/>
-            <a:ext cx="457200" cy="274320"/>
-          </a:xfrm>
-          <a:prstGeom prst="rect">
-            <a:avLst/>
-          </a:prstGeom>
-          <a:noFill/>
-          <a:ln/>
-        </p:spPr>
-        <p:txBody>
-          <a:bodyPr wrap="square" lIns="0" tIns="0" rIns="0" bIns="0" rtlCol="0" anchor="ctr"/>
-          <a:lstStyle/>
-          <a:p>
-            <a:pPr algn="r" indent="0" marL="0">
-              <a:buNone/>
-            </a:pPr>
-            <a:r>
-              <a:rPr lang="en-US" sz="900" dirty="0">
-                <a:solidFill>
-                  <a:srgbClr val="5C7A7C"/>
-                </a:solidFill>
-                <a:latin typeface="Calibri" pitchFamily="34" charset="0"/>
-                <a:ea typeface="Calibri" pitchFamily="34" charset="-122"/>
-                <a:cs typeface="Calibri" pitchFamily="34" charset="-120"/>
-              </a:rPr>
               <a:t>11</a:t>
             </a:r>
             <a:endParaRPr lang="en-US" sz="900" dirty="0"/>
@@ -5453,7 +5450,7 @@
         <p:spPr>
           <a:xfrm>
             <a:off x="548640" y="457200"/>
-            <a:ext cx="7315200" cy="640080"/>
+            <a:ext cx="10058400" cy="640080"/>
           </a:xfrm>
           <a:prstGeom prst="rect">
             <a:avLst/>
@@ -5469,7 +5466,7 @@
               <a:buNone/>
             </a:pPr>
             <a:r>
-              <a:rPr lang="en-US" sz="3200" b="1" dirty="0">
+              <a:rPr lang="en-US" sz="3000" b="1" dirty="0">
                 <a:solidFill>
                   <a:srgbClr val="0B3D42"/>
                 </a:solidFill>
@@ -5477,9 +5474,9 @@
                 <a:ea typeface="Cambria" pitchFamily="34" charset="-122"/>
                 <a:cs typeface="Cambria" pitchFamily="34" charset="-120"/>
               </a:rPr>
-              <a:t>Plan de trabajo</a:t>
-            </a:r>
-            <a:endParaRPr lang="en-US" sz="3200" dirty="0"/>
+              <a:t>Metodología de trabajo y roles</a:t>
+            </a:r>
+            <a:endParaRPr lang="en-US" sz="3000" dirty="0"/>
           </a:p>
         </p:txBody>
       </p:sp>
@@ -5491,8 +5488,8 @@
         </p:nvSpPr>
         <p:spPr>
           <a:xfrm>
-            <a:off x="548640" y="1115568"/>
-            <a:ext cx="7315200" cy="365760"/>
+            <a:off x="548640" y="1170432"/>
+            <a:ext cx="10881360" cy="594360"/>
           </a:xfrm>
           <a:prstGeom prst="rect">
             <a:avLst/>
@@ -5516,7 +5513,7 @@
                 <a:ea typeface="Calibri" pitchFamily="34" charset="-122"/>
                 <a:cs typeface="Calibri" pitchFamily="34" charset="-120"/>
               </a:rPr>
-              <a:t>Semestre de 18 semanas · 3 fases</a:t>
+              <a:t>Trabajo ágil (Scrum), con sprints quincenales durante la Fase 2: Sprint Planning, seguimiento breve, demo de cierre y retrospectiva. Una historia se considera terminada (Definition of Done) cuando está integrada, probada y documentada en GitHub.</a:t>
             </a:r>
             <a:endParaRPr lang="en-US" sz="1300" dirty="0"/>
           </a:p>
@@ -5530,491 +5527,12 @@
         </p:nvSpPr>
         <p:spPr>
           <a:xfrm>
-            <a:off x="548640" y="1828800"/>
-            <a:ext cx="2458720" cy="777240"/>
+            <a:off x="548640" y="2011680"/>
+            <a:ext cx="3520440" cy="4114800"/>
           </a:xfrm>
           <a:prstGeom prst="roundRect">
             <a:avLst>
-              <a:gd name="adj" fmla="val 7059"/>
-            </a:avLst>
-          </a:prstGeom>
-          <a:solidFill>
-            <a:srgbClr val="028090"/>
-          </a:solidFill>
-          <a:ln/>
-        </p:spPr>
-      </p:sp>
-      <p:sp>
-        <p:nvSpPr>
-          <p:cNvPr id="5" name="Text 3"/>
-          <p:cNvSpPr txBox="1"/>
-          <p:nvPr/>
-        </p:nvSpPr>
-        <p:spPr>
-          <a:xfrm>
-            <a:off x="640080" y="1883664"/>
-            <a:ext cx="2275840" cy="320040"/>
-          </a:xfrm>
-          <a:prstGeom prst="rect">
-            <a:avLst/>
-          </a:prstGeom>
-          <a:noFill/>
-          <a:ln/>
-        </p:spPr>
-        <p:txBody>
-          <a:bodyPr wrap="square" lIns="0" tIns="0" rIns="0" bIns="0" rtlCol="0" anchor="ctr"/>
-          <a:lstStyle/>
-          <a:p>
-            <a:pPr indent="0" marL="0">
-              <a:buNone/>
-            </a:pPr>
-            <a:r>
-              <a:rPr lang="en-US" sz="1300" b="1" dirty="0">
-                <a:solidFill>
-                  <a:srgbClr val="FFFFFF"/>
-                </a:solidFill>
-                <a:latin typeface="Calibri" pitchFamily="34" charset="0"/>
-                <a:ea typeface="Calibri" pitchFamily="34" charset="-122"/>
-                <a:cs typeface="Calibri" pitchFamily="34" charset="-120"/>
-              </a:rPr>
-              <a:t>Fase 1</a:t>
-            </a:r>
-            <a:endParaRPr lang="en-US" sz="1300" dirty="0"/>
-          </a:p>
-        </p:txBody>
-      </p:sp>
-      <p:sp>
-        <p:nvSpPr>
-          <p:cNvPr id="6" name="Text 4"/>
-          <p:cNvSpPr txBox="1"/>
-          <p:nvPr/>
-        </p:nvSpPr>
-        <p:spPr>
-          <a:xfrm>
-            <a:off x="640080" y="2194560"/>
-            <a:ext cx="2275840" cy="274320"/>
-          </a:xfrm>
-          <a:prstGeom prst="rect">
-            <a:avLst/>
-          </a:prstGeom>
-          <a:noFill/>
-          <a:ln/>
-        </p:spPr>
-        <p:txBody>
-          <a:bodyPr wrap="square" lIns="0" tIns="0" rIns="0" bIns="0" rtlCol="0" anchor="ctr"/>
-          <a:lstStyle/>
-          <a:p>
-            <a:pPr indent="0" marL="0">
-              <a:buNone/>
-            </a:pPr>
-            <a:r>
-              <a:rPr lang="en-US" sz="950" dirty="0">
-                <a:solidFill>
-                  <a:srgbClr val="FFFFFF"/>
-                </a:solidFill>
-                <a:latin typeface="Calibri" pitchFamily="34" charset="0"/>
-                <a:ea typeface="Calibri" pitchFamily="34" charset="-122"/>
-                <a:cs typeface="Calibri" pitchFamily="34" charset="-120"/>
-              </a:rPr>
-              <a:t>Definición</a:t>
-            </a:r>
-            <a:endParaRPr lang="en-US" sz="950" dirty="0"/>
-          </a:p>
-        </p:txBody>
-      </p:sp>
-      <p:sp>
-        <p:nvSpPr>
-          <p:cNvPr id="7" name="Text 5"/>
-          <p:cNvSpPr txBox="1"/>
-          <p:nvPr/>
-        </p:nvSpPr>
-        <p:spPr>
-          <a:xfrm>
-            <a:off x="640080" y="2395728"/>
-            <a:ext cx="2275840" cy="228600"/>
-          </a:xfrm>
-          <a:prstGeom prst="rect">
-            <a:avLst/>
-          </a:prstGeom>
-          <a:noFill/>
-          <a:ln/>
-        </p:spPr>
-        <p:txBody>
-          <a:bodyPr wrap="square" lIns="0" tIns="0" rIns="0" bIns="0" rtlCol="0" anchor="ctr"/>
-          <a:lstStyle/>
-          <a:p>
-            <a:pPr indent="0" marL="0">
-              <a:buNone/>
-            </a:pPr>
-            <a:r>
-              <a:rPr lang="en-US" sz="900" i="1" dirty="0">
-                <a:solidFill>
-                  <a:srgbClr val="FFFFFF"/>
-                </a:solidFill>
-                <a:latin typeface="Calibri" pitchFamily="34" charset="0"/>
-                <a:ea typeface="Calibri" pitchFamily="34" charset="-122"/>
-                <a:cs typeface="Calibri" pitchFamily="34" charset="-120"/>
-              </a:rPr>
-              <a:t>S1 – S4</a:t>
-            </a:r>
-            <a:endParaRPr lang="en-US" sz="900" dirty="0"/>
-          </a:p>
-        </p:txBody>
-      </p:sp>
-      <p:sp>
-        <p:nvSpPr>
-          <p:cNvPr id="8" name="Shape 6"/>
-          <p:cNvSpPr/>
-          <p:nvPr/>
-        </p:nvSpPr>
-        <p:spPr>
-          <a:xfrm>
-            <a:off x="3007360" y="1828800"/>
-            <a:ext cx="6761480" cy="777240"/>
-          </a:xfrm>
-          <a:prstGeom prst="roundRect">
-            <a:avLst>
-              <a:gd name="adj" fmla="val 7059"/>
-            </a:avLst>
-          </a:prstGeom>
-          <a:solidFill>
-            <a:srgbClr val="00A896"/>
-          </a:solidFill>
-          <a:ln/>
-        </p:spPr>
-      </p:sp>
-      <p:sp>
-        <p:nvSpPr>
-          <p:cNvPr id="9" name="Text 7"/>
-          <p:cNvSpPr txBox="1"/>
-          <p:nvPr/>
-        </p:nvSpPr>
-        <p:spPr>
-          <a:xfrm>
-            <a:off x="3098800" y="1883664"/>
-            <a:ext cx="6578600" cy="320040"/>
-          </a:xfrm>
-          <a:prstGeom prst="rect">
-            <a:avLst/>
-          </a:prstGeom>
-          <a:noFill/>
-          <a:ln/>
-        </p:spPr>
-        <p:txBody>
-          <a:bodyPr wrap="square" lIns="0" tIns="0" rIns="0" bIns="0" rtlCol="0" anchor="ctr"/>
-          <a:lstStyle/>
-          <a:p>
-            <a:pPr indent="0" marL="0">
-              <a:buNone/>
-            </a:pPr>
-            <a:r>
-              <a:rPr lang="en-US" sz="1300" b="1" dirty="0">
-                <a:solidFill>
-                  <a:srgbClr val="FFFFFF"/>
-                </a:solidFill>
-                <a:latin typeface="Calibri" pitchFamily="34" charset="0"/>
-                <a:ea typeface="Calibri" pitchFamily="34" charset="-122"/>
-                <a:cs typeface="Calibri" pitchFamily="34" charset="-120"/>
-              </a:rPr>
-              <a:t>Fase 2</a:t>
-            </a:r>
-            <a:endParaRPr lang="en-US" sz="1300" dirty="0"/>
-          </a:p>
-        </p:txBody>
-      </p:sp>
-      <p:sp>
-        <p:nvSpPr>
-          <p:cNvPr id="10" name="Text 8"/>
-          <p:cNvSpPr txBox="1"/>
-          <p:nvPr/>
-        </p:nvSpPr>
-        <p:spPr>
-          <a:xfrm>
-            <a:off x="3098800" y="2194560"/>
-            <a:ext cx="6578600" cy="274320"/>
-          </a:xfrm>
-          <a:prstGeom prst="rect">
-            <a:avLst/>
-          </a:prstGeom>
-          <a:noFill/>
-          <a:ln/>
-        </p:spPr>
-        <p:txBody>
-          <a:bodyPr wrap="square" lIns="0" tIns="0" rIns="0" bIns="0" rtlCol="0" anchor="ctr"/>
-          <a:lstStyle/>
-          <a:p>
-            <a:pPr indent="0" marL="0">
-              <a:buNone/>
-            </a:pPr>
-            <a:r>
-              <a:rPr lang="en-US" sz="950" dirty="0">
-                <a:solidFill>
-                  <a:srgbClr val="FFFFFF"/>
-                </a:solidFill>
-                <a:latin typeface="Calibri" pitchFamily="34" charset="0"/>
-                <a:ea typeface="Calibri" pitchFamily="34" charset="-122"/>
-                <a:cs typeface="Calibri" pitchFamily="34" charset="-120"/>
-              </a:rPr>
-              <a:t>Desarrollo (6 sprints)</a:t>
-            </a:r>
-            <a:endParaRPr lang="en-US" sz="950" dirty="0"/>
-          </a:p>
-        </p:txBody>
-      </p:sp>
-      <p:sp>
-        <p:nvSpPr>
-          <p:cNvPr id="11" name="Text 9"/>
-          <p:cNvSpPr txBox="1"/>
-          <p:nvPr/>
-        </p:nvSpPr>
-        <p:spPr>
-          <a:xfrm>
-            <a:off x="3098800" y="2395728"/>
-            <a:ext cx="6578600" cy="228600"/>
-          </a:xfrm>
-          <a:prstGeom prst="rect">
-            <a:avLst/>
-          </a:prstGeom>
-          <a:noFill/>
-          <a:ln/>
-        </p:spPr>
-        <p:txBody>
-          <a:bodyPr wrap="square" lIns="0" tIns="0" rIns="0" bIns="0" rtlCol="0" anchor="ctr"/>
-          <a:lstStyle/>
-          <a:p>
-            <a:pPr indent="0" marL="0">
-              <a:buNone/>
-            </a:pPr>
-            <a:r>
-              <a:rPr lang="en-US" sz="900" i="1" dirty="0">
-                <a:solidFill>
-                  <a:srgbClr val="FFFFFF"/>
-                </a:solidFill>
-                <a:latin typeface="Calibri" pitchFamily="34" charset="0"/>
-                <a:ea typeface="Calibri" pitchFamily="34" charset="-122"/>
-                <a:cs typeface="Calibri" pitchFamily="34" charset="-120"/>
-              </a:rPr>
-              <a:t>S5 – S15</a:t>
-            </a:r>
-            <a:endParaRPr lang="en-US" sz="900" dirty="0"/>
-          </a:p>
-        </p:txBody>
-      </p:sp>
-      <p:sp>
-        <p:nvSpPr>
-          <p:cNvPr id="12" name="Shape 10"/>
-          <p:cNvSpPr/>
-          <p:nvPr/>
-        </p:nvSpPr>
-        <p:spPr>
-          <a:xfrm>
-            <a:off x="9768840" y="1828800"/>
-            <a:ext cx="1844040" cy="777240"/>
-          </a:xfrm>
-          <a:prstGeom prst="roundRect">
-            <a:avLst>
-              <a:gd name="adj" fmla="val 7059"/>
-            </a:avLst>
-          </a:prstGeom>
-          <a:solidFill>
-            <a:srgbClr val="02C39A"/>
-          </a:solidFill>
-          <a:ln/>
-        </p:spPr>
-      </p:sp>
-      <p:sp>
-        <p:nvSpPr>
-          <p:cNvPr id="13" name="Text 11"/>
-          <p:cNvSpPr txBox="1"/>
-          <p:nvPr/>
-        </p:nvSpPr>
-        <p:spPr>
-          <a:xfrm>
-            <a:off x="9860280" y="1883664"/>
-            <a:ext cx="1661160" cy="320040"/>
-          </a:xfrm>
-          <a:prstGeom prst="rect">
-            <a:avLst/>
-          </a:prstGeom>
-          <a:noFill/>
-          <a:ln/>
-        </p:spPr>
-        <p:txBody>
-          <a:bodyPr wrap="square" lIns="0" tIns="0" rIns="0" bIns="0" rtlCol="0" anchor="ctr"/>
-          <a:lstStyle/>
-          <a:p>
-            <a:pPr indent="0" marL="0">
-              <a:buNone/>
-            </a:pPr>
-            <a:r>
-              <a:rPr lang="en-US" sz="1300" b="1" dirty="0">
-                <a:solidFill>
-                  <a:srgbClr val="FFFFFF"/>
-                </a:solidFill>
-                <a:latin typeface="Calibri" pitchFamily="34" charset="0"/>
-                <a:ea typeface="Calibri" pitchFamily="34" charset="-122"/>
-                <a:cs typeface="Calibri" pitchFamily="34" charset="-120"/>
-              </a:rPr>
-              <a:t>Fase 3</a:t>
-            </a:r>
-            <a:endParaRPr lang="en-US" sz="1300" dirty="0"/>
-          </a:p>
-        </p:txBody>
-      </p:sp>
-      <p:sp>
-        <p:nvSpPr>
-          <p:cNvPr id="14" name="Text 12"/>
-          <p:cNvSpPr txBox="1"/>
-          <p:nvPr/>
-        </p:nvSpPr>
-        <p:spPr>
-          <a:xfrm>
-            <a:off x="9860280" y="2194560"/>
-            <a:ext cx="1661160" cy="274320"/>
-          </a:xfrm>
-          <a:prstGeom prst="rect">
-            <a:avLst/>
-          </a:prstGeom>
-          <a:noFill/>
-          <a:ln/>
-        </p:spPr>
-        <p:txBody>
-          <a:bodyPr wrap="square" lIns="0" tIns="0" rIns="0" bIns="0" rtlCol="0" anchor="ctr"/>
-          <a:lstStyle/>
-          <a:p>
-            <a:pPr indent="0" marL="0">
-              <a:buNone/>
-            </a:pPr>
-            <a:r>
-              <a:rPr lang="en-US" sz="950" dirty="0">
-                <a:solidFill>
-                  <a:srgbClr val="FFFFFF"/>
-                </a:solidFill>
-                <a:latin typeface="Calibri" pitchFamily="34" charset="0"/>
-                <a:ea typeface="Calibri" pitchFamily="34" charset="-122"/>
-                <a:cs typeface="Calibri" pitchFamily="34" charset="-120"/>
-              </a:rPr>
-              <a:t>Presentación</a:t>
-            </a:r>
-            <a:endParaRPr lang="en-US" sz="950" dirty="0"/>
-          </a:p>
-        </p:txBody>
-      </p:sp>
-      <p:sp>
-        <p:nvSpPr>
-          <p:cNvPr id="15" name="Text 13"/>
-          <p:cNvSpPr txBox="1"/>
-          <p:nvPr/>
-        </p:nvSpPr>
-        <p:spPr>
-          <a:xfrm>
-            <a:off x="9860280" y="2395728"/>
-            <a:ext cx="1661160" cy="228600"/>
-          </a:xfrm>
-          <a:prstGeom prst="rect">
-            <a:avLst/>
-          </a:prstGeom>
-          <a:noFill/>
-          <a:ln/>
-        </p:spPr>
-        <p:txBody>
-          <a:bodyPr wrap="square" lIns="0" tIns="0" rIns="0" bIns="0" rtlCol="0" anchor="ctr"/>
-          <a:lstStyle/>
-          <a:p>
-            <a:pPr indent="0" marL="0">
-              <a:buNone/>
-            </a:pPr>
-            <a:r>
-              <a:rPr lang="en-US" sz="900" i="1" dirty="0">
-                <a:solidFill>
-                  <a:srgbClr val="FFFFFF"/>
-                </a:solidFill>
-                <a:latin typeface="Calibri" pitchFamily="34" charset="0"/>
-                <a:ea typeface="Calibri" pitchFamily="34" charset="-122"/>
-                <a:cs typeface="Calibri" pitchFamily="34" charset="-120"/>
-              </a:rPr>
-              <a:t>S16 – S18</a:t>
-            </a:r>
-            <a:endParaRPr lang="en-US" sz="900" dirty="0"/>
-          </a:p>
-        </p:txBody>
-      </p:sp>
-      <p:sp>
-        <p:nvSpPr>
-          <p:cNvPr id="16" name="Shape 14"/>
-          <p:cNvSpPr/>
-          <p:nvPr/>
-        </p:nvSpPr>
-        <p:spPr>
-          <a:xfrm>
-            <a:off x="3007360" y="1691640"/>
-            <a:ext cx="0" cy="1051560"/>
-          </a:xfrm>
-          <a:prstGeom prst="line">
-            <a:avLst/>
-          </a:prstGeom>
-          <a:noFill/>
-          <a:ln w="25400">
-            <a:solidFill>
-              <a:srgbClr val="0B3D42"/>
-            </a:solidFill>
-            <a:prstDash val="dash"/>
-          </a:ln>
-        </p:spPr>
-      </p:sp>
-      <p:sp>
-        <p:nvSpPr>
-          <p:cNvPr id="17" name="Text 15"/>
-          <p:cNvSpPr txBox="1"/>
-          <p:nvPr/>
-        </p:nvSpPr>
-        <p:spPr>
-          <a:xfrm>
-            <a:off x="2367280" y="1325880"/>
-            <a:ext cx="1280160" cy="320040"/>
-          </a:xfrm>
-          <a:prstGeom prst="rect">
-            <a:avLst/>
-          </a:prstGeom>
-          <a:noFill/>
-          <a:ln/>
-        </p:spPr>
-        <p:txBody>
-          <a:bodyPr wrap="square" lIns="0" tIns="0" rIns="0" bIns="0" rtlCol="0" anchor="ctr"/>
-          <a:lstStyle/>
-          <a:p>
-            <a:pPr algn="ctr" indent="0" marL="0">
-              <a:buNone/>
-            </a:pPr>
-            <a:r>
-              <a:rPr lang="en-US" sz="1000" b="1" dirty="0">
-                <a:solidFill>
-                  <a:srgbClr val="0B3D42"/>
-                </a:solidFill>
-                <a:latin typeface="Calibri" pitchFamily="34" charset="0"/>
-                <a:ea typeface="Calibri" pitchFamily="34" charset="-122"/>
-                <a:cs typeface="Calibri" pitchFamily="34" charset="-120"/>
-              </a:rPr>
-              <a:t>Estamos aquí</a:t>
-            </a:r>
-            <a:endParaRPr lang="en-US" sz="1000" dirty="0"/>
-          </a:p>
-        </p:txBody>
-      </p:sp>
-      <p:sp>
-        <p:nvSpPr>
-          <p:cNvPr id="18" name="Shape 16"/>
-          <p:cNvSpPr/>
-          <p:nvPr/>
-        </p:nvSpPr>
-        <p:spPr>
-          <a:xfrm>
-            <a:off x="548640" y="2971800"/>
-            <a:ext cx="3535680" cy="868680"/>
-          </a:xfrm>
-          <a:prstGeom prst="roundRect">
-            <a:avLst>
-              <a:gd name="adj" fmla="val 7368"/>
+              <a:gd name="adj" fmla="val 2597"/>
             </a:avLst>
           </a:prstGeom>
           <a:solidFill>
@@ -6026,18 +5544,67 @@
             </a:solidFill>
             <a:prstDash val="solid"/>
           </a:ln>
-        </p:spPr>
-      </p:sp>
-      <p:sp>
-        <p:nvSpPr>
-          <p:cNvPr id="19" name="Text 17"/>
-          <p:cNvSpPr txBox="1"/>
-          <p:nvPr/>
-        </p:nvSpPr>
-        <p:spPr>
-          <a:xfrm>
-            <a:off x="685800" y="3044952"/>
-            <a:ext cx="3261360" cy="274320"/>
+          <a:effectLst>
+            <a:outerShdw sx="100000" sy="100000" kx="0" ky="0" algn="bl" rotWithShape="0" blurRad="76200" dist="25400" dir="5400000">
+              <a:srgbClr val="1F3A3C">
+                <a:alpha val="13000"/>
+              </a:srgbClr>
+            </a:outerShdw>
+          </a:effectLst>
+        </p:spPr>
+      </p:sp>
+      <p:sp>
+        <p:nvSpPr>
+          <p:cNvPr id="5" name="Shape 3"/>
+          <p:cNvSpPr/>
+          <p:nvPr/>
+        </p:nvSpPr>
+        <p:spPr>
+          <a:xfrm>
+            <a:off x="548640" y="2011680"/>
+            <a:ext cx="3520440" cy="822960"/>
+          </a:xfrm>
+          <a:prstGeom prst="roundRect">
+            <a:avLst>
+              <a:gd name="adj" fmla="val 11111"/>
+            </a:avLst>
+          </a:prstGeom>
+          <a:solidFill>
+            <a:srgbClr val="028090"/>
+          </a:solidFill>
+          <a:ln/>
+        </p:spPr>
+      </p:sp>
+      <p:sp>
+        <p:nvSpPr>
+          <p:cNvPr id="6" name="Shape 4"/>
+          <p:cNvSpPr/>
+          <p:nvPr/>
+        </p:nvSpPr>
+        <p:spPr>
+          <a:xfrm>
+            <a:off x="548640" y="2423160"/>
+            <a:ext cx="3520440" cy="411480"/>
+          </a:xfrm>
+          <a:prstGeom prst="rect">
+            <a:avLst/>
+          </a:prstGeom>
+          <a:solidFill>
+            <a:srgbClr val="028090"/>
+          </a:solidFill>
+          <a:ln/>
+        </p:spPr>
+      </p:sp>
+      <p:sp>
+        <p:nvSpPr>
+          <p:cNvPr id="7" name="Text 5"/>
+          <p:cNvSpPr txBox="1"/>
+          <p:nvPr/>
+        </p:nvSpPr>
+        <p:spPr>
+          <a:xfrm>
+            <a:off x="777240" y="2121408"/>
+            <a:ext cx="3063240" cy="365760"/>
           </a:xfrm>
           <a:prstGeom prst="rect">
             <a:avLst/>
@@ -6053,7 +5620,85 @@
               <a:buNone/>
             </a:pPr>
             <a:r>
-              <a:rPr lang="en-US" sz="1150" b="1" dirty="0">
+              <a:rPr lang="en-US" sz="1500" b="1" dirty="0">
+                <a:solidFill>
+                  <a:srgbClr val="FFFFFF"/>
+                </a:solidFill>
+                <a:latin typeface="Calibri" pitchFamily="34" charset="0"/>
+                <a:ea typeface="Calibri" pitchFamily="34" charset="-122"/>
+                <a:cs typeface="Calibri" pitchFamily="34" charset="-120"/>
+              </a:rPr>
+              <a:t>Benjamín Leiva</a:t>
+            </a:r>
+            <a:endParaRPr lang="en-US" sz="1500" dirty="0"/>
+          </a:p>
+        </p:txBody>
+      </p:sp>
+      <p:sp>
+        <p:nvSpPr>
+          <p:cNvPr id="8" name="Text 6"/>
+          <p:cNvSpPr txBox="1"/>
+          <p:nvPr/>
+        </p:nvSpPr>
+        <p:spPr>
+          <a:xfrm>
+            <a:off x="777240" y="2450592"/>
+            <a:ext cx="3063240" cy="320040"/>
+          </a:xfrm>
+          <a:prstGeom prst="rect">
+            <a:avLst/>
+          </a:prstGeom>
+          <a:noFill/>
+          <a:ln/>
+        </p:spPr>
+        <p:txBody>
+          <a:bodyPr wrap="square" lIns="0" tIns="0" rIns="0" bIns="0" rtlCol="0" anchor="ctr"/>
+          <a:lstStyle/>
+          <a:p>
+            <a:pPr indent="0" marL="0">
+              <a:buNone/>
+            </a:pPr>
+            <a:r>
+              <a:rPr lang="en-US" sz="1150" dirty="0">
+                <a:solidFill>
+                  <a:srgbClr val="FFFFFF"/>
+                </a:solidFill>
+                <a:latin typeface="Calibri" pitchFamily="34" charset="0"/>
+                <a:ea typeface="Calibri" pitchFamily="34" charset="-122"/>
+                <a:cs typeface="Calibri" pitchFamily="34" charset="-120"/>
+              </a:rPr>
+              <a:t>Backend</a:t>
+            </a:r>
+            <a:endParaRPr lang="en-US" sz="1150" dirty="0"/>
+          </a:p>
+        </p:txBody>
+      </p:sp>
+      <p:sp>
+        <p:nvSpPr>
+          <p:cNvPr id="9" name="Text 7"/>
+          <p:cNvSpPr txBox="1"/>
+          <p:nvPr/>
+        </p:nvSpPr>
+        <p:spPr>
+          <a:xfrm>
+            <a:off x="777240" y="3017520"/>
+            <a:ext cx="3063240" cy="320040"/>
+          </a:xfrm>
+          <a:prstGeom prst="rect">
+            <a:avLst/>
+          </a:prstGeom>
+          <a:noFill/>
+          <a:ln/>
+        </p:spPr>
+        <p:txBody>
+          <a:bodyPr wrap="square" lIns="0" tIns="0" rIns="0" bIns="0" rtlCol="0" anchor="ctr"/>
+          <a:lstStyle/>
+          <a:p>
+            <a:pPr indent="0" marL="0">
+              <a:buNone/>
+            </a:pPr>
+            <a:r>
+              <a:rPr lang="en-US" sz="1100" b="1" i="1" dirty="0">
                 <a:solidFill>
                   <a:srgbClr val="028090"/>
                 </a:solidFill>
@@ -6061,41 +5706,41 @@
                 <a:ea typeface="Calibri" pitchFamily="34" charset="-122"/>
                 <a:cs typeface="Calibri" pitchFamily="34" charset="-120"/>
               </a:rPr>
-              <a:t>Sprint 1 (S5-6)</a:t>
-            </a:r>
-            <a:endParaRPr lang="en-US" sz="1150" dirty="0"/>
-          </a:p>
-        </p:txBody>
-      </p:sp>
-      <p:sp>
-        <p:nvSpPr>
-          <p:cNvPr id="20" name="Text 18"/>
-          <p:cNvSpPr txBox="1"/>
-          <p:nvPr/>
-        </p:nvSpPr>
-        <p:spPr>
-          <a:xfrm>
-            <a:off x="685800" y="3319272"/>
-            <a:ext cx="3261360" cy="457200"/>
-          </a:xfrm>
-          <a:prstGeom prst="rect">
-            <a:avLst/>
-          </a:prstGeom>
-          <a:noFill/>
-          <a:ln/>
-        </p:spPr>
-        <p:txBody>
-          <a:bodyPr wrap="square" lIns="0" tIns="0" rIns="0" bIns="0" rtlCol="0" anchor="ctr"/>
+              <a:t>Python + FastAPI</a:t>
+            </a:r>
+            <a:endParaRPr lang="en-US" sz="1100" dirty="0"/>
+          </a:p>
+        </p:txBody>
+      </p:sp>
+      <p:sp>
+        <p:nvSpPr>
+          <p:cNvPr id="10" name="Text 8"/>
+          <p:cNvSpPr txBox="1"/>
+          <p:nvPr/>
+        </p:nvSpPr>
+        <p:spPr>
+          <a:xfrm>
+            <a:off x="777240" y="3429000"/>
+            <a:ext cx="3063240" cy="2468880"/>
+          </a:xfrm>
+          <a:prstGeom prst="rect">
+            <a:avLst/>
+          </a:prstGeom>
+          <a:noFill/>
+          <a:ln/>
+        </p:spPr>
+        <p:txBody>
+          <a:bodyPr wrap="square" lIns="0" tIns="0" rIns="0" bIns="0" rtlCol="0" anchor="t"/>
           <a:lstStyle/>
           <a:p>
             <a:pPr indent="0" marL="0">
               <a:lnSpc>
-                <a:spcPct val="105000"/>
+                <a:spcPct val="120000"/>
               </a:lnSpc>
               <a:buNone/>
             </a:pPr>
             <a:r>
-              <a:rPr lang="en-US" sz="1000" dirty="0">
+              <a:rPr lang="en-US" sz="1150" dirty="0">
                 <a:solidFill>
                   <a:srgbClr val="0B2B2E"/>
                 </a:solidFill>
@@ -6103,26 +5748,26 @@
                 <a:ea typeface="Calibri" pitchFamily="34" charset="-122"/>
                 <a:cs typeface="Calibri" pitchFamily="34" charset="-120"/>
               </a:rPr>
-              <a:t>Autenticación, modelo de datos, estructura base app</a:t>
-            </a:r>
-            <a:endParaRPr lang="en-US" sz="1000" dirty="0"/>
-          </a:p>
-        </p:txBody>
-      </p:sp>
-      <p:sp>
-        <p:nvSpPr>
-          <p:cNvPr id="21" name="Shape 19"/>
+              <a:t>API REST, autenticación JWT, lógica de negocio, orquestación de la API de IA (consultas y manejo de errores) e integración de notificaciones</a:t>
+            </a:r>
+            <a:endParaRPr lang="en-US" sz="1150" dirty="0"/>
+          </a:p>
+        </p:txBody>
+      </p:sp>
+      <p:sp>
+        <p:nvSpPr>
+          <p:cNvPr id="11" name="Shape 9"/>
           <p:cNvSpPr/>
           <p:nvPr/>
         </p:nvSpPr>
         <p:spPr>
           <a:xfrm>
-            <a:off x="4312920" y="2971800"/>
-            <a:ext cx="3535680" cy="868680"/>
+            <a:off x="4343400" y="2011680"/>
+            <a:ext cx="3520440" cy="4114800"/>
           </a:xfrm>
           <a:prstGeom prst="roundRect">
             <a:avLst>
-              <a:gd name="adj" fmla="val 7368"/>
+              <a:gd name="adj" fmla="val 2597"/>
             </a:avLst>
           </a:prstGeom>
           <a:solidFill>
@@ -6134,18 +5779,67 @@
             </a:solidFill>
             <a:prstDash val="solid"/>
           </a:ln>
-        </p:spPr>
-      </p:sp>
-      <p:sp>
-        <p:nvSpPr>
-          <p:cNvPr id="22" name="Text 20"/>
-          <p:cNvSpPr txBox="1"/>
-          <p:nvPr/>
-        </p:nvSpPr>
-        <p:spPr>
-          <a:xfrm>
-            <a:off x="4450080" y="3044952"/>
-            <a:ext cx="3261360" cy="274320"/>
+          <a:effectLst>
+            <a:outerShdw sx="100000" sy="100000" kx="0" ky="0" algn="bl" rotWithShape="0" blurRad="76200" dist="25400" dir="5400000">
+              <a:srgbClr val="1F3A3C">
+                <a:alpha val="13000"/>
+              </a:srgbClr>
+            </a:outerShdw>
+          </a:effectLst>
+        </p:spPr>
+      </p:sp>
+      <p:sp>
+        <p:nvSpPr>
+          <p:cNvPr id="12" name="Shape 10"/>
+          <p:cNvSpPr/>
+          <p:nvPr/>
+        </p:nvSpPr>
+        <p:spPr>
+          <a:xfrm>
+            <a:off x="4343400" y="2011680"/>
+            <a:ext cx="3520440" cy="822960"/>
+          </a:xfrm>
+          <a:prstGeom prst="roundRect">
+            <a:avLst>
+              <a:gd name="adj" fmla="val 11111"/>
+            </a:avLst>
+          </a:prstGeom>
+          <a:solidFill>
+            <a:srgbClr val="00A896"/>
+          </a:solidFill>
+          <a:ln/>
+        </p:spPr>
+      </p:sp>
+      <p:sp>
+        <p:nvSpPr>
+          <p:cNvPr id="13" name="Shape 11"/>
+          <p:cNvSpPr/>
+          <p:nvPr/>
+        </p:nvSpPr>
+        <p:spPr>
+          <a:xfrm>
+            <a:off x="4343400" y="2423160"/>
+            <a:ext cx="3520440" cy="411480"/>
+          </a:xfrm>
+          <a:prstGeom prst="rect">
+            <a:avLst/>
+          </a:prstGeom>
+          <a:solidFill>
+            <a:srgbClr val="00A896"/>
+          </a:solidFill>
+          <a:ln/>
+        </p:spPr>
+      </p:sp>
+      <p:sp>
+        <p:nvSpPr>
+          <p:cNvPr id="14" name="Text 12"/>
+          <p:cNvSpPr txBox="1"/>
+          <p:nvPr/>
+        </p:nvSpPr>
+        <p:spPr>
+          <a:xfrm>
+            <a:off x="4572000" y="2121408"/>
+            <a:ext cx="3063240" cy="365760"/>
           </a:xfrm>
           <a:prstGeom prst="rect">
             <a:avLst/>
@@ -6161,15 +5855,54 @@
               <a:buNone/>
             </a:pPr>
             <a:r>
-              <a:rPr lang="en-US" sz="1150" b="1" dirty="0">
-                <a:solidFill>
-                  <a:srgbClr val="028090"/>
-                </a:solidFill>
-                <a:latin typeface="Calibri" pitchFamily="34" charset="0"/>
-                <a:ea typeface="Calibri" pitchFamily="34" charset="-122"/>
-                <a:cs typeface="Calibri" pitchFamily="34" charset="-120"/>
-              </a:rPr>
-              <a:t>Sprint 2 (S7-8)</a:t>
+              <a:rPr lang="en-US" sz="1500" b="1" dirty="0">
+                <a:solidFill>
+                  <a:srgbClr val="FFFFFF"/>
+                </a:solidFill>
+                <a:latin typeface="Calibri" pitchFamily="34" charset="0"/>
+                <a:ea typeface="Calibri" pitchFamily="34" charset="-122"/>
+                <a:cs typeface="Calibri" pitchFamily="34" charset="-120"/>
+              </a:rPr>
+              <a:t>Sergio Ocares</a:t>
+            </a:r>
+            <a:endParaRPr lang="en-US" sz="1500" dirty="0"/>
+          </a:p>
+        </p:txBody>
+      </p:sp>
+      <p:sp>
+        <p:nvSpPr>
+          <p:cNvPr id="15" name="Text 13"/>
+          <p:cNvSpPr txBox="1"/>
+          <p:nvPr/>
+        </p:nvSpPr>
+        <p:spPr>
+          <a:xfrm>
+            <a:off x="4572000" y="2450592"/>
+            <a:ext cx="3063240" cy="320040"/>
+          </a:xfrm>
+          <a:prstGeom prst="rect">
+            <a:avLst/>
+          </a:prstGeom>
+          <a:noFill/>
+          <a:ln/>
+        </p:spPr>
+        <p:txBody>
+          <a:bodyPr wrap="square" lIns="0" tIns="0" rIns="0" bIns="0" rtlCol="0" anchor="ctr"/>
+          <a:lstStyle/>
+          <a:p>
+            <a:pPr indent="0" marL="0">
+              <a:buNone/>
+            </a:pPr>
+            <a:r>
+              <a:rPr lang="en-US" sz="1150" dirty="0">
+                <a:solidFill>
+                  <a:srgbClr val="FFFFFF"/>
+                </a:solidFill>
+                <a:latin typeface="Calibri" pitchFamily="34" charset="0"/>
+                <a:ea typeface="Calibri" pitchFamily="34" charset="-122"/>
+                <a:cs typeface="Calibri" pitchFamily="34" charset="-120"/>
+              </a:rPr>
+              <a:t>Base de datos + IA</a:t>
             </a:r>
             <a:endParaRPr lang="en-US" sz="1150" dirty="0"/>
           </a:p>
@@ -6177,33 +5910,72 @@
       </p:sp>
       <p:sp>
         <p:nvSpPr>
-          <p:cNvPr id="23" name="Text 21"/>
-          <p:cNvSpPr txBox="1"/>
-          <p:nvPr/>
-        </p:nvSpPr>
-        <p:spPr>
-          <a:xfrm>
-            <a:off x="4450080" y="3319272"/>
-            <a:ext cx="3261360" cy="457200"/>
-          </a:xfrm>
-          <a:prstGeom prst="rect">
-            <a:avLst/>
-          </a:prstGeom>
-          <a:noFill/>
-          <a:ln/>
-        </p:spPr>
-        <p:txBody>
-          <a:bodyPr wrap="square" lIns="0" tIns="0" rIns="0" bIns="0" rtlCol="0" anchor="ctr"/>
+          <p:cNvPr id="16" name="Text 14"/>
+          <p:cNvSpPr txBox="1"/>
+          <p:nvPr/>
+        </p:nvSpPr>
+        <p:spPr>
+          <a:xfrm>
+            <a:off x="4572000" y="3017520"/>
+            <a:ext cx="3063240" cy="320040"/>
+          </a:xfrm>
+          <a:prstGeom prst="rect">
+            <a:avLst/>
+          </a:prstGeom>
+          <a:noFill/>
+          <a:ln/>
+        </p:spPr>
+        <p:txBody>
+          <a:bodyPr wrap="square" lIns="0" tIns="0" rIns="0" bIns="0" rtlCol="0" anchor="ctr"/>
+          <a:lstStyle/>
+          <a:p>
+            <a:pPr indent="0" marL="0">
+              <a:buNone/>
+            </a:pPr>
+            <a:r>
+              <a:rPr lang="en-US" sz="1100" b="1" i="1" dirty="0">
+                <a:solidFill>
+                  <a:srgbClr val="00A896"/>
+                </a:solidFill>
+                <a:latin typeface="Calibri" pitchFamily="34" charset="0"/>
+                <a:ea typeface="Calibri" pitchFamily="34" charset="-122"/>
+                <a:cs typeface="Calibri" pitchFamily="34" charset="-120"/>
+              </a:rPr>
+              <a:t>PostgreSQL / API LLM</a:t>
+            </a:r>
+            <a:endParaRPr lang="en-US" sz="1100" dirty="0"/>
+          </a:p>
+        </p:txBody>
+      </p:sp>
+      <p:sp>
+        <p:nvSpPr>
+          <p:cNvPr id="17" name="Text 15"/>
+          <p:cNvSpPr txBox="1"/>
+          <p:nvPr/>
+        </p:nvSpPr>
+        <p:spPr>
+          <a:xfrm>
+            <a:off x="4572000" y="3429000"/>
+            <a:ext cx="3063240" cy="2468880"/>
+          </a:xfrm>
+          <a:prstGeom prst="rect">
+            <a:avLst/>
+          </a:prstGeom>
+          <a:noFill/>
+          <a:ln/>
+        </p:spPr>
+        <p:txBody>
+          <a:bodyPr wrap="square" lIns="0" tIns="0" rIns="0" bIns="0" rtlCol="0" anchor="t"/>
           <a:lstStyle/>
           <a:p>
             <a:pPr indent="0" marL="0">
               <a:lnSpc>
-                <a:spcPct val="105000"/>
+                <a:spcPct val="120000"/>
               </a:lnSpc>
               <a:buNone/>
             </a:pPr>
             <a:r>
-              <a:rPr lang="en-US" sz="1000" dirty="0">
+              <a:rPr lang="en-US" sz="1150" dirty="0">
                 <a:solidFill>
                   <a:srgbClr val="0B2B2E"/>
                 </a:solidFill>
@@ -6211,26 +5983,26 @@
                 <a:ea typeface="Calibri" pitchFamily="34" charset="-122"/>
                 <a:cs typeface="Calibri" pitchFamily="34" charset="-120"/>
               </a:rPr>
-              <a:t>Medicamentos y rutinas: API + UI conectadas</a:t>
-            </a:r>
-            <a:endParaRPr lang="en-US" sz="1000" dirty="0"/>
-          </a:p>
-        </p:txBody>
-      </p:sp>
-      <p:sp>
-        <p:nvSpPr>
-          <p:cNvPr id="24" name="Shape 22"/>
+              <a:t>Modelado de BD, indicadores y reportes de cumplimiento, define el contexto enviado a la IA y almacena sus resultados</a:t>
+            </a:r>
+            <a:endParaRPr lang="en-US" sz="1150" dirty="0"/>
+          </a:p>
+        </p:txBody>
+      </p:sp>
+      <p:sp>
+        <p:nvSpPr>
+          <p:cNvPr id="18" name="Shape 16"/>
           <p:cNvSpPr/>
           <p:nvPr/>
         </p:nvSpPr>
         <p:spPr>
           <a:xfrm>
-            <a:off x="8077200" y="2971800"/>
-            <a:ext cx="3535680" cy="868680"/>
+            <a:off x="8138160" y="2011680"/>
+            <a:ext cx="3520440" cy="4114800"/>
           </a:xfrm>
           <a:prstGeom prst="roundRect">
             <a:avLst>
-              <a:gd name="adj" fmla="val 7368"/>
+              <a:gd name="adj" fmla="val 2597"/>
             </a:avLst>
           </a:prstGeom>
           <a:solidFill>
@@ -6242,18 +6014,67 @@
             </a:solidFill>
             <a:prstDash val="solid"/>
           </a:ln>
-        </p:spPr>
-      </p:sp>
-      <p:sp>
-        <p:nvSpPr>
-          <p:cNvPr id="25" name="Text 23"/>
-          <p:cNvSpPr txBox="1"/>
-          <p:nvPr/>
-        </p:nvSpPr>
-        <p:spPr>
-          <a:xfrm>
-            <a:off x="8214360" y="3044952"/>
-            <a:ext cx="3261360" cy="274320"/>
+          <a:effectLst>
+            <a:outerShdw sx="100000" sy="100000" kx="0" ky="0" algn="bl" rotWithShape="0" blurRad="76200" dist="25400" dir="5400000">
+              <a:srgbClr val="1F3A3C">
+                <a:alpha val="13000"/>
+              </a:srgbClr>
+            </a:outerShdw>
+          </a:effectLst>
+        </p:spPr>
+      </p:sp>
+      <p:sp>
+        <p:nvSpPr>
+          <p:cNvPr id="19" name="Shape 17"/>
+          <p:cNvSpPr/>
+          <p:nvPr/>
+        </p:nvSpPr>
+        <p:spPr>
+          <a:xfrm>
+            <a:off x="8138160" y="2011680"/>
+            <a:ext cx="3520440" cy="822960"/>
+          </a:xfrm>
+          <a:prstGeom prst="roundRect">
+            <a:avLst>
+              <a:gd name="adj" fmla="val 11111"/>
+            </a:avLst>
+          </a:prstGeom>
+          <a:solidFill>
+            <a:srgbClr val="02C39A"/>
+          </a:solidFill>
+          <a:ln/>
+        </p:spPr>
+      </p:sp>
+      <p:sp>
+        <p:nvSpPr>
+          <p:cNvPr id="20" name="Shape 18"/>
+          <p:cNvSpPr/>
+          <p:nvPr/>
+        </p:nvSpPr>
+        <p:spPr>
+          <a:xfrm>
+            <a:off x="8138160" y="2423160"/>
+            <a:ext cx="3520440" cy="411480"/>
+          </a:xfrm>
+          <a:prstGeom prst="rect">
+            <a:avLst/>
+          </a:prstGeom>
+          <a:solidFill>
+            <a:srgbClr val="02C39A"/>
+          </a:solidFill>
+          <a:ln/>
+        </p:spPr>
+      </p:sp>
+      <p:sp>
+        <p:nvSpPr>
+          <p:cNvPr id="21" name="Text 19"/>
+          <p:cNvSpPr txBox="1"/>
+          <p:nvPr/>
+        </p:nvSpPr>
+        <p:spPr>
+          <a:xfrm>
+            <a:off x="8366760" y="2121408"/>
+            <a:ext cx="3063240" cy="365760"/>
           </a:xfrm>
           <a:prstGeom prst="rect">
             <a:avLst/>
@@ -6269,15 +6090,54 @@
               <a:buNone/>
             </a:pPr>
             <a:r>
-              <a:rPr lang="en-US" sz="1150" b="1" dirty="0">
-                <a:solidFill>
-                  <a:srgbClr val="028090"/>
-                </a:solidFill>
-                <a:latin typeface="Calibri" pitchFamily="34" charset="0"/>
-                <a:ea typeface="Calibri" pitchFamily="34" charset="-122"/>
-                <a:cs typeface="Calibri" pitchFamily="34" charset="-120"/>
-              </a:rPr>
-              <a:t>Sprint 3 (S9-10)</a:t>
+              <a:rPr lang="en-US" sz="1500" b="1" dirty="0">
+                <a:solidFill>
+                  <a:srgbClr val="FFFFFF"/>
+                </a:solidFill>
+                <a:latin typeface="Calibri" pitchFamily="34" charset="0"/>
+                <a:ea typeface="Calibri" pitchFamily="34" charset="-122"/>
+                <a:cs typeface="Calibri" pitchFamily="34" charset="-120"/>
+              </a:rPr>
+              <a:t>Matías Pizarro</a:t>
+            </a:r>
+            <a:endParaRPr lang="en-US" sz="1500" dirty="0"/>
+          </a:p>
+        </p:txBody>
+      </p:sp>
+      <p:sp>
+        <p:nvSpPr>
+          <p:cNvPr id="22" name="Text 20"/>
+          <p:cNvSpPr txBox="1"/>
+          <p:nvPr/>
+        </p:nvSpPr>
+        <p:spPr>
+          <a:xfrm>
+            <a:off x="8366760" y="2450592"/>
+            <a:ext cx="3063240" cy="320040"/>
+          </a:xfrm>
+          <a:prstGeom prst="rect">
+            <a:avLst/>
+          </a:prstGeom>
+          <a:noFill/>
+          <a:ln/>
+        </p:spPr>
+        <p:txBody>
+          <a:bodyPr wrap="square" lIns="0" tIns="0" rIns="0" bIns="0" rtlCol="0" anchor="ctr"/>
+          <a:lstStyle/>
+          <a:p>
+            <a:pPr indent="0" marL="0">
+              <a:buNone/>
+            </a:pPr>
+            <a:r>
+              <a:rPr lang="en-US" sz="1150" dirty="0">
+                <a:solidFill>
+                  <a:srgbClr val="FFFFFF"/>
+                </a:solidFill>
+                <a:latin typeface="Calibri" pitchFamily="34" charset="0"/>
+                <a:ea typeface="Calibri" pitchFamily="34" charset="-122"/>
+                <a:cs typeface="Calibri" pitchFamily="34" charset="-120"/>
+              </a:rPr>
+              <a:t>App móvil</a:t>
             </a:r>
             <a:endParaRPr lang="en-US" sz="1150" dirty="0"/>
           </a:p>
@@ -6285,33 +6145,72 @@
       </p:sp>
       <p:sp>
         <p:nvSpPr>
-          <p:cNvPr id="26" name="Text 24"/>
-          <p:cNvSpPr txBox="1"/>
-          <p:nvPr/>
-        </p:nvSpPr>
-        <p:spPr>
-          <a:xfrm>
-            <a:off x="8214360" y="3319272"/>
-            <a:ext cx="3261360" cy="457200"/>
-          </a:xfrm>
-          <a:prstGeom prst="rect">
-            <a:avLst/>
-          </a:prstGeom>
-          <a:noFill/>
-          <a:ln/>
-        </p:spPr>
-        <p:txBody>
-          <a:bodyPr wrap="square" lIns="0" tIns="0" rIns="0" bIns="0" rtlCol="0" anchor="ctr"/>
+          <p:cNvPr id="23" name="Text 21"/>
+          <p:cNvSpPr txBox="1"/>
+          <p:nvPr/>
+        </p:nvSpPr>
+        <p:spPr>
+          <a:xfrm>
+            <a:off x="8366760" y="3017520"/>
+            <a:ext cx="3063240" cy="320040"/>
+          </a:xfrm>
+          <a:prstGeom prst="rect">
+            <a:avLst/>
+          </a:prstGeom>
+          <a:noFill/>
+          <a:ln/>
+        </p:spPr>
+        <p:txBody>
+          <a:bodyPr wrap="square" lIns="0" tIns="0" rIns="0" bIns="0" rtlCol="0" anchor="ctr"/>
+          <a:lstStyle/>
+          <a:p>
+            <a:pPr indent="0" marL="0">
+              <a:buNone/>
+            </a:pPr>
+            <a:r>
+              <a:rPr lang="en-US" sz="1100" b="1" i="1" dirty="0">
+                <a:solidFill>
+                  <a:srgbClr val="02C39A"/>
+                </a:solidFill>
+                <a:latin typeface="Calibri" pitchFamily="34" charset="0"/>
+                <a:ea typeface="Calibri" pitchFamily="34" charset="-122"/>
+                <a:cs typeface="Calibri" pitchFamily="34" charset="-120"/>
+              </a:rPr>
+              <a:t>Flutter / Dart</a:t>
+            </a:r>
+            <a:endParaRPr lang="en-US" sz="1100" dirty="0"/>
+          </a:p>
+        </p:txBody>
+      </p:sp>
+      <p:sp>
+        <p:nvSpPr>
+          <p:cNvPr id="24" name="Text 22"/>
+          <p:cNvSpPr txBox="1"/>
+          <p:nvPr/>
+        </p:nvSpPr>
+        <p:spPr>
+          <a:xfrm>
+            <a:off x="8366760" y="3429000"/>
+            <a:ext cx="3063240" cy="2468880"/>
+          </a:xfrm>
+          <a:prstGeom prst="rect">
+            <a:avLst/>
+          </a:prstGeom>
+          <a:noFill/>
+          <a:ln/>
+        </p:spPr>
+        <p:txBody>
+          <a:bodyPr wrap="square" lIns="0" tIns="0" rIns="0" bIns="0" rtlCol="0" anchor="t"/>
           <a:lstStyle/>
           <a:p>
             <a:pPr indent="0" marL="0">
               <a:lnSpc>
-                <a:spcPct val="105000"/>
+                <a:spcPct val="120000"/>
               </a:lnSpc>
               <a:buNone/>
             </a:pPr>
             <a:r>
-              <a:rPr lang="en-US" sz="1000" dirty="0">
+              <a:rPr lang="en-US" sz="1150" dirty="0">
                 <a:solidFill>
                   <a:srgbClr val="0B2B2E"/>
                 </a:solidFill>
@@ -6319,73 +6218,7 @@
                 <a:ea typeface="Calibri" pitchFamily="34" charset="-122"/>
                 <a:cs typeface="Calibri" pitchFamily="34" charset="-120"/>
               </a:rPr>
-              <a:t>Perfiles dependientes y permisos · Informe de Avance</a:t>
-            </a:r>
-            <a:endParaRPr lang="en-US" sz="1000" dirty="0"/>
-          </a:p>
-        </p:txBody>
-      </p:sp>
-      <p:sp>
-        <p:nvSpPr>
-          <p:cNvPr id="27" name="Shape 25"/>
-          <p:cNvSpPr/>
-          <p:nvPr/>
-        </p:nvSpPr>
-        <p:spPr>
-          <a:xfrm>
-            <a:off x="548640" y="3977640"/>
-            <a:ext cx="3535680" cy="868680"/>
-          </a:xfrm>
-          <a:prstGeom prst="roundRect">
-            <a:avLst>
-              <a:gd name="adj" fmla="val 7368"/>
-            </a:avLst>
-          </a:prstGeom>
-          <a:solidFill>
-            <a:srgbClr val="FFFFFF"/>
-          </a:solidFill>
-          <a:ln w="12700">
-            <a:solidFill>
-              <a:srgbClr val="DCEDEC"/>
-            </a:solidFill>
-            <a:prstDash val="solid"/>
-          </a:ln>
-        </p:spPr>
-      </p:sp>
-      <p:sp>
-        <p:nvSpPr>
-          <p:cNvPr id="28" name="Text 26"/>
-          <p:cNvSpPr txBox="1"/>
-          <p:nvPr/>
-        </p:nvSpPr>
-        <p:spPr>
-          <a:xfrm>
-            <a:off x="685800" y="4050792"/>
-            <a:ext cx="3261360" cy="274320"/>
-          </a:xfrm>
-          <a:prstGeom prst="rect">
-            <a:avLst/>
-          </a:prstGeom>
-          <a:noFill/>
-          <a:ln/>
-        </p:spPr>
-        <p:txBody>
-          <a:bodyPr wrap="square" lIns="0" tIns="0" rIns="0" bIns="0" rtlCol="0" anchor="ctr"/>
-          <a:lstStyle/>
-          <a:p>
-            <a:pPr indent="0" marL="0">
-              <a:buNone/>
-            </a:pPr>
-            <a:r>
-              <a:rPr lang="en-US" sz="1150" b="1" dirty="0">
-                <a:solidFill>
-                  <a:srgbClr val="028090"/>
-                </a:solidFill>
-                <a:latin typeface="Calibri" pitchFamily="34" charset="0"/>
-                <a:ea typeface="Calibri" pitchFamily="34" charset="-122"/>
-                <a:cs typeface="Calibri" pitchFamily="34" charset="-120"/>
-              </a:rPr>
-              <a:t>Sprint 4 (S11-12)</a:t>
+              <a:t>Interfaz para titular y perfiles dependientes, experiencia de usuario accesible</a:t>
             </a:r>
             <a:endParaRPr lang="en-US" sz="1150" dirty="0"/>
           </a:p>
@@ -6393,304 +6226,7 @@
       </p:sp>
       <p:sp>
         <p:nvSpPr>
-          <p:cNvPr id="29" name="Text 27"/>
-          <p:cNvSpPr txBox="1"/>
-          <p:nvPr/>
-        </p:nvSpPr>
-        <p:spPr>
-          <a:xfrm>
-            <a:off x="685800" y="4325112"/>
-            <a:ext cx="3261360" cy="457200"/>
-          </a:xfrm>
-          <a:prstGeom prst="rect">
-            <a:avLst/>
-          </a:prstGeom>
-          <a:noFill/>
-          <a:ln/>
-        </p:spPr>
-        <p:txBody>
-          <a:bodyPr wrap="square" lIns="0" tIns="0" rIns="0" bIns="0" rtlCol="0" anchor="ctr"/>
-          <a:lstStyle/>
-          <a:p>
-            <a:pPr indent="0" marL="0">
-              <a:lnSpc>
-                <a:spcPct val="105000"/>
-              </a:lnSpc>
-              <a:buNone/>
-            </a:pPr>
-            <a:r>
-              <a:rPr lang="en-US" sz="1000" dirty="0">
-                <a:solidFill>
-                  <a:srgbClr val="0B2B2E"/>
-                </a:solidFill>
-                <a:latin typeface="Calibri" pitchFamily="34" charset="0"/>
-                <a:ea typeface="Calibri" pitchFamily="34" charset="-122"/>
-                <a:cs typeface="Calibri" pitchFamily="34" charset="-120"/>
-              </a:rPr>
-              <a:t>Recordatorios, alertas e interfaz simplificada</a:t>
-            </a:r>
-            <a:endParaRPr lang="en-US" sz="1000" dirty="0"/>
-          </a:p>
-        </p:txBody>
-      </p:sp>
-      <p:sp>
-        <p:nvSpPr>
-          <p:cNvPr id="30" name="Shape 28"/>
-          <p:cNvSpPr/>
-          <p:nvPr/>
-        </p:nvSpPr>
-        <p:spPr>
-          <a:xfrm>
-            <a:off x="4312920" y="3977640"/>
-            <a:ext cx="3535680" cy="868680"/>
-          </a:xfrm>
-          <a:prstGeom prst="roundRect">
-            <a:avLst>
-              <a:gd name="adj" fmla="val 7368"/>
-            </a:avLst>
-          </a:prstGeom>
-          <a:solidFill>
-            <a:srgbClr val="FFFFFF"/>
-          </a:solidFill>
-          <a:ln w="12700">
-            <a:solidFill>
-              <a:srgbClr val="DCEDEC"/>
-            </a:solidFill>
-            <a:prstDash val="solid"/>
-          </a:ln>
-        </p:spPr>
-      </p:sp>
-      <p:sp>
-        <p:nvSpPr>
-          <p:cNvPr id="31" name="Text 29"/>
-          <p:cNvSpPr txBox="1"/>
-          <p:nvPr/>
-        </p:nvSpPr>
-        <p:spPr>
-          <a:xfrm>
-            <a:off x="4450080" y="4050792"/>
-            <a:ext cx="3261360" cy="274320"/>
-          </a:xfrm>
-          <a:prstGeom prst="rect">
-            <a:avLst/>
-          </a:prstGeom>
-          <a:noFill/>
-          <a:ln/>
-        </p:spPr>
-        <p:txBody>
-          <a:bodyPr wrap="square" lIns="0" tIns="0" rIns="0" bIns="0" rtlCol="0" anchor="ctr"/>
-          <a:lstStyle/>
-          <a:p>
-            <a:pPr indent="0" marL="0">
-              <a:buNone/>
-            </a:pPr>
-            <a:r>
-              <a:rPr lang="en-US" sz="1150" b="1" dirty="0">
-                <a:solidFill>
-                  <a:srgbClr val="028090"/>
-                </a:solidFill>
-                <a:latin typeface="Calibri" pitchFamily="34" charset="0"/>
-                <a:ea typeface="Calibri" pitchFamily="34" charset="-122"/>
-                <a:cs typeface="Calibri" pitchFamily="34" charset="-120"/>
-              </a:rPr>
-              <a:t>Sprint 5 (S13-14)</a:t>
-            </a:r>
-            <a:endParaRPr lang="en-US" sz="1150" dirty="0"/>
-          </a:p>
-        </p:txBody>
-      </p:sp>
-      <p:sp>
-        <p:nvSpPr>
-          <p:cNvPr id="32" name="Text 30"/>
-          <p:cNvSpPr txBox="1"/>
-          <p:nvPr/>
-        </p:nvSpPr>
-        <p:spPr>
-          <a:xfrm>
-            <a:off x="4450080" y="4325112"/>
-            <a:ext cx="3261360" cy="457200"/>
-          </a:xfrm>
-          <a:prstGeom prst="rect">
-            <a:avLst/>
-          </a:prstGeom>
-          <a:noFill/>
-          <a:ln/>
-        </p:spPr>
-        <p:txBody>
-          <a:bodyPr wrap="square" lIns="0" tIns="0" rIns="0" bIns="0" rtlCol="0" anchor="ctr"/>
-          <a:lstStyle/>
-          <a:p>
-            <a:pPr indent="0" marL="0">
-              <a:lnSpc>
-                <a:spcPct val="105000"/>
-              </a:lnSpc>
-              <a:buNone/>
-            </a:pPr>
-            <a:r>
-              <a:rPr lang="en-US" sz="1000" dirty="0">
-                <a:solidFill>
-                  <a:srgbClr val="0B2B2E"/>
-                </a:solidFill>
-                <a:latin typeface="Calibri" pitchFamily="34" charset="0"/>
-                <a:ea typeface="Calibri" pitchFamily="34" charset="-122"/>
-                <a:cs typeface="Calibri" pitchFamily="34" charset="-120"/>
-              </a:rPr>
-              <a:t>Indicadores de salud, historial y módulo de IA</a:t>
-            </a:r>
-            <a:endParaRPr lang="en-US" sz="1000" dirty="0"/>
-          </a:p>
-        </p:txBody>
-      </p:sp>
-      <p:sp>
-        <p:nvSpPr>
-          <p:cNvPr id="33" name="Shape 31"/>
-          <p:cNvSpPr/>
-          <p:nvPr/>
-        </p:nvSpPr>
-        <p:spPr>
-          <a:xfrm>
-            <a:off x="8077200" y="3977640"/>
-            <a:ext cx="3535680" cy="868680"/>
-          </a:xfrm>
-          <a:prstGeom prst="roundRect">
-            <a:avLst>
-              <a:gd name="adj" fmla="val 7368"/>
-            </a:avLst>
-          </a:prstGeom>
-          <a:solidFill>
-            <a:srgbClr val="FFFFFF"/>
-          </a:solidFill>
-          <a:ln w="12700">
-            <a:solidFill>
-              <a:srgbClr val="DCEDEC"/>
-            </a:solidFill>
-            <a:prstDash val="solid"/>
-          </a:ln>
-        </p:spPr>
-      </p:sp>
-      <p:sp>
-        <p:nvSpPr>
-          <p:cNvPr id="34" name="Text 32"/>
-          <p:cNvSpPr txBox="1"/>
-          <p:nvPr/>
-        </p:nvSpPr>
-        <p:spPr>
-          <a:xfrm>
-            <a:off x="8214360" y="4050792"/>
-            <a:ext cx="3261360" cy="274320"/>
-          </a:xfrm>
-          <a:prstGeom prst="rect">
-            <a:avLst/>
-          </a:prstGeom>
-          <a:noFill/>
-          <a:ln/>
-        </p:spPr>
-        <p:txBody>
-          <a:bodyPr wrap="square" lIns="0" tIns="0" rIns="0" bIns="0" rtlCol="0" anchor="ctr"/>
-          <a:lstStyle/>
-          <a:p>
-            <a:pPr indent="0" marL="0">
-              <a:buNone/>
-            </a:pPr>
-            <a:r>
-              <a:rPr lang="en-US" sz="1150" b="1" dirty="0">
-                <a:solidFill>
-                  <a:srgbClr val="028090"/>
-                </a:solidFill>
-                <a:latin typeface="Calibri" pitchFamily="34" charset="0"/>
-                <a:ea typeface="Calibri" pitchFamily="34" charset="-122"/>
-                <a:cs typeface="Calibri" pitchFamily="34" charset="-120"/>
-              </a:rPr>
-              <a:t>Sprint 6 (S15)</a:t>
-            </a:r>
-            <a:endParaRPr lang="en-US" sz="1150" dirty="0"/>
-          </a:p>
-        </p:txBody>
-      </p:sp>
-      <p:sp>
-        <p:nvSpPr>
-          <p:cNvPr id="35" name="Text 33"/>
-          <p:cNvSpPr txBox="1"/>
-          <p:nvPr/>
-        </p:nvSpPr>
-        <p:spPr>
-          <a:xfrm>
-            <a:off x="8214360" y="4325112"/>
-            <a:ext cx="3261360" cy="457200"/>
-          </a:xfrm>
-          <a:prstGeom prst="rect">
-            <a:avLst/>
-          </a:prstGeom>
-          <a:noFill/>
-          <a:ln/>
-        </p:spPr>
-        <p:txBody>
-          <a:bodyPr wrap="square" lIns="0" tIns="0" rIns="0" bIns="0" rtlCol="0" anchor="ctr"/>
-          <a:lstStyle/>
-          <a:p>
-            <a:pPr indent="0" marL="0">
-              <a:lnSpc>
-                <a:spcPct val="105000"/>
-              </a:lnSpc>
-              <a:buNone/>
-            </a:pPr>
-            <a:r>
-              <a:rPr lang="en-US" sz="1000" dirty="0">
-                <a:solidFill>
-                  <a:srgbClr val="0B2B2E"/>
-                </a:solidFill>
-                <a:latin typeface="Calibri" pitchFamily="34" charset="0"/>
-                <a:ea typeface="Calibri" pitchFamily="34" charset="-122"/>
-                <a:cs typeface="Calibri" pitchFamily="34" charset="-120"/>
-              </a:rPr>
-              <a:t>Pruebas integrales, documentación e Informe Final</a:t>
-            </a:r>
-            <a:endParaRPr lang="en-US" sz="1000" dirty="0"/>
-          </a:p>
-        </p:txBody>
-      </p:sp>
-      <p:sp>
-        <p:nvSpPr>
-          <p:cNvPr id="36" name="Text 34"/>
-          <p:cNvSpPr txBox="1"/>
-          <p:nvPr/>
-        </p:nvSpPr>
-        <p:spPr>
-          <a:xfrm>
-            <a:off x="548640" y="5257800"/>
-            <a:ext cx="11064240" cy="548640"/>
-          </a:xfrm>
-          <a:prstGeom prst="rect">
-            <a:avLst/>
-          </a:prstGeom>
-          <a:noFill/>
-          <a:ln/>
-        </p:spPr>
-        <p:txBody>
-          <a:bodyPr wrap="square" lIns="0" tIns="0" rIns="0" bIns="0" rtlCol="0" anchor="ctr"/>
-          <a:lstStyle/>
-          <a:p>
-            <a:pPr indent="0" marL="0">
-              <a:buNone/>
-            </a:pPr>
-            <a:r>
-              <a:rPr lang="en-US" sz="1150" i="1" dirty="0">
-                <a:solidFill>
-                  <a:srgbClr val="5C7A7C"/>
-                </a:solidFill>
-                <a:latin typeface="Calibri" pitchFamily="34" charset="0"/>
-                <a:ea typeface="Calibri" pitchFamily="34" charset="-122"/>
-                <a:cs typeface="Calibri" pitchFamily="34" charset="-120"/>
-              </a:rPr>
-              <a:t>Principal facilitador: el equipo ya domina las tecnologías definidas. Principal obstáculo: coordinar horarios entre los tres integrantes — se mitiga con reuniones semanales fijas.</a:t>
-            </a:r>
-            <a:endParaRPr lang="en-US" sz="1150" dirty="0"/>
-          </a:p>
-        </p:txBody>
-      </p:sp>
-      <p:sp>
-        <p:nvSpPr>
-          <p:cNvPr id="37" name="Text 35"/>
+          <p:cNvPr id="25" name="Text 23"/>
           <p:cNvSpPr txBox="1"/>
           <p:nvPr/>
         </p:nvSpPr>
@@ -6729,7 +6265,7 @@
       </p:sp>
       <p:sp>
         <p:nvSpPr>
-          <p:cNvPr id="38" name="Text 36"/>
+          <p:cNvPr id="26" name="Text 24"/>
           <p:cNvSpPr txBox="1"/>
           <p:nvPr/>
         </p:nvSpPr>
@@ -6807,7 +6343,7 @@
         <p:spPr>
           <a:xfrm>
             <a:off x="548640" y="457200"/>
-            <a:ext cx="9144000" cy="640080"/>
+            <a:ext cx="7315200" cy="640080"/>
           </a:xfrm>
           <a:prstGeom prst="rect">
             <a:avLst/>
@@ -6823,7 +6359,7 @@
               <a:buNone/>
             </a:pPr>
             <a:r>
-              <a:rPr lang="en-US" sz="3000" b="1" dirty="0">
+              <a:rPr lang="en-US" sz="3200" b="1" dirty="0">
                 <a:solidFill>
                   <a:srgbClr val="0B3D42"/>
                 </a:solidFill>
@@ -6831,26 +6367,65 @@
                 <a:ea typeface="Cambria" pitchFamily="34" charset="-122"/>
                 <a:cs typeface="Cambria" pitchFamily="34" charset="-120"/>
               </a:rPr>
-              <a:t>Evidencias planificadas</a:t>
-            </a:r>
-            <a:endParaRPr lang="en-US" sz="3000" dirty="0"/>
-          </a:p>
-        </p:txBody>
-      </p:sp>
-      <p:sp>
-        <p:nvSpPr>
-          <p:cNvPr id="3" name="Shape 1"/>
+              <a:t>Plan de trabajo</a:t>
+            </a:r>
+            <a:endParaRPr lang="en-US" sz="3200" dirty="0"/>
+          </a:p>
+        </p:txBody>
+      </p:sp>
+      <p:sp>
+        <p:nvSpPr>
+          <p:cNvPr id="3" name="Text 1"/>
+          <p:cNvSpPr txBox="1"/>
+          <p:nvPr/>
+        </p:nvSpPr>
+        <p:spPr>
+          <a:xfrm>
+            <a:off x="548640" y="1115568"/>
+            <a:ext cx="7315200" cy="365760"/>
+          </a:xfrm>
+          <a:prstGeom prst="rect">
+            <a:avLst/>
+          </a:prstGeom>
+          <a:noFill/>
+          <a:ln/>
+        </p:spPr>
+        <p:txBody>
+          <a:bodyPr wrap="square" lIns="0" tIns="0" rIns="0" bIns="0" rtlCol="0" anchor="ctr"/>
+          <a:lstStyle/>
+          <a:p>
+            <a:pPr indent="0" marL="0">
+              <a:buNone/>
+            </a:pPr>
+            <a:r>
+              <a:rPr lang="en-US" sz="1300" dirty="0">
+                <a:solidFill>
+                  <a:srgbClr val="5C7A7C"/>
+                </a:solidFill>
+                <a:latin typeface="Calibri" pitchFamily="34" charset="0"/>
+                <a:ea typeface="Calibri" pitchFamily="34" charset="-122"/>
+                <a:cs typeface="Calibri" pitchFamily="34" charset="-120"/>
+              </a:rPr>
+              <a:t>Semestre de 18 semanas · 3 fases</a:t>
+            </a:r>
+            <a:endParaRPr lang="en-US" sz="1300" dirty="0"/>
+          </a:p>
+        </p:txBody>
+      </p:sp>
+      <p:sp>
+        <p:nvSpPr>
+          <p:cNvPr id="4" name="Shape 2"/>
           <p:cNvSpPr/>
           <p:nvPr/>
         </p:nvSpPr>
         <p:spPr>
           <a:xfrm>
-            <a:off x="548640" y="1280160"/>
-            <a:ext cx="5349240" cy="502920"/>
+            <a:off x="548640" y="1828800"/>
+            <a:ext cx="2458720" cy="777240"/>
           </a:xfrm>
           <a:prstGeom prst="roundRect">
             <a:avLst>
-              <a:gd name="adj" fmla="val 12727"/>
+              <a:gd name="adj" fmla="val 7059"/>
             </a:avLst>
           </a:prstGeom>
           <a:solidFill>
@@ -6861,30 +6436,30 @@
       </p:sp>
       <p:sp>
         <p:nvSpPr>
-          <p:cNvPr id="4" name="Text 2"/>
-          <p:cNvSpPr txBox="1"/>
-          <p:nvPr/>
-        </p:nvSpPr>
-        <p:spPr>
-          <a:xfrm>
-            <a:off x="548640" y="1280160"/>
-            <a:ext cx="5349240" cy="502920"/>
-          </a:xfrm>
-          <a:prstGeom prst="rect">
-            <a:avLst/>
-          </a:prstGeom>
-          <a:noFill/>
-          <a:ln/>
-        </p:spPr>
-        <p:txBody>
-          <a:bodyPr wrap="square" lIns="0" tIns="0" rIns="0" bIns="0" rtlCol="0" anchor="ctr"/>
-          <a:lstStyle/>
-          <a:p>
-            <a:pPr algn="ctr" indent="0" marL="0">
-              <a:buNone/>
-            </a:pPr>
-            <a:r>
-              <a:rPr lang="en-US" sz="1500" b="1" dirty="0">
+          <p:cNvPr id="5" name="Text 3"/>
+          <p:cNvSpPr txBox="1"/>
+          <p:nvPr/>
+        </p:nvSpPr>
+        <p:spPr>
+          <a:xfrm>
+            <a:off x="640080" y="1883664"/>
+            <a:ext cx="2275840" cy="320040"/>
+          </a:xfrm>
+          <a:prstGeom prst="rect">
+            <a:avLst/>
+          </a:prstGeom>
+          <a:noFill/>
+          <a:ln/>
+        </p:spPr>
+        <p:txBody>
+          <a:bodyPr wrap="square" lIns="0" tIns="0" rIns="0" bIns="0" rtlCol="0" anchor="ctr"/>
+          <a:lstStyle/>
+          <a:p>
+            <a:pPr indent="0" marL="0">
+              <a:buNone/>
+            </a:pPr>
+            <a:r>
+              <a:rPr lang="en-US" sz="1300" b="1" dirty="0">
                 <a:solidFill>
                   <a:srgbClr val="FFFFFF"/>
                 </a:solidFill>
@@ -6892,26 +6467,444 @@
                 <a:ea typeface="Calibri" pitchFamily="34" charset="-122"/>
                 <a:cs typeface="Calibri" pitchFamily="34" charset="-120"/>
               </a:rPr>
-              <a:t>De avance</a:t>
-            </a:r>
-            <a:endParaRPr lang="en-US" sz="1500" dirty="0"/>
-          </a:p>
-        </p:txBody>
-      </p:sp>
-      <p:sp>
-        <p:nvSpPr>
-          <p:cNvPr id="5" name="Shape 3"/>
+              <a:t>Fase 1</a:t>
+            </a:r>
+            <a:endParaRPr lang="en-US" sz="1300" dirty="0"/>
+          </a:p>
+        </p:txBody>
+      </p:sp>
+      <p:sp>
+        <p:nvSpPr>
+          <p:cNvPr id="6" name="Text 4"/>
+          <p:cNvSpPr txBox="1"/>
+          <p:nvPr/>
+        </p:nvSpPr>
+        <p:spPr>
+          <a:xfrm>
+            <a:off x="640080" y="2194560"/>
+            <a:ext cx="2275840" cy="274320"/>
+          </a:xfrm>
+          <a:prstGeom prst="rect">
+            <a:avLst/>
+          </a:prstGeom>
+          <a:noFill/>
+          <a:ln/>
+        </p:spPr>
+        <p:txBody>
+          <a:bodyPr wrap="square" lIns="0" tIns="0" rIns="0" bIns="0" rtlCol="0" anchor="ctr"/>
+          <a:lstStyle/>
+          <a:p>
+            <a:pPr indent="0" marL="0">
+              <a:buNone/>
+            </a:pPr>
+            <a:r>
+              <a:rPr lang="en-US" sz="950" dirty="0">
+                <a:solidFill>
+                  <a:srgbClr val="FFFFFF"/>
+                </a:solidFill>
+                <a:latin typeface="Calibri" pitchFamily="34" charset="0"/>
+                <a:ea typeface="Calibri" pitchFamily="34" charset="-122"/>
+                <a:cs typeface="Calibri" pitchFamily="34" charset="-120"/>
+              </a:rPr>
+              <a:t>Definición</a:t>
+            </a:r>
+            <a:endParaRPr lang="en-US" sz="950" dirty="0"/>
+          </a:p>
+        </p:txBody>
+      </p:sp>
+      <p:sp>
+        <p:nvSpPr>
+          <p:cNvPr id="7" name="Text 5"/>
+          <p:cNvSpPr txBox="1"/>
+          <p:nvPr/>
+        </p:nvSpPr>
+        <p:spPr>
+          <a:xfrm>
+            <a:off x="640080" y="2395728"/>
+            <a:ext cx="2275840" cy="228600"/>
+          </a:xfrm>
+          <a:prstGeom prst="rect">
+            <a:avLst/>
+          </a:prstGeom>
+          <a:noFill/>
+          <a:ln/>
+        </p:spPr>
+        <p:txBody>
+          <a:bodyPr wrap="square" lIns="0" tIns="0" rIns="0" bIns="0" rtlCol="0" anchor="ctr"/>
+          <a:lstStyle/>
+          <a:p>
+            <a:pPr indent="0" marL="0">
+              <a:buNone/>
+            </a:pPr>
+            <a:r>
+              <a:rPr lang="en-US" sz="900" i="1" dirty="0">
+                <a:solidFill>
+                  <a:srgbClr val="FFFFFF"/>
+                </a:solidFill>
+                <a:latin typeface="Calibri" pitchFamily="34" charset="0"/>
+                <a:ea typeface="Calibri" pitchFamily="34" charset="-122"/>
+                <a:cs typeface="Calibri" pitchFamily="34" charset="-120"/>
+              </a:rPr>
+              <a:t>S1 – S4</a:t>
+            </a:r>
+            <a:endParaRPr lang="en-US" sz="900" dirty="0"/>
+          </a:p>
+        </p:txBody>
+      </p:sp>
+      <p:sp>
+        <p:nvSpPr>
+          <p:cNvPr id="8" name="Shape 6"/>
           <p:cNvSpPr/>
           <p:nvPr/>
         </p:nvSpPr>
         <p:spPr>
           <a:xfrm>
-            <a:off x="548640" y="1965960"/>
-            <a:ext cx="5349240" cy="1783080"/>
+            <a:off x="3007360" y="1828800"/>
+            <a:ext cx="6761480" cy="777240"/>
           </a:xfrm>
           <a:prstGeom prst="roundRect">
             <a:avLst>
-              <a:gd name="adj" fmla="val 4103"/>
+              <a:gd name="adj" fmla="val 7059"/>
+            </a:avLst>
+          </a:prstGeom>
+          <a:solidFill>
+            <a:srgbClr val="00A896"/>
+          </a:solidFill>
+          <a:ln/>
+        </p:spPr>
+      </p:sp>
+      <p:sp>
+        <p:nvSpPr>
+          <p:cNvPr id="9" name="Text 7"/>
+          <p:cNvSpPr txBox="1"/>
+          <p:nvPr/>
+        </p:nvSpPr>
+        <p:spPr>
+          <a:xfrm>
+            <a:off x="3098800" y="1883664"/>
+            <a:ext cx="6578600" cy="320040"/>
+          </a:xfrm>
+          <a:prstGeom prst="rect">
+            <a:avLst/>
+          </a:prstGeom>
+          <a:noFill/>
+          <a:ln/>
+        </p:spPr>
+        <p:txBody>
+          <a:bodyPr wrap="square" lIns="0" tIns="0" rIns="0" bIns="0" rtlCol="0" anchor="ctr"/>
+          <a:lstStyle/>
+          <a:p>
+            <a:pPr indent="0" marL="0">
+              <a:buNone/>
+            </a:pPr>
+            <a:r>
+              <a:rPr lang="en-US" sz="1300" b="1" dirty="0">
+                <a:solidFill>
+                  <a:srgbClr val="FFFFFF"/>
+                </a:solidFill>
+                <a:latin typeface="Calibri" pitchFamily="34" charset="0"/>
+                <a:ea typeface="Calibri" pitchFamily="34" charset="-122"/>
+                <a:cs typeface="Calibri" pitchFamily="34" charset="-120"/>
+              </a:rPr>
+              <a:t>Fase 2</a:t>
+            </a:r>
+            <a:endParaRPr lang="en-US" sz="1300" dirty="0"/>
+          </a:p>
+        </p:txBody>
+      </p:sp>
+      <p:sp>
+        <p:nvSpPr>
+          <p:cNvPr id="10" name="Text 8"/>
+          <p:cNvSpPr txBox="1"/>
+          <p:nvPr/>
+        </p:nvSpPr>
+        <p:spPr>
+          <a:xfrm>
+            <a:off x="3098800" y="2194560"/>
+            <a:ext cx="6578600" cy="274320"/>
+          </a:xfrm>
+          <a:prstGeom prst="rect">
+            <a:avLst/>
+          </a:prstGeom>
+          <a:noFill/>
+          <a:ln/>
+        </p:spPr>
+        <p:txBody>
+          <a:bodyPr wrap="square" lIns="0" tIns="0" rIns="0" bIns="0" rtlCol="0" anchor="ctr"/>
+          <a:lstStyle/>
+          <a:p>
+            <a:pPr indent="0" marL="0">
+              <a:buNone/>
+            </a:pPr>
+            <a:r>
+              <a:rPr lang="en-US" sz="950" dirty="0">
+                <a:solidFill>
+                  <a:srgbClr val="FFFFFF"/>
+                </a:solidFill>
+                <a:latin typeface="Calibri" pitchFamily="34" charset="0"/>
+                <a:ea typeface="Calibri" pitchFamily="34" charset="-122"/>
+                <a:cs typeface="Calibri" pitchFamily="34" charset="-120"/>
+              </a:rPr>
+              <a:t>Desarrollo (6 sprints)</a:t>
+            </a:r>
+            <a:endParaRPr lang="en-US" sz="950" dirty="0"/>
+          </a:p>
+        </p:txBody>
+      </p:sp>
+      <p:sp>
+        <p:nvSpPr>
+          <p:cNvPr id="11" name="Text 9"/>
+          <p:cNvSpPr txBox="1"/>
+          <p:nvPr/>
+        </p:nvSpPr>
+        <p:spPr>
+          <a:xfrm>
+            <a:off x="3098800" y="2395728"/>
+            <a:ext cx="6578600" cy="228600"/>
+          </a:xfrm>
+          <a:prstGeom prst="rect">
+            <a:avLst/>
+          </a:prstGeom>
+          <a:noFill/>
+          <a:ln/>
+        </p:spPr>
+        <p:txBody>
+          <a:bodyPr wrap="square" lIns="0" tIns="0" rIns="0" bIns="0" rtlCol="0" anchor="ctr"/>
+          <a:lstStyle/>
+          <a:p>
+            <a:pPr indent="0" marL="0">
+              <a:buNone/>
+            </a:pPr>
+            <a:r>
+              <a:rPr lang="en-US" sz="900" i="1" dirty="0">
+                <a:solidFill>
+                  <a:srgbClr val="FFFFFF"/>
+                </a:solidFill>
+                <a:latin typeface="Calibri" pitchFamily="34" charset="0"/>
+                <a:ea typeface="Calibri" pitchFamily="34" charset="-122"/>
+                <a:cs typeface="Calibri" pitchFamily="34" charset="-120"/>
+              </a:rPr>
+              <a:t>S5 – S15</a:t>
+            </a:r>
+            <a:endParaRPr lang="en-US" sz="900" dirty="0"/>
+          </a:p>
+        </p:txBody>
+      </p:sp>
+      <p:sp>
+        <p:nvSpPr>
+          <p:cNvPr id="12" name="Shape 10"/>
+          <p:cNvSpPr/>
+          <p:nvPr/>
+        </p:nvSpPr>
+        <p:spPr>
+          <a:xfrm>
+            <a:off x="9768840" y="1828800"/>
+            <a:ext cx="1844040" cy="777240"/>
+          </a:xfrm>
+          <a:prstGeom prst="roundRect">
+            <a:avLst>
+              <a:gd name="adj" fmla="val 7059"/>
+            </a:avLst>
+          </a:prstGeom>
+          <a:solidFill>
+            <a:srgbClr val="02C39A"/>
+          </a:solidFill>
+          <a:ln/>
+        </p:spPr>
+      </p:sp>
+      <p:sp>
+        <p:nvSpPr>
+          <p:cNvPr id="13" name="Text 11"/>
+          <p:cNvSpPr txBox="1"/>
+          <p:nvPr/>
+        </p:nvSpPr>
+        <p:spPr>
+          <a:xfrm>
+            <a:off x="9860280" y="1883664"/>
+            <a:ext cx="1661160" cy="320040"/>
+          </a:xfrm>
+          <a:prstGeom prst="rect">
+            <a:avLst/>
+          </a:prstGeom>
+          <a:noFill/>
+          <a:ln/>
+        </p:spPr>
+        <p:txBody>
+          <a:bodyPr wrap="square" lIns="0" tIns="0" rIns="0" bIns="0" rtlCol="0" anchor="ctr"/>
+          <a:lstStyle/>
+          <a:p>
+            <a:pPr indent="0" marL="0">
+              <a:buNone/>
+            </a:pPr>
+            <a:r>
+              <a:rPr lang="en-US" sz="1300" b="1" dirty="0">
+                <a:solidFill>
+                  <a:srgbClr val="FFFFFF"/>
+                </a:solidFill>
+                <a:latin typeface="Calibri" pitchFamily="34" charset="0"/>
+                <a:ea typeface="Calibri" pitchFamily="34" charset="-122"/>
+                <a:cs typeface="Calibri" pitchFamily="34" charset="-120"/>
+              </a:rPr>
+              <a:t>Fase 3</a:t>
+            </a:r>
+            <a:endParaRPr lang="en-US" sz="1300" dirty="0"/>
+          </a:p>
+        </p:txBody>
+      </p:sp>
+      <p:sp>
+        <p:nvSpPr>
+          <p:cNvPr id="14" name="Text 12"/>
+          <p:cNvSpPr txBox="1"/>
+          <p:nvPr/>
+        </p:nvSpPr>
+        <p:spPr>
+          <a:xfrm>
+            <a:off x="9860280" y="2194560"/>
+            <a:ext cx="1661160" cy="274320"/>
+          </a:xfrm>
+          <a:prstGeom prst="rect">
+            <a:avLst/>
+          </a:prstGeom>
+          <a:noFill/>
+          <a:ln/>
+        </p:spPr>
+        <p:txBody>
+          <a:bodyPr wrap="square" lIns="0" tIns="0" rIns="0" bIns="0" rtlCol="0" anchor="ctr"/>
+          <a:lstStyle/>
+          <a:p>
+            <a:pPr indent="0" marL="0">
+              <a:buNone/>
+            </a:pPr>
+            <a:r>
+              <a:rPr lang="en-US" sz="950" dirty="0">
+                <a:solidFill>
+                  <a:srgbClr val="FFFFFF"/>
+                </a:solidFill>
+                <a:latin typeface="Calibri" pitchFamily="34" charset="0"/>
+                <a:ea typeface="Calibri" pitchFamily="34" charset="-122"/>
+                <a:cs typeface="Calibri" pitchFamily="34" charset="-120"/>
+              </a:rPr>
+              <a:t>Presentación</a:t>
+            </a:r>
+            <a:endParaRPr lang="en-US" sz="950" dirty="0"/>
+          </a:p>
+        </p:txBody>
+      </p:sp>
+      <p:sp>
+        <p:nvSpPr>
+          <p:cNvPr id="15" name="Text 13"/>
+          <p:cNvSpPr txBox="1"/>
+          <p:nvPr/>
+        </p:nvSpPr>
+        <p:spPr>
+          <a:xfrm>
+            <a:off x="9860280" y="2395728"/>
+            <a:ext cx="1661160" cy="228600"/>
+          </a:xfrm>
+          <a:prstGeom prst="rect">
+            <a:avLst/>
+          </a:prstGeom>
+          <a:noFill/>
+          <a:ln/>
+        </p:spPr>
+        <p:txBody>
+          <a:bodyPr wrap="square" lIns="0" tIns="0" rIns="0" bIns="0" rtlCol="0" anchor="ctr"/>
+          <a:lstStyle/>
+          <a:p>
+            <a:pPr indent="0" marL="0">
+              <a:buNone/>
+            </a:pPr>
+            <a:r>
+              <a:rPr lang="en-US" sz="900" i="1" dirty="0">
+                <a:solidFill>
+                  <a:srgbClr val="FFFFFF"/>
+                </a:solidFill>
+                <a:latin typeface="Calibri" pitchFamily="34" charset="0"/>
+                <a:ea typeface="Calibri" pitchFamily="34" charset="-122"/>
+                <a:cs typeface="Calibri" pitchFamily="34" charset="-120"/>
+              </a:rPr>
+              <a:t>S16 – S18</a:t>
+            </a:r>
+            <a:endParaRPr lang="en-US" sz="900" dirty="0"/>
+          </a:p>
+        </p:txBody>
+      </p:sp>
+      <p:sp>
+        <p:nvSpPr>
+          <p:cNvPr id="16" name="Shape 14"/>
+          <p:cNvSpPr/>
+          <p:nvPr/>
+        </p:nvSpPr>
+        <p:spPr>
+          <a:xfrm>
+            <a:off x="3007360" y="1691640"/>
+            <a:ext cx="0" cy="1051560"/>
+          </a:xfrm>
+          <a:prstGeom prst="line">
+            <a:avLst/>
+          </a:prstGeom>
+          <a:noFill/>
+          <a:ln w="25400">
+            <a:solidFill>
+              <a:srgbClr val="0B3D42"/>
+            </a:solidFill>
+            <a:prstDash val="dash"/>
+          </a:ln>
+        </p:spPr>
+      </p:sp>
+      <p:sp>
+        <p:nvSpPr>
+          <p:cNvPr id="17" name="Text 15"/>
+          <p:cNvSpPr txBox="1"/>
+          <p:nvPr/>
+        </p:nvSpPr>
+        <p:spPr>
+          <a:xfrm>
+            <a:off x="2367280" y="1325880"/>
+            <a:ext cx="1280160" cy="320040"/>
+          </a:xfrm>
+          <a:prstGeom prst="rect">
+            <a:avLst/>
+          </a:prstGeom>
+          <a:noFill/>
+          <a:ln/>
+        </p:spPr>
+        <p:txBody>
+          <a:bodyPr wrap="square" lIns="0" tIns="0" rIns="0" bIns="0" rtlCol="0" anchor="ctr"/>
+          <a:lstStyle/>
+          <a:p>
+            <a:pPr algn="ctr" indent="0" marL="0">
+              <a:buNone/>
+            </a:pPr>
+            <a:r>
+              <a:rPr lang="en-US" sz="1000" b="1" dirty="0">
+                <a:solidFill>
+                  <a:srgbClr val="0B3D42"/>
+                </a:solidFill>
+                <a:latin typeface="Calibri" pitchFamily="34" charset="0"/>
+                <a:ea typeface="Calibri" pitchFamily="34" charset="-122"/>
+                <a:cs typeface="Calibri" pitchFamily="34" charset="-120"/>
+              </a:rPr>
+              <a:t>Estamos aquí</a:t>
+            </a:r>
+            <a:endParaRPr lang="en-US" sz="1000" dirty="0"/>
+          </a:p>
+        </p:txBody>
+      </p:sp>
+      <p:sp>
+        <p:nvSpPr>
+          <p:cNvPr id="18" name="Shape 16"/>
+          <p:cNvSpPr/>
+          <p:nvPr/>
+        </p:nvSpPr>
+        <p:spPr>
+          <a:xfrm>
+            <a:off x="548640" y="2971800"/>
+            <a:ext cx="3535680" cy="868680"/>
+          </a:xfrm>
+          <a:prstGeom prst="roundRect">
+            <a:avLst>
+              <a:gd name="adj" fmla="val 7368"/>
             </a:avLst>
           </a:prstGeom>
           <a:solidFill>
@@ -6923,25 +6916,18 @@
             </a:solidFill>
             <a:prstDash val="solid"/>
           </a:ln>
-          <a:effectLst>
-            <a:outerShdw sx="100000" sy="100000" kx="0" ky="0" algn="bl" rotWithShape="0" blurRad="76200" dist="25400" dir="5400000">
-              <a:srgbClr val="1F3A3C">
-                <a:alpha val="12000"/>
-              </a:srgbClr>
-            </a:outerShdw>
-          </a:effectLst>
-        </p:spPr>
-      </p:sp>
-      <p:sp>
-        <p:nvSpPr>
-          <p:cNvPr id="6" name="Text 4"/>
-          <p:cNvSpPr txBox="1"/>
-          <p:nvPr/>
-        </p:nvSpPr>
-        <p:spPr>
-          <a:xfrm>
-            <a:off x="777240" y="2130552"/>
-            <a:ext cx="4892040" cy="502920"/>
+        </p:spPr>
+      </p:sp>
+      <p:sp>
+        <p:nvSpPr>
+          <p:cNvPr id="19" name="Text 17"/>
+          <p:cNvSpPr txBox="1"/>
+          <p:nvPr/>
+        </p:nvSpPr>
+        <p:spPr>
+          <a:xfrm>
+            <a:off x="685800" y="3044952"/>
+            <a:ext cx="3261360" cy="274320"/>
           </a:xfrm>
           <a:prstGeom prst="rect">
             <a:avLst/>
@@ -6957,30 +6943,30 @@
               <a:buNone/>
             </a:pPr>
             <a:r>
-              <a:rPr lang="en-US" sz="1350" b="1" dirty="0">
-                <a:solidFill>
-                  <a:srgbClr val="0B2B2E"/>
-                </a:solidFill>
-                <a:latin typeface="Calibri" pitchFamily="34" charset="0"/>
-                <a:ea typeface="Calibri" pitchFamily="34" charset="-122"/>
-                <a:cs typeface="Calibri" pitchFamily="34" charset="-120"/>
-              </a:rPr>
-              <a:t>Repositorio GitHub actualizado</a:t>
-            </a:r>
-            <a:endParaRPr lang="en-US" sz="1350" dirty="0"/>
-          </a:p>
-        </p:txBody>
-      </p:sp>
-      <p:sp>
-        <p:nvSpPr>
-          <p:cNvPr id="7" name="Text 5"/>
-          <p:cNvSpPr txBox="1"/>
-          <p:nvPr/>
-        </p:nvSpPr>
-        <p:spPr>
-          <a:xfrm>
-            <a:off x="777240" y="2624328"/>
-            <a:ext cx="4892040" cy="1005840"/>
+              <a:rPr lang="en-US" sz="1150" b="1" dirty="0">
+                <a:solidFill>
+                  <a:srgbClr val="028090"/>
+                </a:solidFill>
+                <a:latin typeface="Calibri" pitchFamily="34" charset="0"/>
+                <a:ea typeface="Calibri" pitchFamily="34" charset="-122"/>
+                <a:cs typeface="Calibri" pitchFamily="34" charset="-120"/>
+              </a:rPr>
+              <a:t>Sprint 1 (S5-6)</a:t>
+            </a:r>
+            <a:endParaRPr lang="en-US" sz="1150" dirty="0"/>
+          </a:p>
+        </p:txBody>
+      </p:sp>
+      <p:sp>
+        <p:nvSpPr>
+          <p:cNvPr id="20" name="Text 18"/>
+          <p:cNvSpPr txBox="1"/>
+          <p:nvPr/>
+        </p:nvSpPr>
+        <p:spPr>
+          <a:xfrm>
+            <a:off x="685800" y="3319272"/>
+            <a:ext cx="3261360" cy="457200"/>
           </a:xfrm>
           <a:prstGeom prst="rect">
             <a:avLst/>
@@ -6994,39 +6980,39 @@
           <a:p>
             <a:pPr indent="0" marL="0">
               <a:lnSpc>
-                <a:spcPct val="115000"/>
+                <a:spcPct val="105000"/>
               </a:lnSpc>
               <a:buNone/>
             </a:pPr>
             <a:r>
-              <a:rPr lang="en-US" sz="1150" dirty="0">
-                <a:solidFill>
-                  <a:srgbClr val="5C7A7C"/>
-                </a:solidFill>
-                <a:latin typeface="Calibri" pitchFamily="34" charset="0"/>
-                <a:ea typeface="Calibri" pitchFamily="34" charset="-122"/>
-                <a:cs typeface="Calibri" pitchFamily="34" charset="-120"/>
-              </a:rPr>
-              <a:t>Código del módulo de autenticación, modelo de datos y estructura base</a:t>
-            </a:r>
-            <a:endParaRPr lang="en-US" sz="1150" dirty="0"/>
-          </a:p>
-        </p:txBody>
-      </p:sp>
-      <p:sp>
-        <p:nvSpPr>
-          <p:cNvPr id="8" name="Shape 6"/>
+              <a:rPr lang="en-US" sz="1000" dirty="0">
+                <a:solidFill>
+                  <a:srgbClr val="0B2B2E"/>
+                </a:solidFill>
+                <a:latin typeface="Calibri" pitchFamily="34" charset="0"/>
+                <a:ea typeface="Calibri" pitchFamily="34" charset="-122"/>
+                <a:cs typeface="Calibri" pitchFamily="34" charset="-120"/>
+              </a:rPr>
+              <a:t>Autenticación, modelo de datos, estructura base app</a:t>
+            </a:r>
+            <a:endParaRPr lang="en-US" sz="1000" dirty="0"/>
+          </a:p>
+        </p:txBody>
+      </p:sp>
+      <p:sp>
+        <p:nvSpPr>
+          <p:cNvPr id="21" name="Shape 19"/>
           <p:cNvSpPr/>
           <p:nvPr/>
         </p:nvSpPr>
         <p:spPr>
           <a:xfrm>
-            <a:off x="548640" y="3931920"/>
-            <a:ext cx="5349240" cy="1783080"/>
+            <a:off x="4312920" y="2971800"/>
+            <a:ext cx="3535680" cy="868680"/>
           </a:xfrm>
           <a:prstGeom prst="roundRect">
             <a:avLst>
-              <a:gd name="adj" fmla="val 4103"/>
+              <a:gd name="adj" fmla="val 7368"/>
             </a:avLst>
           </a:prstGeom>
           <a:solidFill>
@@ -7038,25 +7024,18 @@
             </a:solidFill>
             <a:prstDash val="solid"/>
           </a:ln>
-          <a:effectLst>
-            <a:outerShdw sx="100000" sy="100000" kx="0" ky="0" algn="bl" rotWithShape="0" blurRad="76200" dist="25400" dir="5400000">
-              <a:srgbClr val="1F3A3C">
-                <a:alpha val="12000"/>
-              </a:srgbClr>
-            </a:outerShdw>
-          </a:effectLst>
-        </p:spPr>
-      </p:sp>
-      <p:sp>
-        <p:nvSpPr>
-          <p:cNvPr id="9" name="Text 7"/>
-          <p:cNvSpPr txBox="1"/>
-          <p:nvPr/>
-        </p:nvSpPr>
-        <p:spPr>
-          <a:xfrm>
-            <a:off x="777240" y="4096512"/>
-            <a:ext cx="4892040" cy="502920"/>
+        </p:spPr>
+      </p:sp>
+      <p:sp>
+        <p:nvSpPr>
+          <p:cNvPr id="22" name="Text 20"/>
+          <p:cNvSpPr txBox="1"/>
+          <p:nvPr/>
+        </p:nvSpPr>
+        <p:spPr>
+          <a:xfrm>
+            <a:off x="4450080" y="3044952"/>
+            <a:ext cx="3261360" cy="274320"/>
           </a:xfrm>
           <a:prstGeom prst="rect">
             <a:avLst/>
@@ -7072,30 +7051,30 @@
               <a:buNone/>
             </a:pPr>
             <a:r>
-              <a:rPr lang="en-US" sz="1350" b="1" dirty="0">
-                <a:solidFill>
-                  <a:srgbClr val="0B2B2E"/>
-                </a:solidFill>
-                <a:latin typeface="Calibri" pitchFamily="34" charset="0"/>
-                <a:ea typeface="Calibri" pitchFamily="34" charset="-122"/>
-                <a:cs typeface="Calibri" pitchFamily="34" charset="-120"/>
-              </a:rPr>
-              <a:t>Informe de Avance Proyecto APT</a:t>
-            </a:r>
-            <a:endParaRPr lang="en-US" sz="1350" dirty="0"/>
-          </a:p>
-        </p:txBody>
-      </p:sp>
-      <p:sp>
-        <p:nvSpPr>
-          <p:cNvPr id="10" name="Text 8"/>
-          <p:cNvSpPr txBox="1"/>
-          <p:nvPr/>
-        </p:nvSpPr>
-        <p:spPr>
-          <a:xfrm>
-            <a:off x="777240" y="4590288"/>
-            <a:ext cx="4892040" cy="1005840"/>
+              <a:rPr lang="en-US" sz="1150" b="1" dirty="0">
+                <a:solidFill>
+                  <a:srgbClr val="028090"/>
+                </a:solidFill>
+                <a:latin typeface="Calibri" pitchFamily="34" charset="0"/>
+                <a:ea typeface="Calibri" pitchFamily="34" charset="-122"/>
+                <a:cs typeface="Calibri" pitchFamily="34" charset="-120"/>
+              </a:rPr>
+              <a:t>Sprint 2 (S7-8)</a:t>
+            </a:r>
+            <a:endParaRPr lang="en-US" sz="1150" dirty="0"/>
+          </a:p>
+        </p:txBody>
+      </p:sp>
+      <p:sp>
+        <p:nvSpPr>
+          <p:cNvPr id="23" name="Text 21"/>
+          <p:cNvSpPr txBox="1"/>
+          <p:nvPr/>
+        </p:nvSpPr>
+        <p:spPr>
+          <a:xfrm>
+            <a:off x="4450080" y="3319272"/>
+            <a:ext cx="3261360" cy="457200"/>
           </a:xfrm>
           <a:prstGeom prst="rect">
             <a:avLst/>
@@ -7109,100 +7088,39 @@
           <a:p>
             <a:pPr indent="0" marL="0">
               <a:lnSpc>
-                <a:spcPct val="115000"/>
+                <a:spcPct val="105000"/>
               </a:lnSpc>
               <a:buNone/>
             </a:pPr>
             <a:r>
-              <a:rPr lang="en-US" sz="1150" dirty="0">
-                <a:solidFill>
-                  <a:srgbClr val="5C7A7C"/>
-                </a:solidFill>
-                <a:latin typeface="Calibri" pitchFamily="34" charset="0"/>
-                <a:ea typeface="Calibri" pitchFamily="34" charset="-122"/>
-                <a:cs typeface="Calibri" pitchFamily="34" charset="-120"/>
-              </a:rPr>
-              <a:t>Resumen del estado de desarrollo y objetivos/metodología ajustados</a:t>
-            </a:r>
-            <a:endParaRPr lang="en-US" sz="1150" dirty="0"/>
-          </a:p>
-        </p:txBody>
-      </p:sp>
-      <p:sp>
-        <p:nvSpPr>
-          <p:cNvPr id="11" name="Shape 9"/>
+              <a:rPr lang="en-US" sz="1000" dirty="0">
+                <a:solidFill>
+                  <a:srgbClr val="0B2B2E"/>
+                </a:solidFill>
+                <a:latin typeface="Calibri" pitchFamily="34" charset="0"/>
+                <a:ea typeface="Calibri" pitchFamily="34" charset="-122"/>
+                <a:cs typeface="Calibri" pitchFamily="34" charset="-120"/>
+              </a:rPr>
+              <a:t>Medicamentos y rutinas: API + UI conectadas</a:t>
+            </a:r>
+            <a:endParaRPr lang="en-US" sz="1000" dirty="0"/>
+          </a:p>
+        </p:txBody>
+      </p:sp>
+      <p:sp>
+        <p:nvSpPr>
+          <p:cNvPr id="24" name="Shape 22"/>
           <p:cNvSpPr/>
           <p:nvPr/>
         </p:nvSpPr>
         <p:spPr>
           <a:xfrm>
-            <a:off x="6263640" y="1280160"/>
-            <a:ext cx="5349240" cy="502920"/>
+            <a:off x="8077200" y="2971800"/>
+            <a:ext cx="3535680" cy="868680"/>
           </a:xfrm>
           <a:prstGeom prst="roundRect">
             <a:avLst>
-              <a:gd name="adj" fmla="val 12727"/>
-            </a:avLst>
-          </a:prstGeom>
-          <a:solidFill>
-            <a:srgbClr val="00A896"/>
-          </a:solidFill>
-          <a:ln/>
-        </p:spPr>
-      </p:sp>
-      <p:sp>
-        <p:nvSpPr>
-          <p:cNvPr id="12" name="Text 10"/>
-          <p:cNvSpPr txBox="1"/>
-          <p:nvPr/>
-        </p:nvSpPr>
-        <p:spPr>
-          <a:xfrm>
-            <a:off x="6263640" y="1280160"/>
-            <a:ext cx="5349240" cy="502920"/>
-          </a:xfrm>
-          <a:prstGeom prst="rect">
-            <a:avLst/>
-          </a:prstGeom>
-          <a:noFill/>
-          <a:ln/>
-        </p:spPr>
-        <p:txBody>
-          <a:bodyPr wrap="square" lIns="0" tIns="0" rIns="0" bIns="0" rtlCol="0" anchor="ctr"/>
-          <a:lstStyle/>
-          <a:p>
-            <a:pPr algn="ctr" indent="0" marL="0">
-              <a:buNone/>
-            </a:pPr>
-            <a:r>
-              <a:rPr lang="en-US" sz="1500" b="1" dirty="0">
-                <a:solidFill>
-                  <a:srgbClr val="FFFFFF"/>
-                </a:solidFill>
-                <a:latin typeface="Calibri" pitchFamily="34" charset="0"/>
-                <a:ea typeface="Calibri" pitchFamily="34" charset="-122"/>
-                <a:cs typeface="Calibri" pitchFamily="34" charset="-120"/>
-              </a:rPr>
-              <a:t>Finales</a:t>
-            </a:r>
-            <a:endParaRPr lang="en-US" sz="1500" dirty="0"/>
-          </a:p>
-        </p:txBody>
-      </p:sp>
-      <p:sp>
-        <p:nvSpPr>
-          <p:cNvPr id="13" name="Shape 11"/>
-          <p:cNvSpPr/>
-          <p:nvPr/>
-        </p:nvSpPr>
-        <p:spPr>
-          <a:xfrm>
-            <a:off x="6263640" y="1965960"/>
-            <a:ext cx="5349240" cy="1783080"/>
-          </a:xfrm>
-          <a:prstGeom prst="roundRect">
-            <a:avLst>
-              <a:gd name="adj" fmla="val 4103"/>
+              <a:gd name="adj" fmla="val 7368"/>
             </a:avLst>
           </a:prstGeom>
           <a:solidFill>
@@ -7214,25 +7132,18 @@
             </a:solidFill>
             <a:prstDash val="solid"/>
           </a:ln>
-          <a:effectLst>
-            <a:outerShdw sx="100000" sy="100000" kx="0" ky="0" algn="bl" rotWithShape="0" blurRad="76200" dist="25400" dir="5400000">
-              <a:srgbClr val="1F3A3C">
-                <a:alpha val="12000"/>
-              </a:srgbClr>
-            </a:outerShdw>
-          </a:effectLst>
-        </p:spPr>
-      </p:sp>
-      <p:sp>
-        <p:nvSpPr>
-          <p:cNvPr id="14" name="Text 12"/>
-          <p:cNvSpPr txBox="1"/>
-          <p:nvPr/>
-        </p:nvSpPr>
-        <p:spPr>
-          <a:xfrm>
-            <a:off x="6492240" y="2130552"/>
-            <a:ext cx="4892040" cy="502920"/>
+        </p:spPr>
+      </p:sp>
+      <p:sp>
+        <p:nvSpPr>
+          <p:cNvPr id="25" name="Text 23"/>
+          <p:cNvSpPr txBox="1"/>
+          <p:nvPr/>
+        </p:nvSpPr>
+        <p:spPr>
+          <a:xfrm>
+            <a:off x="8214360" y="3044952"/>
+            <a:ext cx="3261360" cy="274320"/>
           </a:xfrm>
           <a:prstGeom prst="rect">
             <a:avLst/>
@@ -7248,30 +7159,30 @@
               <a:buNone/>
             </a:pPr>
             <a:r>
-              <a:rPr lang="en-US" sz="1350" b="1" dirty="0">
-                <a:solidFill>
-                  <a:srgbClr val="0B2B2E"/>
-                </a:solidFill>
-                <a:latin typeface="Calibri" pitchFamily="34" charset="0"/>
-                <a:ea typeface="Calibri" pitchFamily="34" charset="-122"/>
-                <a:cs typeface="Calibri" pitchFamily="34" charset="-120"/>
-              </a:rPr>
-              <a:t>Aplicación funcional + backend (Docker)</a:t>
-            </a:r>
-            <a:endParaRPr lang="en-US" sz="1350" dirty="0"/>
-          </a:p>
-        </p:txBody>
-      </p:sp>
-      <p:sp>
-        <p:nvSpPr>
-          <p:cNvPr id="15" name="Text 13"/>
-          <p:cNvSpPr txBox="1"/>
-          <p:nvPr/>
-        </p:nvSpPr>
-        <p:spPr>
-          <a:xfrm>
-            <a:off x="6492240" y="2624328"/>
-            <a:ext cx="4892040" cy="1005840"/>
+              <a:rPr lang="en-US" sz="1150" b="1" dirty="0">
+                <a:solidFill>
+                  <a:srgbClr val="028090"/>
+                </a:solidFill>
+                <a:latin typeface="Calibri" pitchFamily="34" charset="0"/>
+                <a:ea typeface="Calibri" pitchFamily="34" charset="-122"/>
+                <a:cs typeface="Calibri" pitchFamily="34" charset="-120"/>
+              </a:rPr>
+              <a:t>Sprint 3 (S9-10)</a:t>
+            </a:r>
+            <a:endParaRPr lang="en-US" sz="1150" dirty="0"/>
+          </a:p>
+        </p:txBody>
+      </p:sp>
+      <p:sp>
+        <p:nvSpPr>
+          <p:cNvPr id="26" name="Text 24"/>
+          <p:cNvSpPr txBox="1"/>
+          <p:nvPr/>
+        </p:nvSpPr>
+        <p:spPr>
+          <a:xfrm>
+            <a:off x="8214360" y="3319272"/>
+            <a:ext cx="3261360" cy="457200"/>
           </a:xfrm>
           <a:prstGeom prst="rect">
             <a:avLst/>
@@ -7285,39 +7196,39 @@
           <a:p>
             <a:pPr indent="0" marL="0">
               <a:lnSpc>
-                <a:spcPct val="115000"/>
+                <a:spcPct val="105000"/>
               </a:lnSpc>
               <a:buNone/>
             </a:pPr>
             <a:r>
-              <a:rPr lang="en-US" sz="1150" dirty="0">
-                <a:solidFill>
-                  <a:srgbClr val="5C7A7C"/>
-                </a:solidFill>
-                <a:latin typeface="Calibri" pitchFamily="34" charset="0"/>
-                <a:ea typeface="Calibri" pitchFamily="34" charset="-122"/>
-                <a:cs typeface="Calibri" pitchFamily="34" charset="-120"/>
-              </a:rPr>
-              <a:t>Módulos del MVP integrados y operativos</a:t>
-            </a:r>
-            <a:endParaRPr lang="en-US" sz="1150" dirty="0"/>
-          </a:p>
-        </p:txBody>
-      </p:sp>
-      <p:sp>
-        <p:nvSpPr>
-          <p:cNvPr id="16" name="Shape 14"/>
+              <a:rPr lang="en-US" sz="1000" dirty="0">
+                <a:solidFill>
+                  <a:srgbClr val="0B2B2E"/>
+                </a:solidFill>
+                <a:latin typeface="Calibri" pitchFamily="34" charset="0"/>
+                <a:ea typeface="Calibri" pitchFamily="34" charset="-122"/>
+                <a:cs typeface="Calibri" pitchFamily="34" charset="-120"/>
+              </a:rPr>
+              <a:t>Perfiles dependientes y permisos · Informe de Avance</a:t>
+            </a:r>
+            <a:endParaRPr lang="en-US" sz="1000" dirty="0"/>
+          </a:p>
+        </p:txBody>
+      </p:sp>
+      <p:sp>
+        <p:nvSpPr>
+          <p:cNvPr id="27" name="Shape 25"/>
           <p:cNvSpPr/>
           <p:nvPr/>
         </p:nvSpPr>
         <p:spPr>
           <a:xfrm>
-            <a:off x="6263640" y="3931920"/>
-            <a:ext cx="5349240" cy="1783080"/>
+            <a:off x="548640" y="3977640"/>
+            <a:ext cx="3535680" cy="868680"/>
           </a:xfrm>
           <a:prstGeom prst="roundRect">
             <a:avLst>
-              <a:gd name="adj" fmla="val 4103"/>
+              <a:gd name="adj" fmla="val 7368"/>
             </a:avLst>
           </a:prstGeom>
           <a:solidFill>
@@ -7329,25 +7240,18 @@
             </a:solidFill>
             <a:prstDash val="solid"/>
           </a:ln>
-          <a:effectLst>
-            <a:outerShdw sx="100000" sy="100000" kx="0" ky="0" algn="bl" rotWithShape="0" blurRad="76200" dist="25400" dir="5400000">
-              <a:srgbClr val="1F3A3C">
-                <a:alpha val="12000"/>
-              </a:srgbClr>
-            </a:outerShdw>
-          </a:effectLst>
-        </p:spPr>
-      </p:sp>
-      <p:sp>
-        <p:nvSpPr>
-          <p:cNvPr id="17" name="Text 15"/>
-          <p:cNvSpPr txBox="1"/>
-          <p:nvPr/>
-        </p:nvSpPr>
-        <p:spPr>
-          <a:xfrm>
-            <a:off x="6492240" y="4096512"/>
-            <a:ext cx="4892040" cy="502920"/>
+        </p:spPr>
+      </p:sp>
+      <p:sp>
+        <p:nvSpPr>
+          <p:cNvPr id="28" name="Text 26"/>
+          <p:cNvSpPr txBox="1"/>
+          <p:nvPr/>
+        </p:nvSpPr>
+        <p:spPr>
+          <a:xfrm>
+            <a:off x="685800" y="4050792"/>
+            <a:ext cx="3261360" cy="274320"/>
           </a:xfrm>
           <a:prstGeom prst="rect">
             <a:avLst/>
@@ -7363,30 +7267,30 @@
               <a:buNone/>
             </a:pPr>
             <a:r>
-              <a:rPr lang="en-US" sz="1350" b="1" dirty="0">
-                <a:solidFill>
-                  <a:srgbClr val="0B2B2E"/>
-                </a:solidFill>
-                <a:latin typeface="Calibri" pitchFamily="34" charset="0"/>
-                <a:ea typeface="Calibri" pitchFamily="34" charset="-122"/>
-                <a:cs typeface="Calibri" pitchFamily="34" charset="-120"/>
-              </a:rPr>
-              <a:t>Informe Final + manual técnico + README</a:t>
-            </a:r>
-            <a:endParaRPr lang="en-US" sz="1350" dirty="0"/>
-          </a:p>
-        </p:txBody>
-      </p:sp>
-      <p:sp>
-        <p:nvSpPr>
-          <p:cNvPr id="18" name="Text 16"/>
-          <p:cNvSpPr txBox="1"/>
-          <p:nvPr/>
-        </p:nvSpPr>
-        <p:spPr>
-          <a:xfrm>
-            <a:off x="6492240" y="4590288"/>
-            <a:ext cx="4892040" cy="1005840"/>
+              <a:rPr lang="en-US" sz="1150" b="1" dirty="0">
+                <a:solidFill>
+                  <a:srgbClr val="028090"/>
+                </a:solidFill>
+                <a:latin typeface="Calibri" pitchFamily="34" charset="0"/>
+                <a:ea typeface="Calibri" pitchFamily="34" charset="-122"/>
+                <a:cs typeface="Calibri" pitchFamily="34" charset="-120"/>
+              </a:rPr>
+              <a:t>Sprint 4 (S11-12)</a:t>
+            </a:r>
+            <a:endParaRPr lang="en-US" sz="1150" dirty="0"/>
+          </a:p>
+        </p:txBody>
+      </p:sp>
+      <p:sp>
+        <p:nvSpPr>
+          <p:cNvPr id="29" name="Text 27"/>
+          <p:cNvSpPr txBox="1"/>
+          <p:nvPr/>
+        </p:nvSpPr>
+        <p:spPr>
+          <a:xfrm>
+            <a:off x="685800" y="4325112"/>
+            <a:ext cx="3261360" cy="457200"/>
           </a:xfrm>
           <a:prstGeom prst="rect">
             <a:avLst/>
@@ -7400,12 +7304,267 @@
           <a:p>
             <a:pPr indent="0" marL="0">
               <a:lnSpc>
-                <a:spcPct val="115000"/>
+                <a:spcPct val="105000"/>
               </a:lnSpc>
               <a:buNone/>
             </a:pPr>
             <a:r>
-              <a:rPr lang="en-US" sz="1150" dirty="0">
+              <a:rPr lang="en-US" sz="1000" dirty="0">
+                <a:solidFill>
+                  <a:srgbClr val="0B2B2E"/>
+                </a:solidFill>
+                <a:latin typeface="Calibri" pitchFamily="34" charset="0"/>
+                <a:ea typeface="Calibri" pitchFamily="34" charset="-122"/>
+                <a:cs typeface="Calibri" pitchFamily="34" charset="-120"/>
+              </a:rPr>
+              <a:t>Recordatorios, alertas e interfaz simplificada</a:t>
+            </a:r>
+            <a:endParaRPr lang="en-US" sz="1000" dirty="0"/>
+          </a:p>
+        </p:txBody>
+      </p:sp>
+      <p:sp>
+        <p:nvSpPr>
+          <p:cNvPr id="30" name="Shape 28"/>
+          <p:cNvSpPr/>
+          <p:nvPr/>
+        </p:nvSpPr>
+        <p:spPr>
+          <a:xfrm>
+            <a:off x="4312920" y="3977640"/>
+            <a:ext cx="3535680" cy="868680"/>
+          </a:xfrm>
+          <a:prstGeom prst="roundRect">
+            <a:avLst>
+              <a:gd name="adj" fmla="val 7368"/>
+            </a:avLst>
+          </a:prstGeom>
+          <a:solidFill>
+            <a:srgbClr val="FFFFFF"/>
+          </a:solidFill>
+          <a:ln w="12700">
+            <a:solidFill>
+              <a:srgbClr val="DCEDEC"/>
+            </a:solidFill>
+            <a:prstDash val="solid"/>
+          </a:ln>
+        </p:spPr>
+      </p:sp>
+      <p:sp>
+        <p:nvSpPr>
+          <p:cNvPr id="31" name="Text 29"/>
+          <p:cNvSpPr txBox="1"/>
+          <p:nvPr/>
+        </p:nvSpPr>
+        <p:spPr>
+          <a:xfrm>
+            <a:off x="4450080" y="4050792"/>
+            <a:ext cx="3261360" cy="274320"/>
+          </a:xfrm>
+          <a:prstGeom prst="rect">
+            <a:avLst/>
+          </a:prstGeom>
+          <a:noFill/>
+          <a:ln/>
+        </p:spPr>
+        <p:txBody>
+          <a:bodyPr wrap="square" lIns="0" tIns="0" rIns="0" bIns="0" rtlCol="0" anchor="ctr"/>
+          <a:lstStyle/>
+          <a:p>
+            <a:pPr indent="0" marL="0">
+              <a:buNone/>
+            </a:pPr>
+            <a:r>
+              <a:rPr lang="en-US" sz="1150" b="1" dirty="0">
+                <a:solidFill>
+                  <a:srgbClr val="028090"/>
+                </a:solidFill>
+                <a:latin typeface="Calibri" pitchFamily="34" charset="0"/>
+                <a:ea typeface="Calibri" pitchFamily="34" charset="-122"/>
+                <a:cs typeface="Calibri" pitchFamily="34" charset="-120"/>
+              </a:rPr>
+              <a:t>Sprint 5 (S13-14)</a:t>
+            </a:r>
+            <a:endParaRPr lang="en-US" sz="1150" dirty="0"/>
+          </a:p>
+        </p:txBody>
+      </p:sp>
+      <p:sp>
+        <p:nvSpPr>
+          <p:cNvPr id="32" name="Text 30"/>
+          <p:cNvSpPr txBox="1"/>
+          <p:nvPr/>
+        </p:nvSpPr>
+        <p:spPr>
+          <a:xfrm>
+            <a:off x="4450080" y="4325112"/>
+            <a:ext cx="3261360" cy="457200"/>
+          </a:xfrm>
+          <a:prstGeom prst="rect">
+            <a:avLst/>
+          </a:prstGeom>
+          <a:noFill/>
+          <a:ln/>
+        </p:spPr>
+        <p:txBody>
+          <a:bodyPr wrap="square" lIns="0" tIns="0" rIns="0" bIns="0" rtlCol="0" anchor="ctr"/>
+          <a:lstStyle/>
+          <a:p>
+            <a:pPr indent="0" marL="0">
+              <a:lnSpc>
+                <a:spcPct val="105000"/>
+              </a:lnSpc>
+              <a:buNone/>
+            </a:pPr>
+            <a:r>
+              <a:rPr lang="en-US" sz="1000" dirty="0">
+                <a:solidFill>
+                  <a:srgbClr val="0B2B2E"/>
+                </a:solidFill>
+                <a:latin typeface="Calibri" pitchFamily="34" charset="0"/>
+                <a:ea typeface="Calibri" pitchFamily="34" charset="-122"/>
+                <a:cs typeface="Calibri" pitchFamily="34" charset="-120"/>
+              </a:rPr>
+              <a:t>Indicadores de salud, módulo de IA y pantalla en casa</a:t>
+            </a:r>
+            <a:endParaRPr lang="en-US" sz="1000" dirty="0"/>
+          </a:p>
+        </p:txBody>
+      </p:sp>
+      <p:sp>
+        <p:nvSpPr>
+          <p:cNvPr id="33" name="Shape 31"/>
+          <p:cNvSpPr/>
+          <p:nvPr/>
+        </p:nvSpPr>
+        <p:spPr>
+          <a:xfrm>
+            <a:off x="8077200" y="3977640"/>
+            <a:ext cx="3535680" cy="868680"/>
+          </a:xfrm>
+          <a:prstGeom prst="roundRect">
+            <a:avLst>
+              <a:gd name="adj" fmla="val 7368"/>
+            </a:avLst>
+          </a:prstGeom>
+          <a:solidFill>
+            <a:srgbClr val="FFFFFF"/>
+          </a:solidFill>
+          <a:ln w="12700">
+            <a:solidFill>
+              <a:srgbClr val="DCEDEC"/>
+            </a:solidFill>
+            <a:prstDash val="solid"/>
+          </a:ln>
+        </p:spPr>
+      </p:sp>
+      <p:sp>
+        <p:nvSpPr>
+          <p:cNvPr id="34" name="Text 32"/>
+          <p:cNvSpPr txBox="1"/>
+          <p:nvPr/>
+        </p:nvSpPr>
+        <p:spPr>
+          <a:xfrm>
+            <a:off x="8214360" y="4050792"/>
+            <a:ext cx="3261360" cy="274320"/>
+          </a:xfrm>
+          <a:prstGeom prst="rect">
+            <a:avLst/>
+          </a:prstGeom>
+          <a:noFill/>
+          <a:ln/>
+        </p:spPr>
+        <p:txBody>
+          <a:bodyPr wrap="square" lIns="0" tIns="0" rIns="0" bIns="0" rtlCol="0" anchor="ctr"/>
+          <a:lstStyle/>
+          <a:p>
+            <a:pPr indent="0" marL="0">
+              <a:buNone/>
+            </a:pPr>
+            <a:r>
+              <a:rPr lang="en-US" sz="1150" b="1" dirty="0">
+                <a:solidFill>
+                  <a:srgbClr val="028090"/>
+                </a:solidFill>
+                <a:latin typeface="Calibri" pitchFamily="34" charset="0"/>
+                <a:ea typeface="Calibri" pitchFamily="34" charset="-122"/>
+                <a:cs typeface="Calibri" pitchFamily="34" charset="-120"/>
+              </a:rPr>
+              <a:t>Sprint 6 (S15)</a:t>
+            </a:r>
+            <a:endParaRPr lang="en-US" sz="1150" dirty="0"/>
+          </a:p>
+        </p:txBody>
+      </p:sp>
+      <p:sp>
+        <p:nvSpPr>
+          <p:cNvPr id="35" name="Text 33"/>
+          <p:cNvSpPr txBox="1"/>
+          <p:nvPr/>
+        </p:nvSpPr>
+        <p:spPr>
+          <a:xfrm>
+            <a:off x="8214360" y="4325112"/>
+            <a:ext cx="3261360" cy="457200"/>
+          </a:xfrm>
+          <a:prstGeom prst="rect">
+            <a:avLst/>
+          </a:prstGeom>
+          <a:noFill/>
+          <a:ln/>
+        </p:spPr>
+        <p:txBody>
+          <a:bodyPr wrap="square" lIns="0" tIns="0" rIns="0" bIns="0" rtlCol="0" anchor="ctr"/>
+          <a:lstStyle/>
+          <a:p>
+            <a:pPr indent="0" marL="0">
+              <a:lnSpc>
+                <a:spcPct val="105000"/>
+              </a:lnSpc>
+              <a:buNone/>
+            </a:pPr>
+            <a:r>
+              <a:rPr lang="en-US" sz="1000" dirty="0">
+                <a:solidFill>
+                  <a:srgbClr val="0B2B2E"/>
+                </a:solidFill>
+                <a:latin typeface="Calibri" pitchFamily="34" charset="0"/>
+                <a:ea typeface="Calibri" pitchFamily="34" charset="-122"/>
+                <a:cs typeface="Calibri" pitchFamily="34" charset="-120"/>
+              </a:rPr>
+              <a:t>Pulsera, detección de ruido, pruebas e Informe Final</a:t>
+            </a:r>
+            <a:endParaRPr lang="en-US" sz="1000" dirty="0"/>
+          </a:p>
+        </p:txBody>
+      </p:sp>
+      <p:sp>
+        <p:nvSpPr>
+          <p:cNvPr id="36" name="Text 34"/>
+          <p:cNvSpPr txBox="1"/>
+          <p:nvPr/>
+        </p:nvSpPr>
+        <p:spPr>
+          <a:xfrm>
+            <a:off x="548640" y="5257800"/>
+            <a:ext cx="11064240" cy="548640"/>
+          </a:xfrm>
+          <a:prstGeom prst="rect">
+            <a:avLst/>
+          </a:prstGeom>
+          <a:noFill/>
+          <a:ln/>
+        </p:spPr>
+        <p:txBody>
+          <a:bodyPr wrap="square" lIns="0" tIns="0" rIns="0" bIns="0" rtlCol="0" anchor="ctr"/>
+          <a:lstStyle/>
+          <a:p>
+            <a:pPr indent="0" marL="0">
+              <a:buNone/>
+            </a:pPr>
+            <a:r>
+              <a:rPr lang="en-US" sz="1150" i="1" dirty="0">
                 <a:solidFill>
                   <a:srgbClr val="5C7A7C"/>
                 </a:solidFill>
@@ -7413,7 +7572,7 @@
                 <a:ea typeface="Calibri" pitchFamily="34" charset="-122"/>
                 <a:cs typeface="Calibri" pitchFamily="34" charset="-120"/>
               </a:rPr>
-              <a:t>Documentación completa, arquitectura y despliegue</a:t>
+              <a:t>Principal facilitador: el equipo ya domina las tecnologías definidas. Principal obstáculo: coordinar horarios entre los tres integrantes — se mitiga con reuniones semanales fijas.</a:t>
             </a:r>
             <a:endParaRPr lang="en-US" sz="1150" dirty="0"/>
           </a:p>
@@ -7421,46 +7580,7 @@
       </p:sp>
       <p:sp>
         <p:nvSpPr>
-          <p:cNvPr id="19" name="Text 17"/>
-          <p:cNvSpPr txBox="1"/>
-          <p:nvPr/>
-        </p:nvSpPr>
-        <p:spPr>
-          <a:xfrm>
-            <a:off x="548640" y="5989320"/>
-            <a:ext cx="11064240" cy="365760"/>
-          </a:xfrm>
-          <a:prstGeom prst="rect">
-            <a:avLst/>
-          </a:prstGeom>
-          <a:noFill/>
-          <a:ln/>
-        </p:spPr>
-        <p:txBody>
-          <a:bodyPr wrap="square" lIns="0" tIns="0" rIns="0" bIns="0" rtlCol="0" anchor="ctr"/>
-          <a:lstStyle/>
-          <a:p>
-            <a:pPr indent="0" marL="0">
-              <a:buNone/>
-            </a:pPr>
-            <a:r>
-              <a:rPr lang="en-US" sz="1100" i="1" dirty="0">
-                <a:solidFill>
-                  <a:srgbClr val="5C7A7C"/>
-                </a:solidFill>
-                <a:latin typeface="Calibri" pitchFamily="34" charset="0"/>
-                <a:ea typeface="Calibri" pitchFamily="34" charset="-122"/>
-                <a:cs typeface="Calibri" pitchFamily="34" charset="-120"/>
-              </a:rPr>
-              <a:t>En Fase 1 el proyecto está en etapa de definición y planificación; los indicadores de implementación se evidenciarán en Fase 2.</a:t>
-            </a:r>
-            <a:endParaRPr lang="en-US" sz="1100" dirty="0"/>
-          </a:p>
-        </p:txBody>
-      </p:sp>
-      <p:sp>
-        <p:nvSpPr>
-          <p:cNvPr id="20" name="Text 18"/>
+          <p:cNvPr id="37" name="Text 35"/>
           <p:cNvSpPr txBox="1"/>
           <p:nvPr/>
         </p:nvSpPr>
@@ -7499,7 +7619,7 @@
       </p:sp>
       <p:sp>
         <p:nvSpPr>
-          <p:cNvPr id="21" name="Text 19"/>
+          <p:cNvPr id="38" name="Text 36"/>
           <p:cNvSpPr txBox="1"/>
           <p:nvPr/>
         </p:nvSpPr>
@@ -7601,7 +7721,7 @@
                 <a:ea typeface="Cambria" pitchFamily="34" charset="-122"/>
                 <a:cs typeface="Cambria" pitchFamily="34" charset="-120"/>
               </a:rPr>
-              <a:t>Factibilidad del proyecto</a:t>
+              <a:t>Evidencias planificadas</a:t>
             </a:r>
             <a:endParaRPr lang="en-US" sz="3000" dirty="0"/>
           </a:p>
@@ -7615,12 +7735,73 @@
         </p:nvSpPr>
         <p:spPr>
           <a:xfrm>
-            <a:off x="548640" y="1325880"/>
-            <a:ext cx="3474720" cy="2011680"/>
+            <a:off x="548640" y="1280160"/>
+            <a:ext cx="5349240" cy="502920"/>
           </a:xfrm>
           <a:prstGeom prst="roundRect">
             <a:avLst>
-              <a:gd name="adj" fmla="val 4091"/>
+              <a:gd name="adj" fmla="val 12727"/>
+            </a:avLst>
+          </a:prstGeom>
+          <a:solidFill>
+            <a:srgbClr val="028090"/>
+          </a:solidFill>
+          <a:ln/>
+        </p:spPr>
+      </p:sp>
+      <p:sp>
+        <p:nvSpPr>
+          <p:cNvPr id="4" name="Text 2"/>
+          <p:cNvSpPr txBox="1"/>
+          <p:nvPr/>
+        </p:nvSpPr>
+        <p:spPr>
+          <a:xfrm>
+            <a:off x="548640" y="1280160"/>
+            <a:ext cx="5349240" cy="502920"/>
+          </a:xfrm>
+          <a:prstGeom prst="rect">
+            <a:avLst/>
+          </a:prstGeom>
+          <a:noFill/>
+          <a:ln/>
+        </p:spPr>
+        <p:txBody>
+          <a:bodyPr wrap="square" lIns="0" tIns="0" rIns="0" bIns="0" rtlCol="0" anchor="ctr"/>
+          <a:lstStyle/>
+          <a:p>
+            <a:pPr algn="ctr" indent="0" marL="0">
+              <a:buNone/>
+            </a:pPr>
+            <a:r>
+              <a:rPr lang="en-US" sz="1500" b="1" dirty="0">
+                <a:solidFill>
+                  <a:srgbClr val="FFFFFF"/>
+                </a:solidFill>
+                <a:latin typeface="Calibri" pitchFamily="34" charset="0"/>
+                <a:ea typeface="Calibri" pitchFamily="34" charset="-122"/>
+                <a:cs typeface="Calibri" pitchFamily="34" charset="-120"/>
+              </a:rPr>
+              <a:t>De avance</a:t>
+            </a:r>
+            <a:endParaRPr lang="en-US" sz="1500" dirty="0"/>
+          </a:p>
+        </p:txBody>
+      </p:sp>
+      <p:sp>
+        <p:nvSpPr>
+          <p:cNvPr id="5" name="Shape 3"/>
+          <p:cNvSpPr/>
+          <p:nvPr/>
+        </p:nvSpPr>
+        <p:spPr>
+          <a:xfrm>
+            <a:off x="548640" y="1965960"/>
+            <a:ext cx="5349240" cy="1783080"/>
+          </a:xfrm>
+          <a:prstGeom prst="roundRect">
+            <a:avLst>
+              <a:gd name="adj" fmla="val 4103"/>
             </a:avLst>
           </a:prstGeom>
           <a:solidFill>
@@ -7643,73 +7824,14 @@
       </p:sp>
       <p:sp>
         <p:nvSpPr>
-          <p:cNvPr id="4" name="Shape 2"/>
-          <p:cNvSpPr/>
-          <p:nvPr/>
-        </p:nvSpPr>
-        <p:spPr>
-          <a:xfrm>
-            <a:off x="731520" y="1508760"/>
-            <a:ext cx="502920" cy="502920"/>
-          </a:xfrm>
-          <a:prstGeom prst="ellipse">
-            <a:avLst/>
-          </a:prstGeom>
-          <a:solidFill>
-            <a:srgbClr val="028090"/>
-          </a:solidFill>
-          <a:ln/>
-        </p:spPr>
-      </p:sp>
-      <p:sp>
-        <p:nvSpPr>
-          <p:cNvPr id="5" name="Text 3"/>
-          <p:cNvSpPr txBox="1"/>
-          <p:nvPr/>
-        </p:nvSpPr>
-        <p:spPr>
-          <a:xfrm>
-            <a:off x="731520" y="1508760"/>
-            <a:ext cx="502920" cy="502920"/>
-          </a:xfrm>
-          <a:prstGeom prst="rect">
-            <a:avLst/>
-          </a:prstGeom>
-          <a:noFill/>
-          <a:ln/>
-        </p:spPr>
-        <p:txBody>
-          <a:bodyPr wrap="square" lIns="0" tIns="0" rIns="0" bIns="0" rtlCol="0" anchor="ctr"/>
-          <a:lstStyle/>
-          <a:p>
-            <a:pPr algn="ctr" indent="0" marL="0">
-              <a:buNone/>
-            </a:pPr>
-            <a:r>
-              <a:rPr lang="en-US" sz="1800" dirty="0">
-                <a:solidFill>
-                  <a:srgbClr val="000000"/>
-                </a:solidFill>
-                <a:latin typeface="Calibri" pitchFamily="34" charset="0"/>
-                <a:ea typeface="Calibri" pitchFamily="34" charset="-122"/>
-                <a:cs typeface="Calibri" pitchFamily="34" charset="-120"/>
-              </a:rPr>
-              <a:t>🕒</a:t>
-            </a:r>
-            <a:endParaRPr lang="en-US" sz="1800" dirty="0"/>
-          </a:p>
-        </p:txBody>
-      </p:sp>
-      <p:sp>
-        <p:nvSpPr>
           <p:cNvPr id="6" name="Text 4"/>
           <p:cNvSpPr txBox="1"/>
           <p:nvPr/>
         </p:nvSpPr>
         <p:spPr>
           <a:xfrm>
-            <a:off x="1371600" y="1527048"/>
-            <a:ext cx="2468880" cy="365760"/>
+            <a:off x="777240" y="2130552"/>
+            <a:ext cx="4892040" cy="502920"/>
           </a:xfrm>
           <a:prstGeom prst="rect">
             <a:avLst/>
@@ -7733,7 +7855,7 @@
                 <a:ea typeface="Calibri" pitchFamily="34" charset="-122"/>
                 <a:cs typeface="Calibri" pitchFamily="34" charset="-120"/>
               </a:rPr>
-              <a:t>Tiempo</a:t>
+              <a:t>Repositorio GitHub actualizado</a:t>
             </a:r>
             <a:endParaRPr lang="en-US" sz="1350" dirty="0"/>
           </a:p>
@@ -7747,8 +7869,8 @@
         </p:nvSpPr>
         <p:spPr>
           <a:xfrm>
-            <a:off x="731520" y="2148840"/>
-            <a:ext cx="3108960" cy="1097280"/>
+            <a:off x="777240" y="2624328"/>
+            <a:ext cx="4892040" cy="1005840"/>
           </a:xfrm>
           <a:prstGeom prst="rect">
             <a:avLst/>
@@ -7767,7 +7889,7 @@
               <a:buNone/>
             </a:pPr>
             <a:r>
-              <a:rPr lang="en-US" sz="1080" dirty="0">
+              <a:rPr lang="en-US" sz="1150" dirty="0">
                 <a:solidFill>
                   <a:srgbClr val="5C7A7C"/>
                 </a:solidFill>
@@ -7775,9 +7897,9 @@
                 <a:ea typeface="Calibri" pitchFamily="34" charset="-122"/>
                 <a:cs typeface="Calibri" pitchFamily="34" charset="-120"/>
               </a:rPr>
-              <a:t>18 semanas de semestre, con 11 semanas de desarrollo intensivo en Fase 2</a:t>
-            </a:r>
-            <a:endParaRPr lang="en-US" sz="1080" dirty="0"/>
+              <a:t>Código del módulo de autenticación, modelo de datos y estructura base</a:t>
+            </a:r>
+            <a:endParaRPr lang="en-US" sz="1150" dirty="0"/>
           </a:p>
         </p:txBody>
       </p:sp>
@@ -7789,12 +7911,12 @@
         </p:nvSpPr>
         <p:spPr>
           <a:xfrm>
-            <a:off x="4343400" y="1325880"/>
-            <a:ext cx="3474720" cy="2011680"/>
+            <a:off x="548640" y="3931920"/>
+            <a:ext cx="5349240" cy="1783080"/>
           </a:xfrm>
           <a:prstGeom prst="roundRect">
             <a:avLst>
-              <a:gd name="adj" fmla="val 4091"/>
+              <a:gd name="adj" fmla="val 4103"/>
             </a:avLst>
           </a:prstGeom>
           <a:solidFill>
@@ -7817,23 +7939,42 @@
       </p:sp>
       <p:sp>
         <p:nvSpPr>
-          <p:cNvPr id="9" name="Shape 7"/>
-          <p:cNvSpPr/>
-          <p:nvPr/>
-        </p:nvSpPr>
-        <p:spPr>
-          <a:xfrm>
-            <a:off x="4526280" y="1508760"/>
-            <a:ext cx="502920" cy="502920"/>
-          </a:xfrm>
-          <a:prstGeom prst="ellipse">
-            <a:avLst/>
-          </a:prstGeom>
-          <a:solidFill>
-            <a:srgbClr val="00A896"/>
-          </a:solidFill>
-          <a:ln/>
-        </p:spPr>
+          <p:cNvPr id="9" name="Text 7"/>
+          <p:cNvSpPr txBox="1"/>
+          <p:nvPr/>
+        </p:nvSpPr>
+        <p:spPr>
+          <a:xfrm>
+            <a:off x="777240" y="4096512"/>
+            <a:ext cx="4892040" cy="502920"/>
+          </a:xfrm>
+          <a:prstGeom prst="rect">
+            <a:avLst/>
+          </a:prstGeom>
+          <a:noFill/>
+          <a:ln/>
+        </p:spPr>
+        <p:txBody>
+          <a:bodyPr wrap="square" lIns="0" tIns="0" rIns="0" bIns="0" rtlCol="0" anchor="ctr"/>
+          <a:lstStyle/>
+          <a:p>
+            <a:pPr indent="0" marL="0">
+              <a:buNone/>
+            </a:pPr>
+            <a:r>
+              <a:rPr lang="en-US" sz="1350" b="1" dirty="0">
+                <a:solidFill>
+                  <a:srgbClr val="0B2B2E"/>
+                </a:solidFill>
+                <a:latin typeface="Calibri" pitchFamily="34" charset="0"/>
+                <a:ea typeface="Calibri" pitchFamily="34" charset="-122"/>
+                <a:cs typeface="Calibri" pitchFamily="34" charset="-120"/>
+              </a:rPr>
+              <a:t>Informe de Avance Proyecto APT</a:t>
+            </a:r>
+            <a:endParaRPr lang="en-US" sz="1350" dirty="0"/>
+          </a:p>
+        </p:txBody>
       </p:sp>
       <p:sp>
         <p:nvSpPr>
@@ -7843,86 +7984,8 @@
         </p:nvSpPr>
         <p:spPr>
           <a:xfrm>
-            <a:off x="4526280" y="1508760"/>
-            <a:ext cx="502920" cy="502920"/>
-          </a:xfrm>
-          <a:prstGeom prst="rect">
-            <a:avLst/>
-          </a:prstGeom>
-          <a:noFill/>
-          <a:ln/>
-        </p:spPr>
-        <p:txBody>
-          <a:bodyPr wrap="square" lIns="0" tIns="0" rIns="0" bIns="0" rtlCol="0" anchor="ctr"/>
-          <a:lstStyle/>
-          <a:p>
-            <a:pPr algn="ctr" indent="0" marL="0">
-              <a:buNone/>
-            </a:pPr>
-            <a:r>
-              <a:rPr lang="en-US" sz="1800" dirty="0">
-                <a:solidFill>
-                  <a:srgbClr val="000000"/>
-                </a:solidFill>
-                <a:latin typeface="Calibri" pitchFamily="34" charset="0"/>
-                <a:ea typeface="Calibri" pitchFamily="34" charset="-122"/>
-                <a:cs typeface="Calibri" pitchFamily="34" charset="-120"/>
-              </a:rPr>
-              <a:t>🎓</a:t>
-            </a:r>
-            <a:endParaRPr lang="en-US" sz="1800" dirty="0"/>
-          </a:p>
-        </p:txBody>
-      </p:sp>
-      <p:sp>
-        <p:nvSpPr>
-          <p:cNvPr id="11" name="Text 9"/>
-          <p:cNvSpPr txBox="1"/>
-          <p:nvPr/>
-        </p:nvSpPr>
-        <p:spPr>
-          <a:xfrm>
-            <a:off x="5166360" y="1527048"/>
-            <a:ext cx="2468880" cy="365760"/>
-          </a:xfrm>
-          <a:prstGeom prst="rect">
-            <a:avLst/>
-          </a:prstGeom>
-          <a:noFill/>
-          <a:ln/>
-        </p:spPr>
-        <p:txBody>
-          <a:bodyPr wrap="square" lIns="0" tIns="0" rIns="0" bIns="0" rtlCol="0" anchor="ctr"/>
-          <a:lstStyle/>
-          <a:p>
-            <a:pPr indent="0" marL="0">
-              <a:buNone/>
-            </a:pPr>
-            <a:r>
-              <a:rPr lang="en-US" sz="1350" b="1" dirty="0">
-                <a:solidFill>
-                  <a:srgbClr val="0B2B2E"/>
-                </a:solidFill>
-                <a:latin typeface="Calibri" pitchFamily="34" charset="0"/>
-                <a:ea typeface="Calibri" pitchFamily="34" charset="-122"/>
-                <a:cs typeface="Calibri" pitchFamily="34" charset="-120"/>
-              </a:rPr>
-              <a:t>Horas asignadas</a:t>
-            </a:r>
-            <a:endParaRPr lang="en-US" sz="1350" dirty="0"/>
-          </a:p>
-        </p:txBody>
-      </p:sp>
-      <p:sp>
-        <p:nvSpPr>
-          <p:cNvPr id="12" name="Text 10"/>
-          <p:cNvSpPr txBox="1"/>
-          <p:nvPr/>
-        </p:nvSpPr>
-        <p:spPr>
-          <a:xfrm>
-            <a:off x="4526280" y="2148840"/>
-            <a:ext cx="3108960" cy="1097280"/>
+            <a:off x="777240" y="4590288"/>
+            <a:ext cx="4892040" cy="1005840"/>
           </a:xfrm>
           <a:prstGeom prst="rect">
             <a:avLst/>
@@ -7941,7 +8004,7 @@
               <a:buNone/>
             </a:pPr>
             <a:r>
-              <a:rPr lang="en-US" sz="1080" dirty="0">
+              <a:rPr lang="en-US" sz="1150" dirty="0">
                 <a:solidFill>
                   <a:srgbClr val="5C7A7C"/>
                 </a:solidFill>
@@ -7949,9 +8012,70 @@
                 <a:ea typeface="Calibri" pitchFamily="34" charset="-122"/>
                 <a:cs typeface="Calibri" pitchFamily="34" charset="-120"/>
               </a:rPr>
-              <a:t>CAPSTONE: 20 créditos (10 trabajo docente + 10 trabajo autónomo)</a:t>
-            </a:r>
-            <a:endParaRPr lang="en-US" sz="1080" dirty="0"/>
+              <a:t>Resumen del estado de desarrollo y objetivos/metodología ajustados</a:t>
+            </a:r>
+            <a:endParaRPr lang="en-US" sz="1150" dirty="0"/>
+          </a:p>
+        </p:txBody>
+      </p:sp>
+      <p:sp>
+        <p:nvSpPr>
+          <p:cNvPr id="11" name="Shape 9"/>
+          <p:cNvSpPr/>
+          <p:nvPr/>
+        </p:nvSpPr>
+        <p:spPr>
+          <a:xfrm>
+            <a:off x="6263640" y="1280160"/>
+            <a:ext cx="5349240" cy="502920"/>
+          </a:xfrm>
+          <a:prstGeom prst="roundRect">
+            <a:avLst>
+              <a:gd name="adj" fmla="val 12727"/>
+            </a:avLst>
+          </a:prstGeom>
+          <a:solidFill>
+            <a:srgbClr val="00A896"/>
+          </a:solidFill>
+          <a:ln/>
+        </p:spPr>
+      </p:sp>
+      <p:sp>
+        <p:nvSpPr>
+          <p:cNvPr id="12" name="Text 10"/>
+          <p:cNvSpPr txBox="1"/>
+          <p:nvPr/>
+        </p:nvSpPr>
+        <p:spPr>
+          <a:xfrm>
+            <a:off x="6263640" y="1280160"/>
+            <a:ext cx="5349240" cy="502920"/>
+          </a:xfrm>
+          <a:prstGeom prst="rect">
+            <a:avLst/>
+          </a:prstGeom>
+          <a:noFill/>
+          <a:ln/>
+        </p:spPr>
+        <p:txBody>
+          <a:bodyPr wrap="square" lIns="0" tIns="0" rIns="0" bIns="0" rtlCol="0" anchor="ctr"/>
+          <a:lstStyle/>
+          <a:p>
+            <a:pPr algn="ctr" indent="0" marL="0">
+              <a:buNone/>
+            </a:pPr>
+            <a:r>
+              <a:rPr lang="en-US" sz="1500" b="1" dirty="0">
+                <a:solidFill>
+                  <a:srgbClr val="FFFFFF"/>
+                </a:solidFill>
+                <a:latin typeface="Calibri" pitchFamily="34" charset="0"/>
+                <a:ea typeface="Calibri" pitchFamily="34" charset="-122"/>
+                <a:cs typeface="Calibri" pitchFamily="34" charset="-120"/>
+              </a:rPr>
+              <a:t>Finales</a:t>
+            </a:r>
+            <a:endParaRPr lang="en-US" sz="1500" dirty="0"/>
           </a:p>
         </p:txBody>
       </p:sp>
@@ -7963,12 +8087,12 @@
         </p:nvSpPr>
         <p:spPr>
           <a:xfrm>
-            <a:off x="8138160" y="1325880"/>
-            <a:ext cx="3474720" cy="2011680"/>
+            <a:off x="6263640" y="1965960"/>
+            <a:ext cx="5349240" cy="1783080"/>
           </a:xfrm>
           <a:prstGeom prst="roundRect">
             <a:avLst>
-              <a:gd name="adj" fmla="val 4091"/>
+              <a:gd name="adj" fmla="val 4103"/>
             </a:avLst>
           </a:prstGeom>
           <a:solidFill>
@@ -7991,23 +8115,42 @@
       </p:sp>
       <p:sp>
         <p:nvSpPr>
-          <p:cNvPr id="14" name="Shape 12"/>
-          <p:cNvSpPr/>
-          <p:nvPr/>
-        </p:nvSpPr>
-        <p:spPr>
-          <a:xfrm>
-            <a:off x="8321040" y="1508760"/>
-            <a:ext cx="502920" cy="502920"/>
-          </a:xfrm>
-          <a:prstGeom prst="ellipse">
-            <a:avLst/>
-          </a:prstGeom>
-          <a:solidFill>
-            <a:srgbClr val="02C39A"/>
-          </a:solidFill>
-          <a:ln/>
-        </p:spPr>
+          <p:cNvPr id="14" name="Text 12"/>
+          <p:cNvSpPr txBox="1"/>
+          <p:nvPr/>
+        </p:nvSpPr>
+        <p:spPr>
+          <a:xfrm>
+            <a:off x="6492240" y="2130552"/>
+            <a:ext cx="4892040" cy="502920"/>
+          </a:xfrm>
+          <a:prstGeom prst="rect">
+            <a:avLst/>
+          </a:prstGeom>
+          <a:noFill/>
+          <a:ln/>
+        </p:spPr>
+        <p:txBody>
+          <a:bodyPr wrap="square" lIns="0" tIns="0" rIns="0" bIns="0" rtlCol="0" anchor="ctr"/>
+          <a:lstStyle/>
+          <a:p>
+            <a:pPr indent="0" marL="0">
+              <a:buNone/>
+            </a:pPr>
+            <a:r>
+              <a:rPr lang="en-US" sz="1350" b="1" dirty="0">
+                <a:solidFill>
+                  <a:srgbClr val="0B2B2E"/>
+                </a:solidFill>
+                <a:latin typeface="Calibri" pitchFamily="34" charset="0"/>
+                <a:ea typeface="Calibri" pitchFamily="34" charset="-122"/>
+                <a:cs typeface="Calibri" pitchFamily="34" charset="-120"/>
+              </a:rPr>
+              <a:t>Aplicación funcional + backend (Docker)</a:t>
+            </a:r>
+            <a:endParaRPr lang="en-US" sz="1350" dirty="0"/>
+          </a:p>
+        </p:txBody>
       </p:sp>
       <p:sp>
         <p:nvSpPr>
@@ -8017,86 +8160,8 @@
         </p:nvSpPr>
         <p:spPr>
           <a:xfrm>
-            <a:off x="8321040" y="1508760"/>
-            <a:ext cx="502920" cy="502920"/>
-          </a:xfrm>
-          <a:prstGeom prst="rect">
-            <a:avLst/>
-          </a:prstGeom>
-          <a:noFill/>
-          <a:ln/>
-        </p:spPr>
-        <p:txBody>
-          <a:bodyPr wrap="square" lIns="0" tIns="0" rIns="0" bIns="0" rtlCol="0" anchor="ctr"/>
-          <a:lstStyle/>
-          <a:p>
-            <a:pPr algn="ctr" indent="0" marL="0">
-              <a:buNone/>
-            </a:pPr>
-            <a:r>
-              <a:rPr lang="en-US" sz="1800" dirty="0">
-                <a:solidFill>
-                  <a:srgbClr val="000000"/>
-                </a:solidFill>
-                <a:latin typeface="Calibri" pitchFamily="34" charset="0"/>
-                <a:ea typeface="Calibri" pitchFamily="34" charset="-122"/>
-                <a:cs typeface="Calibri" pitchFamily="34" charset="-120"/>
-              </a:rPr>
-              <a:t>🧰</a:t>
-            </a:r>
-            <a:endParaRPr lang="en-US" sz="1800" dirty="0"/>
-          </a:p>
-        </p:txBody>
-      </p:sp>
-      <p:sp>
-        <p:nvSpPr>
-          <p:cNvPr id="16" name="Text 14"/>
-          <p:cNvSpPr txBox="1"/>
-          <p:nvPr/>
-        </p:nvSpPr>
-        <p:spPr>
-          <a:xfrm>
-            <a:off x="8961120" y="1527048"/>
-            <a:ext cx="2468880" cy="365760"/>
-          </a:xfrm>
-          <a:prstGeom prst="rect">
-            <a:avLst/>
-          </a:prstGeom>
-          <a:noFill/>
-          <a:ln/>
-        </p:spPr>
-        <p:txBody>
-          <a:bodyPr wrap="square" lIns="0" tIns="0" rIns="0" bIns="0" rtlCol="0" anchor="ctr"/>
-          <a:lstStyle/>
-          <a:p>
-            <a:pPr indent="0" marL="0">
-              <a:buNone/>
-            </a:pPr>
-            <a:r>
-              <a:rPr lang="en-US" sz="1350" b="1" dirty="0">
-                <a:solidFill>
-                  <a:srgbClr val="0B2B2E"/>
-                </a:solidFill>
-                <a:latin typeface="Calibri" pitchFamily="34" charset="0"/>
-                <a:ea typeface="Calibri" pitchFamily="34" charset="-122"/>
-                <a:cs typeface="Calibri" pitchFamily="34" charset="-120"/>
-              </a:rPr>
-              <a:t>Materiales</a:t>
-            </a:r>
-            <a:endParaRPr lang="en-US" sz="1350" dirty="0"/>
-          </a:p>
-        </p:txBody>
-      </p:sp>
-      <p:sp>
-        <p:nvSpPr>
-          <p:cNvPr id="17" name="Text 15"/>
-          <p:cNvSpPr txBox="1"/>
-          <p:nvPr/>
-        </p:nvSpPr>
-        <p:spPr>
-          <a:xfrm>
-            <a:off x="8321040" y="2148840"/>
-            <a:ext cx="3108960" cy="1097280"/>
+            <a:off x="6492240" y="2624328"/>
+            <a:ext cx="4892040" cy="1005840"/>
           </a:xfrm>
           <a:prstGeom prst="rect">
             <a:avLst/>
@@ -8115,7 +8180,7 @@
               <a:buNone/>
             </a:pPr>
             <a:r>
-              <a:rPr lang="en-US" sz="1080" dirty="0">
+              <a:rPr lang="en-US" sz="1150" dirty="0">
                 <a:solidFill>
                   <a:srgbClr val="5C7A7C"/>
                 </a:solidFill>
@@ -8123,26 +8188,26 @@
                 <a:ea typeface="Calibri" pitchFamily="34" charset="-122"/>
                 <a:cs typeface="Calibri" pitchFamily="34" charset="-120"/>
               </a:rPr>
-              <a:t>Equipos propios y librerías open source (Flutter, FastAPI, PostgreSQL, Docker) — sin costo de licencias</a:t>
-            </a:r>
-            <a:endParaRPr lang="en-US" sz="1080" dirty="0"/>
-          </a:p>
-        </p:txBody>
-      </p:sp>
-      <p:sp>
-        <p:nvSpPr>
-          <p:cNvPr id="18" name="Shape 16"/>
+              <a:t>Módulos del MVP integrados y operativos</a:t>
+            </a:r>
+            <a:endParaRPr lang="en-US" sz="1150" dirty="0"/>
+          </a:p>
+        </p:txBody>
+      </p:sp>
+      <p:sp>
+        <p:nvSpPr>
+          <p:cNvPr id="16" name="Shape 14"/>
           <p:cNvSpPr/>
           <p:nvPr/>
         </p:nvSpPr>
         <p:spPr>
           <a:xfrm>
-            <a:off x="548640" y="3657600"/>
-            <a:ext cx="3474720" cy="2011680"/>
+            <a:off x="6263640" y="3931920"/>
+            <a:ext cx="5349240" cy="1783080"/>
           </a:xfrm>
           <a:prstGeom prst="roundRect">
             <a:avLst>
-              <a:gd name="adj" fmla="val 4091"/>
+              <a:gd name="adj" fmla="val 4103"/>
             </a:avLst>
           </a:prstGeom>
           <a:solidFill>
@@ -8165,73 +8230,14 @@
       </p:sp>
       <p:sp>
         <p:nvSpPr>
-          <p:cNvPr id="19" name="Shape 17"/>
-          <p:cNvSpPr/>
-          <p:nvPr/>
-        </p:nvSpPr>
-        <p:spPr>
-          <a:xfrm>
-            <a:off x="731520" y="3840480"/>
-            <a:ext cx="502920" cy="502920"/>
-          </a:xfrm>
-          <a:prstGeom prst="ellipse">
-            <a:avLst/>
-          </a:prstGeom>
-          <a:solidFill>
-            <a:srgbClr val="028090"/>
-          </a:solidFill>
-          <a:ln/>
-        </p:spPr>
-      </p:sp>
-      <p:sp>
-        <p:nvSpPr>
-          <p:cNvPr id="20" name="Text 18"/>
-          <p:cNvSpPr txBox="1"/>
-          <p:nvPr/>
-        </p:nvSpPr>
-        <p:spPr>
-          <a:xfrm>
-            <a:off x="731520" y="3840480"/>
-            <a:ext cx="502920" cy="502920"/>
-          </a:xfrm>
-          <a:prstGeom prst="rect">
-            <a:avLst/>
-          </a:prstGeom>
-          <a:noFill/>
-          <a:ln/>
-        </p:spPr>
-        <p:txBody>
-          <a:bodyPr wrap="square" lIns="0" tIns="0" rIns="0" bIns="0" rtlCol="0" anchor="ctr"/>
-          <a:lstStyle/>
-          <a:p>
-            <a:pPr algn="ctr" indent="0" marL="0">
-              <a:buNone/>
-            </a:pPr>
-            <a:r>
-              <a:rPr lang="en-US" sz="1800" dirty="0">
-                <a:solidFill>
-                  <a:srgbClr val="000000"/>
-                </a:solidFill>
-                <a:latin typeface="Calibri" pitchFamily="34" charset="0"/>
-                <a:ea typeface="Calibri" pitchFamily="34" charset="-122"/>
-                <a:cs typeface="Calibri" pitchFamily="34" charset="-120"/>
-              </a:rPr>
-              <a:t>✅</a:t>
-            </a:r>
-            <a:endParaRPr lang="en-US" sz="1800" dirty="0"/>
-          </a:p>
-        </p:txBody>
-      </p:sp>
-      <p:sp>
-        <p:nvSpPr>
-          <p:cNvPr id="21" name="Text 19"/>
-          <p:cNvSpPr txBox="1"/>
-          <p:nvPr/>
-        </p:nvSpPr>
-        <p:spPr>
-          <a:xfrm>
-            <a:off x="1371600" y="3858768"/>
-            <a:ext cx="2468880" cy="365760"/>
+          <p:cNvPr id="17" name="Text 15"/>
+          <p:cNvSpPr txBox="1"/>
+          <p:nvPr/>
+        </p:nvSpPr>
+        <p:spPr>
+          <a:xfrm>
+            <a:off x="6492240" y="4096512"/>
+            <a:ext cx="4892040" cy="502920"/>
           </a:xfrm>
           <a:prstGeom prst="rect">
             <a:avLst/>
@@ -8255,7 +8261,7 @@
                 <a:ea typeface="Calibri" pitchFamily="34" charset="-122"/>
                 <a:cs typeface="Calibri" pitchFamily="34" charset="-120"/>
               </a:rPr>
-              <a:t>A favor</a:t>
+              <a:t>Informe Final + manual técnico + README</a:t>
             </a:r>
             <a:endParaRPr lang="en-US" sz="1350" dirty="0"/>
           </a:p>
@@ -8263,14 +8269,14 @@
       </p:sp>
       <p:sp>
         <p:nvSpPr>
-          <p:cNvPr id="22" name="Text 20"/>
-          <p:cNvSpPr txBox="1"/>
-          <p:nvPr/>
-        </p:nvSpPr>
-        <p:spPr>
-          <a:xfrm>
-            <a:off x="731520" y="4480560"/>
-            <a:ext cx="3108960" cy="1097280"/>
+          <p:cNvPr id="18" name="Text 16"/>
+          <p:cNvSpPr txBox="1"/>
+          <p:nvPr/>
+        </p:nvSpPr>
+        <p:spPr>
+          <a:xfrm>
+            <a:off x="6492240" y="4590288"/>
+            <a:ext cx="4892040" cy="1005840"/>
           </a:xfrm>
           <a:prstGeom prst="rect">
             <a:avLst/>
@@ -8289,7 +8295,7 @@
               <a:buNone/>
             </a:pPr>
             <a:r>
-              <a:rPr lang="en-US" sz="1080" dirty="0">
+              <a:rPr lang="en-US" sz="1150" dirty="0">
                 <a:solidFill>
                   <a:srgbClr val="5C7A7C"/>
                 </a:solidFill>
@@ -8297,21 +8303,209 @@
                 <a:ea typeface="Calibri" pitchFamily="34" charset="-122"/>
                 <a:cs typeface="Calibri" pitchFamily="34" charset="-120"/>
               </a:rPr>
-              <a:t>El equipo ya maneja las tecnologías definidas y cuenta con roles claros por módulo</a:t>
-            </a:r>
-            <a:endParaRPr lang="en-US" sz="1080" dirty="0"/>
-          </a:p>
-        </p:txBody>
-      </p:sp>
-      <p:sp>
-        <p:nvSpPr>
-          <p:cNvPr id="23" name="Shape 21"/>
+              <a:t>Documentación completa, arquitectura y despliegue</a:t>
+            </a:r>
+            <a:endParaRPr lang="en-US" sz="1150" dirty="0"/>
+          </a:p>
+        </p:txBody>
+      </p:sp>
+      <p:sp>
+        <p:nvSpPr>
+          <p:cNvPr id="19" name="Text 17"/>
+          <p:cNvSpPr txBox="1"/>
+          <p:nvPr/>
+        </p:nvSpPr>
+        <p:spPr>
+          <a:xfrm>
+            <a:off x="548640" y="5989320"/>
+            <a:ext cx="11064240" cy="365760"/>
+          </a:xfrm>
+          <a:prstGeom prst="rect">
+            <a:avLst/>
+          </a:prstGeom>
+          <a:noFill/>
+          <a:ln/>
+        </p:spPr>
+        <p:txBody>
+          <a:bodyPr wrap="square" lIns="0" tIns="0" rIns="0" bIns="0" rtlCol="0" anchor="ctr"/>
+          <a:lstStyle/>
+          <a:p>
+            <a:pPr indent="0" marL="0">
+              <a:buNone/>
+            </a:pPr>
+            <a:r>
+              <a:rPr lang="en-US" sz="1100" i="1" dirty="0">
+                <a:solidFill>
+                  <a:srgbClr val="5C7A7C"/>
+                </a:solidFill>
+                <a:latin typeface="Calibri" pitchFamily="34" charset="0"/>
+                <a:ea typeface="Calibri" pitchFamily="34" charset="-122"/>
+                <a:cs typeface="Calibri" pitchFamily="34" charset="-120"/>
+              </a:rPr>
+              <a:t>En Fase 1 el proyecto está en etapa de definición y planificación; los indicadores de implementación se evidenciarán en Fase 2.</a:t>
+            </a:r>
+            <a:endParaRPr lang="en-US" sz="1100" dirty="0"/>
+          </a:p>
+        </p:txBody>
+      </p:sp>
+      <p:sp>
+        <p:nvSpPr>
+          <p:cNvPr id="20" name="Text 18"/>
+          <p:cNvSpPr txBox="1"/>
+          <p:nvPr/>
+        </p:nvSpPr>
+        <p:spPr>
+          <a:xfrm>
+            <a:off x="457200" y="6510528"/>
+            <a:ext cx="7315200" cy="274320"/>
+          </a:xfrm>
+          <a:prstGeom prst="rect">
+            <a:avLst/>
+          </a:prstGeom>
+          <a:noFill/>
+          <a:ln/>
+        </p:spPr>
+        <p:txBody>
+          <a:bodyPr wrap="square" lIns="0" tIns="0" rIns="0" bIns="0" rtlCol="0" anchor="ctr"/>
+          <a:lstStyle/>
+          <a:p>
+            <a:pPr algn="l" indent="0" marL="0">
+              <a:buNone/>
+            </a:pPr>
+            <a:r>
+              <a:rPr lang="en-US" sz="900" dirty="0">
+                <a:solidFill>
+                  <a:srgbClr val="5C7A7C"/>
+                </a:solidFill>
+                <a:latin typeface="Calibri" pitchFamily="34" charset="0"/>
+                <a:ea typeface="Calibri" pitchFamily="34" charset="-122"/>
+                <a:cs typeface="Calibri" pitchFamily="34" charset="-120"/>
+              </a:rPr>
+              <a:t>Perfil Médico+  ·  Capstone_005D · Grupo 7  ·  PTY4614</a:t>
+            </a:r>
+            <a:endParaRPr lang="en-US" sz="900" dirty="0"/>
+          </a:p>
+        </p:txBody>
+      </p:sp>
+      <p:sp>
+        <p:nvSpPr>
+          <p:cNvPr id="21" name="Text 19"/>
+          <p:cNvSpPr txBox="1"/>
+          <p:nvPr/>
+        </p:nvSpPr>
+        <p:spPr>
+          <a:xfrm>
+            <a:off x="11521440" y="6510528"/>
+            <a:ext cx="457200" cy="274320"/>
+          </a:xfrm>
+          <a:prstGeom prst="rect">
+            <a:avLst/>
+          </a:prstGeom>
+          <a:noFill/>
+          <a:ln/>
+        </p:spPr>
+        <p:txBody>
+          <a:bodyPr wrap="square" lIns="0" tIns="0" rIns="0" bIns="0" rtlCol="0" anchor="ctr"/>
+          <a:lstStyle/>
+          <a:p>
+            <a:pPr algn="r" indent="0" marL="0">
+              <a:buNone/>
+            </a:pPr>
+            <a:r>
+              <a:rPr lang="en-US" sz="900" dirty="0">
+                <a:solidFill>
+                  <a:srgbClr val="5C7A7C"/>
+                </a:solidFill>
+                <a:latin typeface="Calibri" pitchFamily="34" charset="0"/>
+                <a:ea typeface="Calibri" pitchFamily="34" charset="-122"/>
+                <a:cs typeface="Calibri" pitchFamily="34" charset="-120"/>
+              </a:rPr>
+              <a:t>14</a:t>
+            </a:r>
+            <a:endParaRPr lang="en-US" sz="900" dirty="0"/>
+          </a:p>
+        </p:txBody>
+      </p:sp>
+    </p:spTree>
+  </p:cSld>
+  <p:clrMapOvr>
+    <a:masterClrMapping/>
+  </p:clrMapOvr>
+</p:sld>
+</file>
+
+<file path=ppt/slides/slide15.xml><?xml version="1.0" encoding="utf-8"?>
+<p:sld xmlns:a="http://schemas.openxmlformats.org/drawingml/2006/main" xmlns:r="http://schemas.openxmlformats.org/officeDocument/2006/relationships" xmlns:p="http://schemas.openxmlformats.org/presentationml/2006/main">
+  <p:cSld name="Slide 15">
+    <p:bg>
+      <p:bgPr>
+        <a:solidFill>
+          <a:srgbClr val="F4FAF9"/>
+        </a:solidFill>
+      </p:bgPr>
+    </p:bg>
+    <p:spTree>
+      <p:nvGrpSpPr>
+        <p:cNvPr id="1" name=""/>
+        <p:cNvGrpSpPr/>
+        <p:nvPr/>
+      </p:nvGrpSpPr>
+      <p:grpSpPr>
+        <a:xfrm>
+          <a:off x="0" y="0"/>
+          <a:ext cx="0" cy="0"/>
+          <a:chOff x="0" y="0"/>
+          <a:chExt cx="0" cy="0"/>
+        </a:xfrm>
+      </p:grpSpPr>
+      <p:sp>
+        <p:nvSpPr>
+          <p:cNvPr id="2" name="Text 0"/>
+          <p:cNvSpPr txBox="1"/>
+          <p:nvPr/>
+        </p:nvSpPr>
+        <p:spPr>
+          <a:xfrm>
+            <a:off x="548640" y="457200"/>
+            <a:ext cx="9144000" cy="640080"/>
+          </a:xfrm>
+          <a:prstGeom prst="rect">
+            <a:avLst/>
+          </a:prstGeom>
+          <a:noFill/>
+          <a:ln/>
+        </p:spPr>
+        <p:txBody>
+          <a:bodyPr wrap="square" lIns="0" tIns="0" rIns="0" bIns="0" rtlCol="0" anchor="ctr"/>
+          <a:lstStyle/>
+          <a:p>
+            <a:pPr indent="0" marL="0">
+              <a:buNone/>
+            </a:pPr>
+            <a:r>
+              <a:rPr lang="en-US" sz="3000" b="1" dirty="0">
+                <a:solidFill>
+                  <a:srgbClr val="0B3D42"/>
+                </a:solidFill>
+                <a:latin typeface="Cambria" pitchFamily="34" charset="0"/>
+                <a:ea typeface="Cambria" pitchFamily="34" charset="-122"/>
+                <a:cs typeface="Cambria" pitchFamily="34" charset="-120"/>
+              </a:rPr>
+              <a:t>Factibilidad del proyecto</a:t>
+            </a:r>
+            <a:endParaRPr lang="en-US" sz="3000" dirty="0"/>
+          </a:p>
+        </p:txBody>
+      </p:sp>
+      <p:sp>
+        <p:nvSpPr>
+          <p:cNvPr id="3" name="Shape 1"/>
           <p:cNvSpPr/>
           <p:nvPr/>
         </p:nvSpPr>
         <p:spPr>
           <a:xfrm>
-            <a:off x="4343400" y="3657600"/>
+            <a:off x="548640" y="1325880"/>
             <a:ext cx="3474720" cy="2011680"/>
           </a:xfrm>
           <a:prstGeom prst="roundRect">
@@ -8339,33 +8533,33 @@
       </p:sp>
       <p:sp>
         <p:nvSpPr>
-          <p:cNvPr id="24" name="Shape 22"/>
+          <p:cNvPr id="4" name="Shape 2"/>
           <p:cNvSpPr/>
           <p:nvPr/>
         </p:nvSpPr>
         <p:spPr>
           <a:xfrm>
-            <a:off x="4526280" y="3840480"/>
+            <a:off x="731520" y="1508760"/>
             <a:ext cx="502920" cy="502920"/>
           </a:xfrm>
           <a:prstGeom prst="ellipse">
             <a:avLst/>
           </a:prstGeom>
           <a:solidFill>
-            <a:srgbClr val="00A896"/>
+            <a:srgbClr val="028090"/>
           </a:solidFill>
           <a:ln/>
         </p:spPr>
       </p:sp>
       <p:sp>
         <p:nvSpPr>
-          <p:cNvPr id="25" name="Text 23"/>
-          <p:cNvSpPr txBox="1"/>
-          <p:nvPr/>
-        </p:nvSpPr>
-        <p:spPr>
-          <a:xfrm>
-            <a:off x="4526280" y="3840480"/>
+          <p:cNvPr id="5" name="Text 3"/>
+          <p:cNvSpPr txBox="1"/>
+          <p:nvPr/>
+        </p:nvSpPr>
+        <p:spPr>
+          <a:xfrm>
+            <a:off x="731520" y="1508760"/>
             <a:ext cx="502920" cy="502920"/>
           </a:xfrm>
           <a:prstGeom prst="rect">
@@ -8390,7 +8584,7 @@
                 <a:ea typeface="Calibri" pitchFamily="34" charset="-122"/>
                 <a:cs typeface="Calibri" pitchFamily="34" charset="-120"/>
               </a:rPr>
-              <a:t>⚠️</a:t>
+              <a:t>🕒</a:t>
             </a:r>
             <a:endParaRPr lang="en-US" sz="1800" dirty="0"/>
           </a:p>
@@ -8398,13 +8592,13 @@
       </p:sp>
       <p:sp>
         <p:nvSpPr>
-          <p:cNvPr id="26" name="Text 24"/>
-          <p:cNvSpPr txBox="1"/>
-          <p:nvPr/>
-        </p:nvSpPr>
-        <p:spPr>
-          <a:xfrm>
-            <a:off x="5166360" y="3858768"/>
+          <p:cNvPr id="6" name="Text 4"/>
+          <p:cNvSpPr txBox="1"/>
+          <p:nvPr/>
+        </p:nvSpPr>
+        <p:spPr>
+          <a:xfrm>
+            <a:off x="1371600" y="1527048"/>
             <a:ext cx="2468880" cy="365760"/>
           </a:xfrm>
           <a:prstGeom prst="rect">
@@ -8429,7 +8623,7 @@
                 <a:ea typeface="Calibri" pitchFamily="34" charset="-122"/>
                 <a:cs typeface="Calibri" pitchFamily="34" charset="-120"/>
               </a:rPr>
-              <a:t>Riesgos</a:t>
+              <a:t>Tiempo</a:t>
             </a:r>
             <a:endParaRPr lang="en-US" sz="1350" dirty="0"/>
           </a:p>
@@ -8437,13 +8631,13 @@
       </p:sp>
       <p:sp>
         <p:nvSpPr>
-          <p:cNvPr id="27" name="Text 25"/>
-          <p:cNvSpPr txBox="1"/>
-          <p:nvPr/>
-        </p:nvSpPr>
-        <p:spPr>
-          <a:xfrm>
-            <a:off x="4526280" y="4480560"/>
+          <p:cNvPr id="7" name="Text 5"/>
+          <p:cNvSpPr txBox="1"/>
+          <p:nvPr/>
+        </p:nvSpPr>
+        <p:spPr>
+          <a:xfrm>
+            <a:off x="731520" y="2148840"/>
             <a:ext cx="3108960" cy="1097280"/>
           </a:xfrm>
           <a:prstGeom prst="rect">
@@ -8471,7 +8665,7 @@
                 <a:ea typeface="Calibri" pitchFamily="34" charset="-122"/>
                 <a:cs typeface="Calibri" pitchFamily="34" charset="-120"/>
               </a:rPr>
-              <a:t>Coordinación de horarios y curva de aprendizaje del módulo de IA</a:t>
+              <a:t>18 semanas de semestre, con 11 semanas de desarrollo intensivo en Fase 2</a:t>
             </a:r>
             <a:endParaRPr lang="en-US" sz="1080" dirty="0"/>
           </a:p>
@@ -8479,13 +8673,13 @@
       </p:sp>
       <p:sp>
         <p:nvSpPr>
-          <p:cNvPr id="28" name="Shape 26"/>
+          <p:cNvPr id="8" name="Shape 6"/>
           <p:cNvSpPr/>
           <p:nvPr/>
         </p:nvSpPr>
         <p:spPr>
           <a:xfrm>
-            <a:off x="8138160" y="3657600"/>
+            <a:off x="4343400" y="1325880"/>
             <a:ext cx="3474720" cy="2011680"/>
           </a:xfrm>
           <a:prstGeom prst="roundRect">
@@ -8513,33 +8707,33 @@
       </p:sp>
       <p:sp>
         <p:nvSpPr>
-          <p:cNvPr id="29" name="Shape 27"/>
+          <p:cNvPr id="9" name="Shape 7"/>
           <p:cNvSpPr/>
           <p:nvPr/>
         </p:nvSpPr>
         <p:spPr>
           <a:xfrm>
-            <a:off x="8321040" y="3840480"/>
+            <a:off x="4526280" y="1508760"/>
             <a:ext cx="502920" cy="502920"/>
           </a:xfrm>
           <a:prstGeom prst="ellipse">
             <a:avLst/>
           </a:prstGeom>
           <a:solidFill>
-            <a:srgbClr val="02C39A"/>
+            <a:srgbClr val="00A896"/>
           </a:solidFill>
           <a:ln/>
         </p:spPr>
       </p:sp>
       <p:sp>
         <p:nvSpPr>
-          <p:cNvPr id="30" name="Text 28"/>
-          <p:cNvSpPr txBox="1"/>
-          <p:nvPr/>
-        </p:nvSpPr>
-        <p:spPr>
-          <a:xfrm>
-            <a:off x="8321040" y="3840480"/>
+          <p:cNvPr id="10" name="Text 8"/>
+          <p:cNvSpPr txBox="1"/>
+          <p:nvPr/>
+        </p:nvSpPr>
+        <p:spPr>
+          <a:xfrm>
+            <a:off x="4526280" y="1508760"/>
             <a:ext cx="502920" cy="502920"/>
           </a:xfrm>
           <a:prstGeom prst="rect">
@@ -8564,7 +8758,7 @@
                 <a:ea typeface="Calibri" pitchFamily="34" charset="-122"/>
                 <a:cs typeface="Calibri" pitchFamily="34" charset="-120"/>
               </a:rPr>
-              <a:t>🛡️</a:t>
+              <a:t>🎓</a:t>
             </a:r>
             <a:endParaRPr lang="en-US" sz="1800" dirty="0"/>
           </a:p>
@@ -8572,13 +8766,13 @@
       </p:sp>
       <p:sp>
         <p:nvSpPr>
-          <p:cNvPr id="31" name="Text 29"/>
-          <p:cNvSpPr txBox="1"/>
-          <p:nvPr/>
-        </p:nvSpPr>
-        <p:spPr>
-          <a:xfrm>
-            <a:off x="8961120" y="3858768"/>
+          <p:cNvPr id="11" name="Text 9"/>
+          <p:cNvSpPr txBox="1"/>
+          <p:nvPr/>
+        </p:nvSpPr>
+        <p:spPr>
+          <a:xfrm>
+            <a:off x="5166360" y="1527048"/>
             <a:ext cx="2468880" cy="365760"/>
           </a:xfrm>
           <a:prstGeom prst="rect">
@@ -8603,7 +8797,7 @@
                 <a:ea typeface="Calibri" pitchFamily="34" charset="-122"/>
                 <a:cs typeface="Calibri" pitchFamily="34" charset="-120"/>
               </a:rPr>
-              <a:t>Mitigación</a:t>
+              <a:t>Horas asignadas</a:t>
             </a:r>
             <a:endParaRPr lang="en-US" sz="1350" dirty="0"/>
           </a:p>
@@ -8611,13 +8805,13 @@
       </p:sp>
       <p:sp>
         <p:nvSpPr>
-          <p:cNvPr id="32" name="Text 30"/>
-          <p:cNvSpPr txBox="1"/>
-          <p:nvPr/>
-        </p:nvSpPr>
-        <p:spPr>
-          <a:xfrm>
-            <a:off x="8321040" y="4480560"/>
+          <p:cNvPr id="12" name="Text 10"/>
+          <p:cNvSpPr txBox="1"/>
+          <p:nvPr/>
+        </p:nvSpPr>
+        <p:spPr>
+          <a:xfrm>
+            <a:off x="4526280" y="2148840"/>
             <a:ext cx="3108960" cy="1097280"/>
           </a:xfrm>
           <a:prstGeom prst="rect">
@@ -8645,6 +8839,702 @@
                 <a:ea typeface="Calibri" pitchFamily="34" charset="-122"/>
                 <a:cs typeface="Calibri" pitchFamily="34" charset="-120"/>
               </a:rPr>
+              <a:t>CAPSTONE: 20 créditos (10 trabajo docente + 10 trabajo autónomo)</a:t>
+            </a:r>
+            <a:endParaRPr lang="en-US" sz="1080" dirty="0"/>
+          </a:p>
+        </p:txBody>
+      </p:sp>
+      <p:sp>
+        <p:nvSpPr>
+          <p:cNvPr id="13" name="Shape 11"/>
+          <p:cNvSpPr/>
+          <p:nvPr/>
+        </p:nvSpPr>
+        <p:spPr>
+          <a:xfrm>
+            <a:off x="8138160" y="1325880"/>
+            <a:ext cx="3474720" cy="2011680"/>
+          </a:xfrm>
+          <a:prstGeom prst="roundRect">
+            <a:avLst>
+              <a:gd name="adj" fmla="val 4091"/>
+            </a:avLst>
+          </a:prstGeom>
+          <a:solidFill>
+            <a:srgbClr val="FFFFFF"/>
+          </a:solidFill>
+          <a:ln w="12700">
+            <a:solidFill>
+              <a:srgbClr val="DCEDEC"/>
+            </a:solidFill>
+            <a:prstDash val="solid"/>
+          </a:ln>
+          <a:effectLst>
+            <a:outerShdw sx="100000" sy="100000" kx="0" ky="0" algn="bl" rotWithShape="0" blurRad="76200" dist="25400" dir="5400000">
+              <a:srgbClr val="1F3A3C">
+                <a:alpha val="12000"/>
+              </a:srgbClr>
+            </a:outerShdw>
+          </a:effectLst>
+        </p:spPr>
+      </p:sp>
+      <p:sp>
+        <p:nvSpPr>
+          <p:cNvPr id="14" name="Shape 12"/>
+          <p:cNvSpPr/>
+          <p:nvPr/>
+        </p:nvSpPr>
+        <p:spPr>
+          <a:xfrm>
+            <a:off x="8321040" y="1508760"/>
+            <a:ext cx="502920" cy="502920"/>
+          </a:xfrm>
+          <a:prstGeom prst="ellipse">
+            <a:avLst/>
+          </a:prstGeom>
+          <a:solidFill>
+            <a:srgbClr val="02C39A"/>
+          </a:solidFill>
+          <a:ln/>
+        </p:spPr>
+      </p:sp>
+      <p:sp>
+        <p:nvSpPr>
+          <p:cNvPr id="15" name="Text 13"/>
+          <p:cNvSpPr txBox="1"/>
+          <p:nvPr/>
+        </p:nvSpPr>
+        <p:spPr>
+          <a:xfrm>
+            <a:off x="8321040" y="1508760"/>
+            <a:ext cx="502920" cy="502920"/>
+          </a:xfrm>
+          <a:prstGeom prst="rect">
+            <a:avLst/>
+          </a:prstGeom>
+          <a:noFill/>
+          <a:ln/>
+        </p:spPr>
+        <p:txBody>
+          <a:bodyPr wrap="square" lIns="0" tIns="0" rIns="0" bIns="0" rtlCol="0" anchor="ctr"/>
+          <a:lstStyle/>
+          <a:p>
+            <a:pPr algn="ctr" indent="0" marL="0">
+              <a:buNone/>
+            </a:pPr>
+            <a:r>
+              <a:rPr lang="en-US" sz="1800" dirty="0">
+                <a:solidFill>
+                  <a:srgbClr val="000000"/>
+                </a:solidFill>
+                <a:latin typeface="Calibri" pitchFamily="34" charset="0"/>
+                <a:ea typeface="Calibri" pitchFamily="34" charset="-122"/>
+                <a:cs typeface="Calibri" pitchFamily="34" charset="-120"/>
+              </a:rPr>
+              <a:t>🧰</a:t>
+            </a:r>
+            <a:endParaRPr lang="en-US" sz="1800" dirty="0"/>
+          </a:p>
+        </p:txBody>
+      </p:sp>
+      <p:sp>
+        <p:nvSpPr>
+          <p:cNvPr id="16" name="Text 14"/>
+          <p:cNvSpPr txBox="1"/>
+          <p:nvPr/>
+        </p:nvSpPr>
+        <p:spPr>
+          <a:xfrm>
+            <a:off x="8961120" y="1527048"/>
+            <a:ext cx="2468880" cy="365760"/>
+          </a:xfrm>
+          <a:prstGeom prst="rect">
+            <a:avLst/>
+          </a:prstGeom>
+          <a:noFill/>
+          <a:ln/>
+        </p:spPr>
+        <p:txBody>
+          <a:bodyPr wrap="square" lIns="0" tIns="0" rIns="0" bIns="0" rtlCol="0" anchor="ctr"/>
+          <a:lstStyle/>
+          <a:p>
+            <a:pPr indent="0" marL="0">
+              <a:buNone/>
+            </a:pPr>
+            <a:r>
+              <a:rPr lang="en-US" sz="1350" b="1" dirty="0">
+                <a:solidFill>
+                  <a:srgbClr val="0B2B2E"/>
+                </a:solidFill>
+                <a:latin typeface="Calibri" pitchFamily="34" charset="0"/>
+                <a:ea typeface="Calibri" pitchFamily="34" charset="-122"/>
+                <a:cs typeface="Calibri" pitchFamily="34" charset="-120"/>
+              </a:rPr>
+              <a:t>Materiales</a:t>
+            </a:r>
+            <a:endParaRPr lang="en-US" sz="1350" dirty="0"/>
+          </a:p>
+        </p:txBody>
+      </p:sp>
+      <p:sp>
+        <p:nvSpPr>
+          <p:cNvPr id="17" name="Text 15"/>
+          <p:cNvSpPr txBox="1"/>
+          <p:nvPr/>
+        </p:nvSpPr>
+        <p:spPr>
+          <a:xfrm>
+            <a:off x="8321040" y="2148840"/>
+            <a:ext cx="3108960" cy="1097280"/>
+          </a:xfrm>
+          <a:prstGeom prst="rect">
+            <a:avLst/>
+          </a:prstGeom>
+          <a:noFill/>
+          <a:ln/>
+        </p:spPr>
+        <p:txBody>
+          <a:bodyPr wrap="square" lIns="0" tIns="0" rIns="0" bIns="0" rtlCol="0" anchor="ctr"/>
+          <a:lstStyle/>
+          <a:p>
+            <a:pPr indent="0" marL="0">
+              <a:lnSpc>
+                <a:spcPct val="115000"/>
+              </a:lnSpc>
+              <a:buNone/>
+            </a:pPr>
+            <a:r>
+              <a:rPr lang="en-US" sz="1080" dirty="0">
+                <a:solidFill>
+                  <a:srgbClr val="5C7A7C"/>
+                </a:solidFill>
+                <a:latin typeface="Calibri" pitchFamily="34" charset="0"/>
+                <a:ea typeface="Calibri" pitchFamily="34" charset="-122"/>
+                <a:cs typeface="Calibri" pitchFamily="34" charset="-120"/>
+              </a:rPr>
+              <a:t>Equipos propios y librerías open source (Flutter, FastAPI, PostgreSQL, Docker) — sin costo de licencias</a:t>
+            </a:r>
+            <a:endParaRPr lang="en-US" sz="1080" dirty="0"/>
+          </a:p>
+        </p:txBody>
+      </p:sp>
+      <p:sp>
+        <p:nvSpPr>
+          <p:cNvPr id="18" name="Shape 16"/>
+          <p:cNvSpPr/>
+          <p:nvPr/>
+        </p:nvSpPr>
+        <p:spPr>
+          <a:xfrm>
+            <a:off x="548640" y="3657600"/>
+            <a:ext cx="3474720" cy="2011680"/>
+          </a:xfrm>
+          <a:prstGeom prst="roundRect">
+            <a:avLst>
+              <a:gd name="adj" fmla="val 4091"/>
+            </a:avLst>
+          </a:prstGeom>
+          <a:solidFill>
+            <a:srgbClr val="FFFFFF"/>
+          </a:solidFill>
+          <a:ln w="12700">
+            <a:solidFill>
+              <a:srgbClr val="DCEDEC"/>
+            </a:solidFill>
+            <a:prstDash val="solid"/>
+          </a:ln>
+          <a:effectLst>
+            <a:outerShdw sx="100000" sy="100000" kx="0" ky="0" algn="bl" rotWithShape="0" blurRad="76200" dist="25400" dir="5400000">
+              <a:srgbClr val="1F3A3C">
+                <a:alpha val="12000"/>
+              </a:srgbClr>
+            </a:outerShdw>
+          </a:effectLst>
+        </p:spPr>
+      </p:sp>
+      <p:sp>
+        <p:nvSpPr>
+          <p:cNvPr id="19" name="Shape 17"/>
+          <p:cNvSpPr/>
+          <p:nvPr/>
+        </p:nvSpPr>
+        <p:spPr>
+          <a:xfrm>
+            <a:off x="731520" y="3840480"/>
+            <a:ext cx="502920" cy="502920"/>
+          </a:xfrm>
+          <a:prstGeom prst="ellipse">
+            <a:avLst/>
+          </a:prstGeom>
+          <a:solidFill>
+            <a:srgbClr val="028090"/>
+          </a:solidFill>
+          <a:ln/>
+        </p:spPr>
+      </p:sp>
+      <p:sp>
+        <p:nvSpPr>
+          <p:cNvPr id="20" name="Text 18"/>
+          <p:cNvSpPr txBox="1"/>
+          <p:nvPr/>
+        </p:nvSpPr>
+        <p:spPr>
+          <a:xfrm>
+            <a:off x="731520" y="3840480"/>
+            <a:ext cx="502920" cy="502920"/>
+          </a:xfrm>
+          <a:prstGeom prst="rect">
+            <a:avLst/>
+          </a:prstGeom>
+          <a:noFill/>
+          <a:ln/>
+        </p:spPr>
+        <p:txBody>
+          <a:bodyPr wrap="square" lIns="0" tIns="0" rIns="0" bIns="0" rtlCol="0" anchor="ctr"/>
+          <a:lstStyle/>
+          <a:p>
+            <a:pPr algn="ctr" indent="0" marL="0">
+              <a:buNone/>
+            </a:pPr>
+            <a:r>
+              <a:rPr lang="en-US" sz="1800" dirty="0">
+                <a:solidFill>
+                  <a:srgbClr val="000000"/>
+                </a:solidFill>
+                <a:latin typeface="Calibri" pitchFamily="34" charset="0"/>
+                <a:ea typeface="Calibri" pitchFamily="34" charset="-122"/>
+                <a:cs typeface="Calibri" pitchFamily="34" charset="-120"/>
+              </a:rPr>
+              <a:t>✅</a:t>
+            </a:r>
+            <a:endParaRPr lang="en-US" sz="1800" dirty="0"/>
+          </a:p>
+        </p:txBody>
+      </p:sp>
+      <p:sp>
+        <p:nvSpPr>
+          <p:cNvPr id="21" name="Text 19"/>
+          <p:cNvSpPr txBox="1"/>
+          <p:nvPr/>
+        </p:nvSpPr>
+        <p:spPr>
+          <a:xfrm>
+            <a:off x="1371600" y="3858768"/>
+            <a:ext cx="2468880" cy="365760"/>
+          </a:xfrm>
+          <a:prstGeom prst="rect">
+            <a:avLst/>
+          </a:prstGeom>
+          <a:noFill/>
+          <a:ln/>
+        </p:spPr>
+        <p:txBody>
+          <a:bodyPr wrap="square" lIns="0" tIns="0" rIns="0" bIns="0" rtlCol="0" anchor="ctr"/>
+          <a:lstStyle/>
+          <a:p>
+            <a:pPr indent="0" marL="0">
+              <a:buNone/>
+            </a:pPr>
+            <a:r>
+              <a:rPr lang="en-US" sz="1350" b="1" dirty="0">
+                <a:solidFill>
+                  <a:srgbClr val="0B2B2E"/>
+                </a:solidFill>
+                <a:latin typeface="Calibri" pitchFamily="34" charset="0"/>
+                <a:ea typeface="Calibri" pitchFamily="34" charset="-122"/>
+                <a:cs typeface="Calibri" pitchFamily="34" charset="-120"/>
+              </a:rPr>
+              <a:t>A favor</a:t>
+            </a:r>
+            <a:endParaRPr lang="en-US" sz="1350" dirty="0"/>
+          </a:p>
+        </p:txBody>
+      </p:sp>
+      <p:sp>
+        <p:nvSpPr>
+          <p:cNvPr id="22" name="Text 20"/>
+          <p:cNvSpPr txBox="1"/>
+          <p:nvPr/>
+        </p:nvSpPr>
+        <p:spPr>
+          <a:xfrm>
+            <a:off x="731520" y="4480560"/>
+            <a:ext cx="3108960" cy="1097280"/>
+          </a:xfrm>
+          <a:prstGeom prst="rect">
+            <a:avLst/>
+          </a:prstGeom>
+          <a:noFill/>
+          <a:ln/>
+        </p:spPr>
+        <p:txBody>
+          <a:bodyPr wrap="square" lIns="0" tIns="0" rIns="0" bIns="0" rtlCol="0" anchor="ctr"/>
+          <a:lstStyle/>
+          <a:p>
+            <a:pPr indent="0" marL="0">
+              <a:lnSpc>
+                <a:spcPct val="115000"/>
+              </a:lnSpc>
+              <a:buNone/>
+            </a:pPr>
+            <a:r>
+              <a:rPr lang="en-US" sz="1080" dirty="0">
+                <a:solidFill>
+                  <a:srgbClr val="5C7A7C"/>
+                </a:solidFill>
+                <a:latin typeface="Calibri" pitchFamily="34" charset="0"/>
+                <a:ea typeface="Calibri" pitchFamily="34" charset="-122"/>
+                <a:cs typeface="Calibri" pitchFamily="34" charset="-120"/>
+              </a:rPr>
+              <a:t>El equipo ya maneja las tecnologías definidas y cuenta con roles claros por módulo</a:t>
+            </a:r>
+            <a:endParaRPr lang="en-US" sz="1080" dirty="0"/>
+          </a:p>
+        </p:txBody>
+      </p:sp>
+      <p:sp>
+        <p:nvSpPr>
+          <p:cNvPr id="23" name="Shape 21"/>
+          <p:cNvSpPr/>
+          <p:nvPr/>
+        </p:nvSpPr>
+        <p:spPr>
+          <a:xfrm>
+            <a:off x="4343400" y="3657600"/>
+            <a:ext cx="3474720" cy="2011680"/>
+          </a:xfrm>
+          <a:prstGeom prst="roundRect">
+            <a:avLst>
+              <a:gd name="adj" fmla="val 4091"/>
+            </a:avLst>
+          </a:prstGeom>
+          <a:solidFill>
+            <a:srgbClr val="FFFFFF"/>
+          </a:solidFill>
+          <a:ln w="12700">
+            <a:solidFill>
+              <a:srgbClr val="DCEDEC"/>
+            </a:solidFill>
+            <a:prstDash val="solid"/>
+          </a:ln>
+          <a:effectLst>
+            <a:outerShdw sx="100000" sy="100000" kx="0" ky="0" algn="bl" rotWithShape="0" blurRad="76200" dist="25400" dir="5400000">
+              <a:srgbClr val="1F3A3C">
+                <a:alpha val="12000"/>
+              </a:srgbClr>
+            </a:outerShdw>
+          </a:effectLst>
+        </p:spPr>
+      </p:sp>
+      <p:sp>
+        <p:nvSpPr>
+          <p:cNvPr id="24" name="Shape 22"/>
+          <p:cNvSpPr/>
+          <p:nvPr/>
+        </p:nvSpPr>
+        <p:spPr>
+          <a:xfrm>
+            <a:off x="4526280" y="3840480"/>
+            <a:ext cx="502920" cy="502920"/>
+          </a:xfrm>
+          <a:prstGeom prst="ellipse">
+            <a:avLst/>
+          </a:prstGeom>
+          <a:solidFill>
+            <a:srgbClr val="00A896"/>
+          </a:solidFill>
+          <a:ln/>
+        </p:spPr>
+      </p:sp>
+      <p:sp>
+        <p:nvSpPr>
+          <p:cNvPr id="25" name="Text 23"/>
+          <p:cNvSpPr txBox="1"/>
+          <p:nvPr/>
+        </p:nvSpPr>
+        <p:spPr>
+          <a:xfrm>
+            <a:off x="4526280" y="3840480"/>
+            <a:ext cx="502920" cy="502920"/>
+          </a:xfrm>
+          <a:prstGeom prst="rect">
+            <a:avLst/>
+          </a:prstGeom>
+          <a:noFill/>
+          <a:ln/>
+        </p:spPr>
+        <p:txBody>
+          <a:bodyPr wrap="square" lIns="0" tIns="0" rIns="0" bIns="0" rtlCol="0" anchor="ctr"/>
+          <a:lstStyle/>
+          <a:p>
+            <a:pPr algn="ctr" indent="0" marL="0">
+              <a:buNone/>
+            </a:pPr>
+            <a:r>
+              <a:rPr lang="en-US" sz="1800" dirty="0">
+                <a:solidFill>
+                  <a:srgbClr val="000000"/>
+                </a:solidFill>
+                <a:latin typeface="Calibri" pitchFamily="34" charset="0"/>
+                <a:ea typeface="Calibri" pitchFamily="34" charset="-122"/>
+                <a:cs typeface="Calibri" pitchFamily="34" charset="-120"/>
+              </a:rPr>
+              <a:t>⚠️</a:t>
+            </a:r>
+            <a:endParaRPr lang="en-US" sz="1800" dirty="0"/>
+          </a:p>
+        </p:txBody>
+      </p:sp>
+      <p:sp>
+        <p:nvSpPr>
+          <p:cNvPr id="26" name="Text 24"/>
+          <p:cNvSpPr txBox="1"/>
+          <p:nvPr/>
+        </p:nvSpPr>
+        <p:spPr>
+          <a:xfrm>
+            <a:off x="5166360" y="3858768"/>
+            <a:ext cx="2468880" cy="365760"/>
+          </a:xfrm>
+          <a:prstGeom prst="rect">
+            <a:avLst/>
+          </a:prstGeom>
+          <a:noFill/>
+          <a:ln/>
+        </p:spPr>
+        <p:txBody>
+          <a:bodyPr wrap="square" lIns="0" tIns="0" rIns="0" bIns="0" rtlCol="0" anchor="ctr"/>
+          <a:lstStyle/>
+          <a:p>
+            <a:pPr indent="0" marL="0">
+              <a:buNone/>
+            </a:pPr>
+            <a:r>
+              <a:rPr lang="en-US" sz="1350" b="1" dirty="0">
+                <a:solidFill>
+                  <a:srgbClr val="0B2B2E"/>
+                </a:solidFill>
+                <a:latin typeface="Calibri" pitchFamily="34" charset="0"/>
+                <a:ea typeface="Calibri" pitchFamily="34" charset="-122"/>
+                <a:cs typeface="Calibri" pitchFamily="34" charset="-120"/>
+              </a:rPr>
+              <a:t>Riesgos</a:t>
+            </a:r>
+            <a:endParaRPr lang="en-US" sz="1350" dirty="0"/>
+          </a:p>
+        </p:txBody>
+      </p:sp>
+      <p:sp>
+        <p:nvSpPr>
+          <p:cNvPr id="27" name="Text 25"/>
+          <p:cNvSpPr txBox="1"/>
+          <p:nvPr/>
+        </p:nvSpPr>
+        <p:spPr>
+          <a:xfrm>
+            <a:off x="4526280" y="4480560"/>
+            <a:ext cx="3108960" cy="1097280"/>
+          </a:xfrm>
+          <a:prstGeom prst="rect">
+            <a:avLst/>
+          </a:prstGeom>
+          <a:noFill/>
+          <a:ln/>
+        </p:spPr>
+        <p:txBody>
+          <a:bodyPr wrap="square" lIns="0" tIns="0" rIns="0" bIns="0" rtlCol="0" anchor="ctr"/>
+          <a:lstStyle/>
+          <a:p>
+            <a:pPr indent="0" marL="0">
+              <a:lnSpc>
+                <a:spcPct val="115000"/>
+              </a:lnSpc>
+              <a:buNone/>
+            </a:pPr>
+            <a:r>
+              <a:rPr lang="en-US" sz="1080" dirty="0">
+                <a:solidFill>
+                  <a:srgbClr val="5C7A7C"/>
+                </a:solidFill>
+                <a:latin typeface="Calibri" pitchFamily="34" charset="0"/>
+                <a:ea typeface="Calibri" pitchFamily="34" charset="-122"/>
+                <a:cs typeface="Calibri" pitchFamily="34" charset="-120"/>
+              </a:rPr>
+              <a:t>Coordinación de horarios y curva de aprendizaje del módulo de IA</a:t>
+            </a:r>
+            <a:endParaRPr lang="en-US" sz="1080" dirty="0"/>
+          </a:p>
+        </p:txBody>
+      </p:sp>
+      <p:sp>
+        <p:nvSpPr>
+          <p:cNvPr id="28" name="Shape 26"/>
+          <p:cNvSpPr/>
+          <p:nvPr/>
+        </p:nvSpPr>
+        <p:spPr>
+          <a:xfrm>
+            <a:off x="8138160" y="3657600"/>
+            <a:ext cx="3474720" cy="2011680"/>
+          </a:xfrm>
+          <a:prstGeom prst="roundRect">
+            <a:avLst>
+              <a:gd name="adj" fmla="val 4091"/>
+            </a:avLst>
+          </a:prstGeom>
+          <a:solidFill>
+            <a:srgbClr val="FFFFFF"/>
+          </a:solidFill>
+          <a:ln w="12700">
+            <a:solidFill>
+              <a:srgbClr val="DCEDEC"/>
+            </a:solidFill>
+            <a:prstDash val="solid"/>
+          </a:ln>
+          <a:effectLst>
+            <a:outerShdw sx="100000" sy="100000" kx="0" ky="0" algn="bl" rotWithShape="0" blurRad="76200" dist="25400" dir="5400000">
+              <a:srgbClr val="1F3A3C">
+                <a:alpha val="12000"/>
+              </a:srgbClr>
+            </a:outerShdw>
+          </a:effectLst>
+        </p:spPr>
+      </p:sp>
+      <p:sp>
+        <p:nvSpPr>
+          <p:cNvPr id="29" name="Shape 27"/>
+          <p:cNvSpPr/>
+          <p:nvPr/>
+        </p:nvSpPr>
+        <p:spPr>
+          <a:xfrm>
+            <a:off x="8321040" y="3840480"/>
+            <a:ext cx="502920" cy="502920"/>
+          </a:xfrm>
+          <a:prstGeom prst="ellipse">
+            <a:avLst/>
+          </a:prstGeom>
+          <a:solidFill>
+            <a:srgbClr val="02C39A"/>
+          </a:solidFill>
+          <a:ln/>
+        </p:spPr>
+      </p:sp>
+      <p:sp>
+        <p:nvSpPr>
+          <p:cNvPr id="30" name="Text 28"/>
+          <p:cNvSpPr txBox="1"/>
+          <p:nvPr/>
+        </p:nvSpPr>
+        <p:spPr>
+          <a:xfrm>
+            <a:off x="8321040" y="3840480"/>
+            <a:ext cx="502920" cy="502920"/>
+          </a:xfrm>
+          <a:prstGeom prst="rect">
+            <a:avLst/>
+          </a:prstGeom>
+          <a:noFill/>
+          <a:ln/>
+        </p:spPr>
+        <p:txBody>
+          <a:bodyPr wrap="square" lIns="0" tIns="0" rIns="0" bIns="0" rtlCol="0" anchor="ctr"/>
+          <a:lstStyle/>
+          <a:p>
+            <a:pPr algn="ctr" indent="0" marL="0">
+              <a:buNone/>
+            </a:pPr>
+            <a:r>
+              <a:rPr lang="en-US" sz="1800" dirty="0">
+                <a:solidFill>
+                  <a:srgbClr val="000000"/>
+                </a:solidFill>
+                <a:latin typeface="Calibri" pitchFamily="34" charset="0"/>
+                <a:ea typeface="Calibri" pitchFamily="34" charset="-122"/>
+                <a:cs typeface="Calibri" pitchFamily="34" charset="-120"/>
+              </a:rPr>
+              <a:t>🛡️</a:t>
+            </a:r>
+            <a:endParaRPr lang="en-US" sz="1800" dirty="0"/>
+          </a:p>
+        </p:txBody>
+      </p:sp>
+      <p:sp>
+        <p:nvSpPr>
+          <p:cNvPr id="31" name="Text 29"/>
+          <p:cNvSpPr txBox="1"/>
+          <p:nvPr/>
+        </p:nvSpPr>
+        <p:spPr>
+          <a:xfrm>
+            <a:off x="8961120" y="3858768"/>
+            <a:ext cx="2468880" cy="365760"/>
+          </a:xfrm>
+          <a:prstGeom prst="rect">
+            <a:avLst/>
+          </a:prstGeom>
+          <a:noFill/>
+          <a:ln/>
+        </p:spPr>
+        <p:txBody>
+          <a:bodyPr wrap="square" lIns="0" tIns="0" rIns="0" bIns="0" rtlCol="0" anchor="ctr"/>
+          <a:lstStyle/>
+          <a:p>
+            <a:pPr indent="0" marL="0">
+              <a:buNone/>
+            </a:pPr>
+            <a:r>
+              <a:rPr lang="en-US" sz="1350" b="1" dirty="0">
+                <a:solidFill>
+                  <a:srgbClr val="0B2B2E"/>
+                </a:solidFill>
+                <a:latin typeface="Calibri" pitchFamily="34" charset="0"/>
+                <a:ea typeface="Calibri" pitchFamily="34" charset="-122"/>
+                <a:cs typeface="Calibri" pitchFamily="34" charset="-120"/>
+              </a:rPr>
+              <a:t>Mitigación</a:t>
+            </a:r>
+            <a:endParaRPr lang="en-US" sz="1350" dirty="0"/>
+          </a:p>
+        </p:txBody>
+      </p:sp>
+      <p:sp>
+        <p:nvSpPr>
+          <p:cNvPr id="32" name="Text 30"/>
+          <p:cNvSpPr txBox="1"/>
+          <p:nvPr/>
+        </p:nvSpPr>
+        <p:spPr>
+          <a:xfrm>
+            <a:off x="8321040" y="4480560"/>
+            <a:ext cx="3108960" cy="1097280"/>
+          </a:xfrm>
+          <a:prstGeom prst="rect">
+            <a:avLst/>
+          </a:prstGeom>
+          <a:noFill/>
+          <a:ln/>
+        </p:spPr>
+        <p:txBody>
+          <a:bodyPr wrap="square" lIns="0" tIns="0" rIns="0" bIns="0" rtlCol="0" anchor="ctr"/>
+          <a:lstStyle/>
+          <a:p>
+            <a:pPr indent="0" marL="0">
+              <a:lnSpc>
+                <a:spcPct val="115000"/>
+              </a:lnSpc>
+              <a:buNone/>
+            </a:pPr>
+            <a:r>
+              <a:rPr lang="en-US" sz="1080" dirty="0">
+                <a:solidFill>
+                  <a:srgbClr val="5C7A7C"/>
+                </a:solidFill>
+                <a:latin typeface="Calibri" pitchFamily="34" charset="0"/>
+                <a:ea typeface="Calibri" pitchFamily="34" charset="-122"/>
+                <a:cs typeface="Calibri" pitchFamily="34" charset="-120"/>
+              </a:rPr>
               <a:t>Reuniones semanales fijas; IA como funcionalidad de menor prioridad en el backlog</a:t>
             </a:r>
             <a:endParaRPr lang="en-US" sz="1080" dirty="0"/>
@@ -8723,7 +9613,7 @@
                 <a:ea typeface="Calibri" pitchFamily="34" charset="-122"/>
                 <a:cs typeface="Calibri" pitchFamily="34" charset="-120"/>
               </a:rPr>
-              <a:t>14</a:t>
+              <a:t>15</a:t>
             </a:r>
             <a:endParaRPr lang="en-US" sz="900" dirty="0"/>
           </a:p>
@@ -8737,9 +9627,9 @@
 </p:sld>
 </file>
 
-<file path=ppt/slides/slide15.xml><?xml version="1.0" encoding="utf-8"?>
+<file path=ppt/slides/slide16.xml><?xml version="1.0" encoding="utf-8"?>
 <p:sld xmlns:a="http://schemas.openxmlformats.org/drawingml/2006/main" xmlns:r="http://schemas.openxmlformats.org/officeDocument/2006/relationships" xmlns:p="http://schemas.openxmlformats.org/presentationml/2006/main">
-  <p:cSld name="Slide 15">
+  <p:cSld name="Slide 16">
     <p:bg>
       <p:bgPr>
         <a:solidFill>
